--- a/Docs/Dialog System Class Heirarchy.pptx
+++ b/Docs/Dialog System Class Heirarchy.pptx
@@ -5,7 +5,10 @@
     <p:sldMasterId id="2147483648" r:id="rId1"/>
   </p:sldMasterIdLst>
   <p:sldIdLst>
-    <p:sldId id="256" r:id="rId2"/>
+    <p:sldId id="257" r:id="rId2"/>
+    <p:sldId id="258" r:id="rId3"/>
+    <p:sldId id="256" r:id="rId4"/>
+    <p:sldId id="259" r:id="rId5"/>
   </p:sldIdLst>
   <p:sldSz cx="12192000" cy="6858000"/>
   <p:notesSz cx="6858000" cy="9144000"/>
@@ -117,10 +120,791 @@
             <a:srgbClr val="A4A3A4"/>
           </p15:clr>
         </p15:guide>
+        <p15:guide id="3" orient="horz" pos="2160" userDrawn="1">
+          <p15:clr>
+            <a:srgbClr val="A4A3A4"/>
+          </p15:clr>
+        </p15:guide>
+        <p15:guide id="4" orient="horz" pos="3312" userDrawn="1">
+          <p15:clr>
+            <a:srgbClr val="A4A3A4"/>
+          </p15:clr>
+        </p15:guide>
       </p15:sldGuideLst>
     </p:ext>
   </p:extLst>
 </p:presentation>
+</file>
+
+<file path=ppt/revisionInfo.xml><?xml version="1.0" encoding="utf-8"?>
+<p1510:revInfo xmlns:a="http://schemas.openxmlformats.org/drawingml/2006/main" xmlns:r="http://schemas.openxmlformats.org/officeDocument/2006/relationships" xmlns:p1510="http://schemas.microsoft.com/office/powerpoint/2015/10/main">
+  <p1510:revLst>
+    <p1510:client id="{443811A0-B3A9-4F00-BAE7-F935CAD439DD}" v="42" dt="2025-10-17T16:32:55.190"/>
+  </p1510:revLst>
+</p1510:revInfo>
+</file>
+
+<file path=ppt/changesInfos/changesInfo1.xml><?xml version="1.0" encoding="utf-8"?>
+<pc:chgInfo xmlns:a="http://schemas.openxmlformats.org/drawingml/2006/main" xmlns:r="http://schemas.openxmlformats.org/officeDocument/2006/relationships" xmlns:ac="http://schemas.microsoft.com/office/drawing/2013/main/command" xmlns:pc="http://schemas.microsoft.com/office/powerpoint/2013/main/command">
+  <pc:docChgLst>
+    <pc:chgData name="Jack Taylor" userId="c3d9b5bb4cd0a1fe" providerId="LiveId" clId="{AD2499E2-04A6-4FD8-B2DD-9F1066D5F19F}"/>
+    <pc:docChg chg="undo custSel addSld modSld sldOrd modMainMaster">
+      <pc:chgData name="Jack Taylor" userId="c3d9b5bb4cd0a1fe" providerId="LiveId" clId="{AD2499E2-04A6-4FD8-B2DD-9F1066D5F19F}" dt="2025-10-17T16:43:48.970" v="1144" actId="1037"/>
+      <pc:docMkLst>
+        <pc:docMk/>
+      </pc:docMkLst>
+      <pc:sldChg chg="addSp modSp mod">
+        <pc:chgData name="Jack Taylor" userId="c3d9b5bb4cd0a1fe" providerId="LiveId" clId="{AD2499E2-04A6-4FD8-B2DD-9F1066D5F19F}" dt="2025-10-13T19:58:57.492" v="47" actId="1076"/>
+        <pc:sldMkLst>
+          <pc:docMk/>
+          <pc:sldMk cId="1830128469" sldId="256"/>
+        </pc:sldMkLst>
+        <pc:picChg chg="add mod">
+          <ac:chgData name="Jack Taylor" userId="c3d9b5bb4cd0a1fe" providerId="LiveId" clId="{AD2499E2-04A6-4FD8-B2DD-9F1066D5F19F}" dt="2025-10-13T19:58:57.492" v="47" actId="1076"/>
+          <ac:picMkLst>
+            <pc:docMk/>
+            <pc:sldMk cId="1830128469" sldId="256"/>
+            <ac:picMk id="2" creationId="{9EEE5B69-0D01-1342-8023-C60A407457F6}"/>
+          </ac:picMkLst>
+        </pc:picChg>
+      </pc:sldChg>
+      <pc:sldChg chg="addSp delSp modSp new mod ord">
+        <pc:chgData name="Jack Taylor" userId="c3d9b5bb4cd0a1fe" providerId="LiveId" clId="{AD2499E2-04A6-4FD8-B2DD-9F1066D5F19F}" dt="2025-10-14T15:37:49.381" v="408" actId="20577"/>
+        <pc:sldMkLst>
+          <pc:docMk/>
+          <pc:sldMk cId="2091717394" sldId="257"/>
+        </pc:sldMkLst>
+        <pc:spChg chg="mod">
+          <ac:chgData name="Jack Taylor" userId="c3d9b5bb4cd0a1fe" providerId="LiveId" clId="{AD2499E2-04A6-4FD8-B2DD-9F1066D5F19F}" dt="2025-10-13T21:03:30.450" v="243" actId="20577"/>
+          <ac:spMkLst>
+            <pc:docMk/>
+            <pc:sldMk cId="2091717394" sldId="257"/>
+            <ac:spMk id="2" creationId="{4C5106B2-A94C-4D50-7E53-F8ED2DCB5037}"/>
+          </ac:spMkLst>
+        </pc:spChg>
+        <pc:spChg chg="add mod">
+          <ac:chgData name="Jack Taylor" userId="c3d9b5bb4cd0a1fe" providerId="LiveId" clId="{AD2499E2-04A6-4FD8-B2DD-9F1066D5F19F}" dt="2025-10-14T15:37:49.381" v="408" actId="20577"/>
+          <ac:spMkLst>
+            <pc:docMk/>
+            <pc:sldMk cId="2091717394" sldId="257"/>
+            <ac:spMk id="3" creationId="{2334D44B-EE4B-70E4-F11A-C797960BEE02}"/>
+          </ac:spMkLst>
+        </pc:spChg>
+        <pc:spChg chg="mod topLvl">
+          <ac:chgData name="Jack Taylor" userId="c3d9b5bb4cd0a1fe" providerId="LiveId" clId="{AD2499E2-04A6-4FD8-B2DD-9F1066D5F19F}" dt="2025-10-13T20:04:38.751" v="62" actId="1076"/>
+          <ac:spMkLst>
+            <pc:docMk/>
+            <pc:sldMk cId="2091717394" sldId="257"/>
+            <ac:spMk id="7" creationId="{FE193329-4E32-49A3-1241-B63B5CD1AD7C}"/>
+          </ac:spMkLst>
+        </pc:spChg>
+        <pc:spChg chg="add mod">
+          <ac:chgData name="Jack Taylor" userId="c3d9b5bb4cd0a1fe" providerId="LiveId" clId="{AD2499E2-04A6-4FD8-B2DD-9F1066D5F19F}" dt="2025-10-13T21:06:32.559" v="291" actId="164"/>
+          <ac:spMkLst>
+            <pc:docMk/>
+            <pc:sldMk cId="2091717394" sldId="257"/>
+            <ac:spMk id="11" creationId="{66F5ACF3-412C-546F-E3D1-B2460E412BE0}"/>
+          </ac:spMkLst>
+        </pc:spChg>
+        <pc:spChg chg="add mod">
+          <ac:chgData name="Jack Taylor" userId="c3d9b5bb4cd0a1fe" providerId="LiveId" clId="{AD2499E2-04A6-4FD8-B2DD-9F1066D5F19F}" dt="2025-10-13T21:02:42.699" v="237" actId="14100"/>
+          <ac:spMkLst>
+            <pc:docMk/>
+            <pc:sldMk cId="2091717394" sldId="257"/>
+            <ac:spMk id="12" creationId="{FC1C2B6E-EDC3-F9F0-2243-0AFF452EF10B}"/>
+          </ac:spMkLst>
+        </pc:spChg>
+        <pc:spChg chg="add mod">
+          <ac:chgData name="Jack Taylor" userId="c3d9b5bb4cd0a1fe" providerId="LiveId" clId="{AD2499E2-04A6-4FD8-B2DD-9F1066D5F19F}" dt="2025-10-13T21:06:39.960" v="292" actId="164"/>
+          <ac:spMkLst>
+            <pc:docMk/>
+            <pc:sldMk cId="2091717394" sldId="257"/>
+            <ac:spMk id="13" creationId="{76AEFC3E-CCF9-FB4B-6735-F8DC653FC12C}"/>
+          </ac:spMkLst>
+        </pc:spChg>
+        <pc:spChg chg="add mod">
+          <ac:chgData name="Jack Taylor" userId="c3d9b5bb4cd0a1fe" providerId="LiveId" clId="{AD2499E2-04A6-4FD8-B2DD-9F1066D5F19F}" dt="2025-10-13T20:59:16.154" v="214" actId="20577"/>
+          <ac:spMkLst>
+            <pc:docMk/>
+            <pc:sldMk cId="2091717394" sldId="257"/>
+            <ac:spMk id="14" creationId="{208C3F12-86B4-CC81-28DF-292104D6747C}"/>
+          </ac:spMkLst>
+        </pc:spChg>
+        <pc:spChg chg="mod">
+          <ac:chgData name="Jack Taylor" userId="c3d9b5bb4cd0a1fe" providerId="LiveId" clId="{AD2499E2-04A6-4FD8-B2DD-9F1066D5F19F}" dt="2025-10-13T21:01:46.522" v="220" actId="20577"/>
+          <ac:spMkLst>
+            <pc:docMk/>
+            <pc:sldMk cId="2091717394" sldId="257"/>
+            <ac:spMk id="17" creationId="{739DB669-2B25-89F0-D808-2E3EA8C0D48B}"/>
+          </ac:spMkLst>
+        </pc:spChg>
+        <pc:spChg chg="add mod">
+          <ac:chgData name="Jack Taylor" userId="c3d9b5bb4cd0a1fe" providerId="LiveId" clId="{AD2499E2-04A6-4FD8-B2DD-9F1066D5F19F}" dt="2025-10-13T21:02:26.487" v="229" actId="1076"/>
+          <ac:spMkLst>
+            <pc:docMk/>
+            <pc:sldMk cId="2091717394" sldId="257"/>
+            <ac:spMk id="18" creationId="{7BCEF424-7CF9-5B32-B3FE-22D3CA94226F}"/>
+          </ac:spMkLst>
+        </pc:spChg>
+        <pc:spChg chg="add mod">
+          <ac:chgData name="Jack Taylor" userId="c3d9b5bb4cd0a1fe" providerId="LiveId" clId="{AD2499E2-04A6-4FD8-B2DD-9F1066D5F19F}" dt="2025-10-13T21:02:28.558" v="230" actId="1076"/>
+          <ac:spMkLst>
+            <pc:docMk/>
+            <pc:sldMk cId="2091717394" sldId="257"/>
+            <ac:spMk id="19" creationId="{D8111E95-5911-532A-0D35-9F0DD83CCB31}"/>
+          </ac:spMkLst>
+        </pc:spChg>
+        <pc:spChg chg="add mod">
+          <ac:chgData name="Jack Taylor" userId="c3d9b5bb4cd0a1fe" providerId="LiveId" clId="{AD2499E2-04A6-4FD8-B2DD-9F1066D5F19F}" dt="2025-10-13T21:02:40.796" v="236" actId="1076"/>
+          <ac:spMkLst>
+            <pc:docMk/>
+            <pc:sldMk cId="2091717394" sldId="257"/>
+            <ac:spMk id="20" creationId="{DA9F6908-021E-04A7-FF66-295D57B5CD94}"/>
+          </ac:spMkLst>
+        </pc:spChg>
+        <pc:grpChg chg="add mod">
+          <ac:chgData name="Jack Taylor" userId="c3d9b5bb4cd0a1fe" providerId="LiveId" clId="{AD2499E2-04A6-4FD8-B2DD-9F1066D5F19F}" dt="2025-10-13T21:00:39.887" v="218" actId="1076"/>
+          <ac:grpSpMkLst>
+            <pc:docMk/>
+            <pc:sldMk cId="2091717394" sldId="257"/>
+            <ac:grpSpMk id="15" creationId="{64C8769F-8EB2-FFF5-F1C5-5441D537AA21}"/>
+          </ac:grpSpMkLst>
+        </pc:grpChg>
+        <pc:grpChg chg="add mod">
+          <ac:chgData name="Jack Taylor" userId="c3d9b5bb4cd0a1fe" providerId="LiveId" clId="{AD2499E2-04A6-4FD8-B2DD-9F1066D5F19F}" dt="2025-10-13T21:06:32.559" v="291" actId="164"/>
+          <ac:grpSpMkLst>
+            <pc:docMk/>
+            <pc:sldMk cId="2091717394" sldId="257"/>
+            <ac:grpSpMk id="23" creationId="{1B321CC0-FEC5-6B14-A7C1-C836847ED41D}"/>
+          </ac:grpSpMkLst>
+        </pc:grpChg>
+        <pc:grpChg chg="add mod">
+          <ac:chgData name="Jack Taylor" userId="c3d9b5bb4cd0a1fe" providerId="LiveId" clId="{AD2499E2-04A6-4FD8-B2DD-9F1066D5F19F}" dt="2025-10-13T21:06:39.960" v="292" actId="164"/>
+          <ac:grpSpMkLst>
+            <pc:docMk/>
+            <pc:sldMk cId="2091717394" sldId="257"/>
+            <ac:grpSpMk id="24" creationId="{48FB74E9-FC86-4AAD-C6FB-B3AB72F87B3E}"/>
+          </ac:grpSpMkLst>
+        </pc:grpChg>
+        <pc:picChg chg="add mod ord">
+          <ac:chgData name="Jack Taylor" userId="c3d9b5bb4cd0a1fe" providerId="LiveId" clId="{AD2499E2-04A6-4FD8-B2DD-9F1066D5F19F}" dt="2025-10-13T20:04:46.111" v="65" actId="1076"/>
+          <ac:picMkLst>
+            <pc:docMk/>
+            <pc:sldMk cId="2091717394" sldId="257"/>
+            <ac:picMk id="4" creationId="{0166B64B-135E-F760-307A-395276F28196}"/>
+          </ac:picMkLst>
+        </pc:picChg>
+        <pc:picChg chg="add mod ord">
+          <ac:chgData name="Jack Taylor" userId="c3d9b5bb4cd0a1fe" providerId="LiveId" clId="{AD2499E2-04A6-4FD8-B2DD-9F1066D5F19F}" dt="2025-10-13T21:06:32.559" v="291" actId="164"/>
+          <ac:picMkLst>
+            <pc:docMk/>
+            <pc:sldMk cId="2091717394" sldId="257"/>
+            <ac:picMk id="10" creationId="{14A93AAB-F640-5306-28B9-BAC6CE6C5BAA}"/>
+          </ac:picMkLst>
+        </pc:picChg>
+        <pc:picChg chg="mod">
+          <ac:chgData name="Jack Taylor" userId="c3d9b5bb4cd0a1fe" providerId="LiveId" clId="{AD2499E2-04A6-4FD8-B2DD-9F1066D5F19F}" dt="2025-10-13T21:00:31.630" v="215"/>
+          <ac:picMkLst>
+            <pc:docMk/>
+            <pc:sldMk cId="2091717394" sldId="257"/>
+            <ac:picMk id="16" creationId="{0EA942B1-8810-383B-88D7-4BA017D0169B}"/>
+          </ac:picMkLst>
+        </pc:picChg>
+        <pc:picChg chg="add mod">
+          <ac:chgData name="Jack Taylor" userId="c3d9b5bb4cd0a1fe" providerId="LiveId" clId="{AD2499E2-04A6-4FD8-B2DD-9F1066D5F19F}" dt="2025-10-13T21:06:39.960" v="292" actId="164"/>
+          <ac:picMkLst>
+            <pc:docMk/>
+            <pc:sldMk cId="2091717394" sldId="257"/>
+            <ac:picMk id="22" creationId="{CA1A9B8C-F5AD-A921-0A9D-C5B6C45F929F}"/>
+          </ac:picMkLst>
+        </pc:picChg>
+      </pc:sldChg>
+      <pc:sldChg chg="addSp delSp modSp new mod">
+        <pc:chgData name="Jack Taylor" userId="c3d9b5bb4cd0a1fe" providerId="LiveId" clId="{AD2499E2-04A6-4FD8-B2DD-9F1066D5F19F}" dt="2025-10-17T16:01:39.295" v="506" actId="13822"/>
+        <pc:sldMkLst>
+          <pc:docMk/>
+          <pc:sldMk cId="3498697860" sldId="258"/>
+        </pc:sldMkLst>
+        <pc:spChg chg="mod">
+          <ac:chgData name="Jack Taylor" userId="c3d9b5bb4cd0a1fe" providerId="LiveId" clId="{AD2499E2-04A6-4FD8-B2DD-9F1066D5F19F}" dt="2025-10-13T21:03:38.923" v="266" actId="20577"/>
+          <ac:spMkLst>
+            <pc:docMk/>
+            <pc:sldMk cId="3498697860" sldId="258"/>
+            <ac:spMk id="2" creationId="{127D6C53-1B0C-AFFC-A1D5-0275FD2F784D}"/>
+          </ac:spMkLst>
+        </pc:spChg>
+        <pc:spChg chg="mod">
+          <ac:chgData name="Jack Taylor" userId="c3d9b5bb4cd0a1fe" providerId="LiveId" clId="{AD2499E2-04A6-4FD8-B2DD-9F1066D5F19F}" dt="2025-10-13T21:07:13.486" v="303" actId="12789"/>
+          <ac:spMkLst>
+            <pc:docMk/>
+            <pc:sldMk cId="3498697860" sldId="258"/>
+            <ac:spMk id="4" creationId="{F402E679-DD2F-1EAD-7F54-FBE996E8C4AF}"/>
+          </ac:spMkLst>
+        </pc:spChg>
+        <pc:spChg chg="mod">
+          <ac:chgData name="Jack Taylor" userId="c3d9b5bb4cd0a1fe" providerId="LiveId" clId="{AD2499E2-04A6-4FD8-B2DD-9F1066D5F19F}" dt="2025-10-17T16:01:39.295" v="506" actId="13822"/>
+          <ac:spMkLst>
+            <pc:docMk/>
+            <pc:sldMk cId="3498697860" sldId="258"/>
+            <ac:spMk id="7" creationId="{12ADA28D-8CA7-8BD0-093F-078E3096FAE4}"/>
+          </ac:spMkLst>
+        </pc:spChg>
+        <pc:spChg chg="mod">
+          <ac:chgData name="Jack Taylor" userId="c3d9b5bb4cd0a1fe" providerId="LiveId" clId="{AD2499E2-04A6-4FD8-B2DD-9F1066D5F19F}" dt="2025-10-17T16:01:39.295" v="506" actId="13822"/>
+          <ac:spMkLst>
+            <pc:docMk/>
+            <pc:sldMk cId="3498697860" sldId="258"/>
+            <ac:spMk id="10" creationId="{9AD65F5F-8B87-4816-F0B4-3A7B72578703}"/>
+          </ac:spMkLst>
+        </pc:spChg>
+        <pc:spChg chg="mod">
+          <ac:chgData name="Jack Taylor" userId="c3d9b5bb4cd0a1fe" providerId="LiveId" clId="{AD2499E2-04A6-4FD8-B2DD-9F1066D5F19F}" dt="2025-10-17T16:01:39.295" v="506" actId="13822"/>
+          <ac:spMkLst>
+            <pc:docMk/>
+            <pc:sldMk cId="3498697860" sldId="258"/>
+            <ac:spMk id="14" creationId="{8729ABDD-E70C-8585-5663-EE1F6DB2A0AD}"/>
+          </ac:spMkLst>
+        </pc:spChg>
+        <pc:spChg chg="mod">
+          <ac:chgData name="Jack Taylor" userId="c3d9b5bb4cd0a1fe" providerId="LiveId" clId="{AD2499E2-04A6-4FD8-B2DD-9F1066D5F19F}" dt="2025-10-17T15:55:17.650" v="420"/>
+          <ac:spMkLst>
+            <pc:docMk/>
+            <pc:sldMk cId="3498697860" sldId="258"/>
+            <ac:spMk id="23" creationId="{C4878A0D-FD7E-8FEA-B5D4-FC93BDE5A8B7}"/>
+          </ac:spMkLst>
+        </pc:spChg>
+        <pc:spChg chg="mod">
+          <ac:chgData name="Jack Taylor" userId="c3d9b5bb4cd0a1fe" providerId="LiveId" clId="{AD2499E2-04A6-4FD8-B2DD-9F1066D5F19F}" dt="2025-10-17T15:56:32.874" v="433"/>
+          <ac:spMkLst>
+            <pc:docMk/>
+            <pc:sldMk cId="3498697860" sldId="258"/>
+            <ac:spMk id="29" creationId="{B901C7E0-0860-3D96-DA46-14BA100438D8}"/>
+          </ac:spMkLst>
+        </pc:spChg>
+        <pc:spChg chg="mod">
+          <ac:chgData name="Jack Taylor" userId="c3d9b5bb4cd0a1fe" providerId="LiveId" clId="{AD2499E2-04A6-4FD8-B2DD-9F1066D5F19F}" dt="2025-10-17T15:56:35.930" v="434"/>
+          <ac:spMkLst>
+            <pc:docMk/>
+            <pc:sldMk cId="3498697860" sldId="258"/>
+            <ac:spMk id="32" creationId="{180A9DFD-9C56-1128-FF65-5EBDD4D45AC7}"/>
+          </ac:spMkLst>
+        </pc:spChg>
+        <pc:spChg chg="mod">
+          <ac:chgData name="Jack Taylor" userId="c3d9b5bb4cd0a1fe" providerId="LiveId" clId="{AD2499E2-04A6-4FD8-B2DD-9F1066D5F19F}" dt="2025-10-17T15:56:50.366" v="440"/>
+          <ac:spMkLst>
+            <pc:docMk/>
+            <pc:sldMk cId="3498697860" sldId="258"/>
+            <ac:spMk id="37" creationId="{B6446888-98CB-782C-8B62-6D48B5B23E48}"/>
+          </ac:spMkLst>
+        </pc:spChg>
+        <pc:spChg chg="mod">
+          <ac:chgData name="Jack Taylor" userId="c3d9b5bb4cd0a1fe" providerId="LiveId" clId="{AD2499E2-04A6-4FD8-B2DD-9F1066D5F19F}" dt="2025-10-17T16:01:39.295" v="506" actId="13822"/>
+          <ac:spMkLst>
+            <pc:docMk/>
+            <pc:sldMk cId="3498697860" sldId="258"/>
+            <ac:spMk id="43" creationId="{49833BFE-FFF4-F27E-E97B-DE62068D0B4D}"/>
+          </ac:spMkLst>
+        </pc:spChg>
+        <pc:spChg chg="mod">
+          <ac:chgData name="Jack Taylor" userId="c3d9b5bb4cd0a1fe" providerId="LiveId" clId="{AD2499E2-04A6-4FD8-B2DD-9F1066D5F19F}" dt="2025-10-17T16:01:39.295" v="506" actId="13822"/>
+          <ac:spMkLst>
+            <pc:docMk/>
+            <pc:sldMk cId="3498697860" sldId="258"/>
+            <ac:spMk id="46" creationId="{8411E40D-CF69-F9EF-DF39-C8125B6CE24D}"/>
+          </ac:spMkLst>
+        </pc:spChg>
+        <pc:spChg chg="add del mod">
+          <ac:chgData name="Jack Taylor" userId="c3d9b5bb4cd0a1fe" providerId="LiveId" clId="{AD2499E2-04A6-4FD8-B2DD-9F1066D5F19F}" dt="2025-10-17T15:58:08.162" v="463" actId="11529"/>
+          <ac:spMkLst>
+            <pc:docMk/>
+            <pc:sldMk cId="3498697860" sldId="258"/>
+            <ac:spMk id="54" creationId="{AA03DFDC-4345-6CE8-D8CF-6859473BBD51}"/>
+          </ac:spMkLst>
+        </pc:spChg>
+        <pc:spChg chg="add">
+          <ac:chgData name="Jack Taylor" userId="c3d9b5bb4cd0a1fe" providerId="LiveId" clId="{AD2499E2-04A6-4FD8-B2DD-9F1066D5F19F}" dt="2025-10-17T15:59:03.196" v="464" actId="11529"/>
+          <ac:spMkLst>
+            <pc:docMk/>
+            <pc:sldMk cId="3498697860" sldId="258"/>
+            <ac:spMk id="55" creationId="{238BC30C-B52D-6800-7632-2A500B289701}"/>
+          </ac:spMkLst>
+        </pc:spChg>
+        <pc:spChg chg="add mod">
+          <ac:chgData name="Jack Taylor" userId="c3d9b5bb4cd0a1fe" providerId="LiveId" clId="{AD2499E2-04A6-4FD8-B2DD-9F1066D5F19F}" dt="2025-10-17T16:01:30.125" v="505" actId="13822"/>
+          <ac:spMkLst>
+            <pc:docMk/>
+            <pc:sldMk cId="3498697860" sldId="258"/>
+            <ac:spMk id="56" creationId="{6A6742EC-CFDC-8A30-3DFB-A91FC4A48089}"/>
+          </ac:spMkLst>
+        </pc:spChg>
+        <pc:spChg chg="add mod">
+          <ac:chgData name="Jack Taylor" userId="c3d9b5bb4cd0a1fe" providerId="LiveId" clId="{AD2499E2-04A6-4FD8-B2DD-9F1066D5F19F}" dt="2025-10-17T16:01:30.125" v="505" actId="13822"/>
+          <ac:spMkLst>
+            <pc:docMk/>
+            <pc:sldMk cId="3498697860" sldId="258"/>
+            <ac:spMk id="64" creationId="{38FBF2D9-AC63-B9D9-9304-B19B0E331933}"/>
+          </ac:spMkLst>
+        </pc:spChg>
+        <pc:grpChg chg="add mod">
+          <ac:chgData name="Jack Taylor" userId="c3d9b5bb4cd0a1fe" providerId="LiveId" clId="{AD2499E2-04A6-4FD8-B2DD-9F1066D5F19F}" dt="2025-10-13T21:06:59.273" v="300" actId="14100"/>
+          <ac:grpSpMkLst>
+            <pc:docMk/>
+            <pc:sldMk cId="3498697860" sldId="258"/>
+            <ac:grpSpMk id="3" creationId="{984FD061-5337-D93B-A81B-B55249FF0850}"/>
+          </ac:grpSpMkLst>
+        </pc:grpChg>
+        <pc:grpChg chg="add mod">
+          <ac:chgData name="Jack Taylor" userId="c3d9b5bb4cd0a1fe" providerId="LiveId" clId="{AD2499E2-04A6-4FD8-B2DD-9F1066D5F19F}" dt="2025-10-17T15:56:43.437" v="439" actId="1036"/>
+          <ac:grpSpMkLst>
+            <pc:docMk/>
+            <pc:sldMk cId="3498697860" sldId="258"/>
+            <ac:grpSpMk id="6" creationId="{E4C15F8F-CE24-06D2-F310-2D9F0DDC438B}"/>
+          </ac:grpSpMkLst>
+        </pc:grpChg>
+        <pc:grpChg chg="add mod">
+          <ac:chgData name="Jack Taylor" userId="c3d9b5bb4cd0a1fe" providerId="LiveId" clId="{AD2499E2-04A6-4FD8-B2DD-9F1066D5F19F}" dt="2025-10-17T15:56:26.302" v="430" actId="1076"/>
+          <ac:grpSpMkLst>
+            <pc:docMk/>
+            <pc:sldMk cId="3498697860" sldId="258"/>
+            <ac:grpSpMk id="9" creationId="{5E283C32-0BAD-A90D-17DB-2E0CF7579657}"/>
+          </ac:grpSpMkLst>
+        </pc:grpChg>
+        <pc:grpChg chg="add mod">
+          <ac:chgData name="Jack Taylor" userId="c3d9b5bb4cd0a1fe" providerId="LiveId" clId="{AD2499E2-04A6-4FD8-B2DD-9F1066D5F19F}" dt="2025-10-17T15:56:26.302" v="430" actId="1076"/>
+          <ac:grpSpMkLst>
+            <pc:docMk/>
+            <pc:sldMk cId="3498697860" sldId="258"/>
+            <ac:grpSpMk id="12" creationId="{90E70D8B-D9DC-0304-DD19-EDFD92F657BF}"/>
+          </ac:grpSpMkLst>
+        </pc:grpChg>
+        <pc:grpChg chg="add mod">
+          <ac:chgData name="Jack Taylor" userId="c3d9b5bb4cd0a1fe" providerId="LiveId" clId="{AD2499E2-04A6-4FD8-B2DD-9F1066D5F19F}" dt="2025-10-17T15:56:30.856" v="432" actId="1076"/>
+          <ac:grpSpMkLst>
+            <pc:docMk/>
+            <pc:sldMk cId="3498697860" sldId="258"/>
+            <ac:grpSpMk id="22" creationId="{73A72A88-5871-F107-9268-5643B38A7503}"/>
+          </ac:grpSpMkLst>
+        </pc:grpChg>
+        <pc:grpChg chg="add mod">
+          <ac:chgData name="Jack Taylor" userId="c3d9b5bb4cd0a1fe" providerId="LiveId" clId="{AD2499E2-04A6-4FD8-B2DD-9F1066D5F19F}" dt="2025-10-17T15:56:32.874" v="433"/>
+          <ac:grpSpMkLst>
+            <pc:docMk/>
+            <pc:sldMk cId="3498697860" sldId="258"/>
+            <ac:grpSpMk id="28" creationId="{43A50520-1666-52E2-52B0-72439273383E}"/>
+          </ac:grpSpMkLst>
+        </pc:grpChg>
+        <pc:grpChg chg="add mod">
+          <ac:chgData name="Jack Taylor" userId="c3d9b5bb4cd0a1fe" providerId="LiveId" clId="{AD2499E2-04A6-4FD8-B2DD-9F1066D5F19F}" dt="2025-10-17T15:57:30.904" v="452" actId="1035"/>
+          <ac:grpSpMkLst>
+            <pc:docMk/>
+            <pc:sldMk cId="3498697860" sldId="258"/>
+            <ac:grpSpMk id="31" creationId="{1B3ED218-434F-6F3F-B224-C3611D5C51AE}"/>
+          </ac:grpSpMkLst>
+        </pc:grpChg>
+        <pc:grpChg chg="add del mod">
+          <ac:chgData name="Jack Taylor" userId="c3d9b5bb4cd0a1fe" providerId="LiveId" clId="{AD2499E2-04A6-4FD8-B2DD-9F1066D5F19F}" dt="2025-10-17T15:56:54.989" v="441" actId="478"/>
+          <ac:grpSpMkLst>
+            <pc:docMk/>
+            <pc:sldMk cId="3498697860" sldId="258"/>
+            <ac:grpSpMk id="36" creationId="{F0929AF1-8B9A-B6F1-FB32-3983578000ED}"/>
+          </ac:grpSpMkLst>
+        </pc:grpChg>
+        <pc:grpChg chg="add mod">
+          <ac:chgData name="Jack Taylor" userId="c3d9b5bb4cd0a1fe" providerId="LiveId" clId="{AD2499E2-04A6-4FD8-B2DD-9F1066D5F19F}" dt="2025-10-17T15:57:16.957" v="445" actId="1076"/>
+          <ac:grpSpMkLst>
+            <pc:docMk/>
+            <pc:sldMk cId="3498697860" sldId="258"/>
+            <ac:grpSpMk id="42" creationId="{359DBE3C-81B0-CF72-C9E9-B4B60ACDF145}"/>
+          </ac:grpSpMkLst>
+        </pc:grpChg>
+        <pc:grpChg chg="add mod">
+          <ac:chgData name="Jack Taylor" userId="c3d9b5bb4cd0a1fe" providerId="LiveId" clId="{AD2499E2-04A6-4FD8-B2DD-9F1066D5F19F}" dt="2025-10-17T15:57:16.957" v="445" actId="1076"/>
+          <ac:grpSpMkLst>
+            <pc:docMk/>
+            <pc:sldMk cId="3498697860" sldId="258"/>
+            <ac:grpSpMk id="45" creationId="{2A1421FE-8BDD-419D-9991-DF8605BEA6B3}"/>
+          </ac:grpSpMkLst>
+        </pc:grpChg>
+        <pc:picChg chg="mod">
+          <ac:chgData name="Jack Taylor" userId="c3d9b5bb4cd0a1fe" providerId="LiveId" clId="{AD2499E2-04A6-4FD8-B2DD-9F1066D5F19F}" dt="2025-10-13T21:07:38.991" v="333" actId="1076"/>
+          <ac:picMkLst>
+            <pc:docMk/>
+            <pc:sldMk cId="3498697860" sldId="258"/>
+            <ac:picMk id="5" creationId="{431D7115-479F-2861-E8C6-86B515146605}"/>
+          </ac:picMkLst>
+        </pc:picChg>
+        <pc:picChg chg="mod">
+          <ac:chgData name="Jack Taylor" userId="c3d9b5bb4cd0a1fe" providerId="LiveId" clId="{AD2499E2-04A6-4FD8-B2DD-9F1066D5F19F}" dt="2025-10-17T16:01:39.295" v="506" actId="13822"/>
+          <ac:picMkLst>
+            <pc:docMk/>
+            <pc:sldMk cId="3498697860" sldId="258"/>
+            <ac:picMk id="8" creationId="{C745A45E-6736-30E9-B537-C177EB97D268}"/>
+          </ac:picMkLst>
+        </pc:picChg>
+        <pc:picChg chg="mod">
+          <ac:chgData name="Jack Taylor" userId="c3d9b5bb4cd0a1fe" providerId="LiveId" clId="{AD2499E2-04A6-4FD8-B2DD-9F1066D5F19F}" dt="2025-10-17T16:01:39.295" v="506" actId="13822"/>
+          <ac:picMkLst>
+            <pc:docMk/>
+            <pc:sldMk cId="3498697860" sldId="258"/>
+            <ac:picMk id="11" creationId="{ECFEFE89-6682-4B5C-D7E7-22204C4F460B}"/>
+          </ac:picMkLst>
+        </pc:picChg>
+        <pc:picChg chg="mod">
+          <ac:chgData name="Jack Taylor" userId="c3d9b5bb4cd0a1fe" providerId="LiveId" clId="{AD2499E2-04A6-4FD8-B2DD-9F1066D5F19F}" dt="2025-10-17T16:01:39.295" v="506" actId="13822"/>
+          <ac:picMkLst>
+            <pc:docMk/>
+            <pc:sldMk cId="3498697860" sldId="258"/>
+            <ac:picMk id="15" creationId="{AD289B3F-BD23-2C04-CD4F-1A057DD7AD69}"/>
+          </ac:picMkLst>
+        </pc:picChg>
+        <pc:picChg chg="mod">
+          <ac:chgData name="Jack Taylor" userId="c3d9b5bb4cd0a1fe" providerId="LiveId" clId="{AD2499E2-04A6-4FD8-B2DD-9F1066D5F19F}" dt="2025-10-17T15:55:17.650" v="420"/>
+          <ac:picMkLst>
+            <pc:docMk/>
+            <pc:sldMk cId="3498697860" sldId="258"/>
+            <ac:picMk id="24" creationId="{44FDC757-7A45-76D0-829C-4CDCC36772E2}"/>
+          </ac:picMkLst>
+        </pc:picChg>
+        <pc:picChg chg="mod">
+          <ac:chgData name="Jack Taylor" userId="c3d9b5bb4cd0a1fe" providerId="LiveId" clId="{AD2499E2-04A6-4FD8-B2DD-9F1066D5F19F}" dt="2025-10-17T15:56:32.874" v="433"/>
+          <ac:picMkLst>
+            <pc:docMk/>
+            <pc:sldMk cId="3498697860" sldId="258"/>
+            <ac:picMk id="30" creationId="{D63DD3DD-5FFB-05DB-780C-9792D4719826}"/>
+          </ac:picMkLst>
+        </pc:picChg>
+        <pc:picChg chg="mod">
+          <ac:chgData name="Jack Taylor" userId="c3d9b5bb4cd0a1fe" providerId="LiveId" clId="{AD2499E2-04A6-4FD8-B2DD-9F1066D5F19F}" dt="2025-10-17T15:56:35.930" v="434"/>
+          <ac:picMkLst>
+            <pc:docMk/>
+            <pc:sldMk cId="3498697860" sldId="258"/>
+            <ac:picMk id="33" creationId="{5598D13D-8995-B049-7A76-E969976BD54E}"/>
+          </ac:picMkLst>
+        </pc:picChg>
+        <pc:picChg chg="mod">
+          <ac:chgData name="Jack Taylor" userId="c3d9b5bb4cd0a1fe" providerId="LiveId" clId="{AD2499E2-04A6-4FD8-B2DD-9F1066D5F19F}" dt="2025-10-17T15:56:50.366" v="440"/>
+          <ac:picMkLst>
+            <pc:docMk/>
+            <pc:sldMk cId="3498697860" sldId="258"/>
+            <ac:picMk id="38" creationId="{D764C89F-4692-0D13-323A-D596AC91B518}"/>
+          </ac:picMkLst>
+        </pc:picChg>
+        <pc:picChg chg="mod">
+          <ac:chgData name="Jack Taylor" userId="c3d9b5bb4cd0a1fe" providerId="LiveId" clId="{AD2499E2-04A6-4FD8-B2DD-9F1066D5F19F}" dt="2025-10-17T16:01:39.295" v="506" actId="13822"/>
+          <ac:picMkLst>
+            <pc:docMk/>
+            <pc:sldMk cId="3498697860" sldId="258"/>
+            <ac:picMk id="44" creationId="{D0E8809E-8D9C-08A7-49F4-FFCA6F1657C1}"/>
+          </ac:picMkLst>
+        </pc:picChg>
+        <pc:picChg chg="mod">
+          <ac:chgData name="Jack Taylor" userId="c3d9b5bb4cd0a1fe" providerId="LiveId" clId="{AD2499E2-04A6-4FD8-B2DD-9F1066D5F19F}" dt="2025-10-17T16:01:39.295" v="506" actId="13822"/>
+          <ac:picMkLst>
+            <pc:docMk/>
+            <pc:sldMk cId="3498697860" sldId="258"/>
+            <ac:picMk id="47" creationId="{F10D7D6C-938E-E16F-0C21-41E246766A1B}"/>
+          </ac:picMkLst>
+        </pc:picChg>
+        <pc:cxnChg chg="add mod">
+          <ac:chgData name="Jack Taylor" userId="c3d9b5bb4cd0a1fe" providerId="LiveId" clId="{AD2499E2-04A6-4FD8-B2DD-9F1066D5F19F}" dt="2025-10-17T15:56:43.437" v="439" actId="1036"/>
+          <ac:cxnSpMkLst>
+            <pc:docMk/>
+            <pc:sldMk cId="3498697860" sldId="258"/>
+            <ac:cxnSpMk id="13" creationId="{89005B24-0EBD-9F89-F38A-7A1419DFB1F6}"/>
+          </ac:cxnSpMkLst>
+        </pc:cxnChg>
+        <pc:cxnChg chg="add mod">
+          <ac:chgData name="Jack Taylor" userId="c3d9b5bb4cd0a1fe" providerId="LiveId" clId="{AD2499E2-04A6-4FD8-B2DD-9F1066D5F19F}" dt="2025-10-17T15:56:26.302" v="430" actId="1076"/>
+          <ac:cxnSpMkLst>
+            <pc:docMk/>
+            <pc:sldMk cId="3498697860" sldId="258"/>
+            <ac:cxnSpMk id="16" creationId="{405E144E-9332-18AD-89A3-AE19A4E265EE}"/>
+          </ac:cxnSpMkLst>
+        </pc:cxnChg>
+        <pc:cxnChg chg="add mod">
+          <ac:chgData name="Jack Taylor" userId="c3d9b5bb4cd0a1fe" providerId="LiveId" clId="{AD2499E2-04A6-4FD8-B2DD-9F1066D5F19F}" dt="2025-10-17T15:56:26.302" v="430" actId="1076"/>
+          <ac:cxnSpMkLst>
+            <pc:docMk/>
+            <pc:sldMk cId="3498697860" sldId="258"/>
+            <ac:cxnSpMk id="17" creationId="{EB78123F-0246-8EB9-B3C7-E725D1940435}"/>
+          </ac:cxnSpMkLst>
+        </pc:cxnChg>
+        <pc:cxnChg chg="add mod">
+          <ac:chgData name="Jack Taylor" userId="c3d9b5bb4cd0a1fe" providerId="LiveId" clId="{AD2499E2-04A6-4FD8-B2DD-9F1066D5F19F}" dt="2025-10-17T15:56:30.856" v="432" actId="1076"/>
+          <ac:cxnSpMkLst>
+            <pc:docMk/>
+            <pc:sldMk cId="3498697860" sldId="258"/>
+            <ac:cxnSpMk id="25" creationId="{35DC6392-E1A3-D595-C44D-C2CC18673C28}"/>
+          </ac:cxnSpMkLst>
+        </pc:cxnChg>
+        <pc:cxnChg chg="add mod">
+          <ac:chgData name="Jack Taylor" userId="c3d9b5bb4cd0a1fe" providerId="LiveId" clId="{AD2499E2-04A6-4FD8-B2DD-9F1066D5F19F}" dt="2025-10-17T15:57:30.904" v="452" actId="1035"/>
+          <ac:cxnSpMkLst>
+            <pc:docMk/>
+            <pc:sldMk cId="3498697860" sldId="258"/>
+            <ac:cxnSpMk id="34" creationId="{74857F1B-CBC9-F93E-8994-A5040177C26C}"/>
+          </ac:cxnSpMkLst>
+        </pc:cxnChg>
+        <pc:cxnChg chg="add mod">
+          <ac:chgData name="Jack Taylor" userId="c3d9b5bb4cd0a1fe" providerId="LiveId" clId="{AD2499E2-04A6-4FD8-B2DD-9F1066D5F19F}" dt="2025-10-17T15:57:30.904" v="452" actId="1035"/>
+          <ac:cxnSpMkLst>
+            <pc:docMk/>
+            <pc:sldMk cId="3498697860" sldId="258"/>
+            <ac:cxnSpMk id="39" creationId="{DE9546A4-F272-2F80-245E-7C40F3403F6F}"/>
+          </ac:cxnSpMkLst>
+        </pc:cxnChg>
+        <pc:cxnChg chg="add mod">
+          <ac:chgData name="Jack Taylor" userId="c3d9b5bb4cd0a1fe" providerId="LiveId" clId="{AD2499E2-04A6-4FD8-B2DD-9F1066D5F19F}" dt="2025-10-17T15:57:30.904" v="452" actId="1035"/>
+          <ac:cxnSpMkLst>
+            <pc:docMk/>
+            <pc:sldMk cId="3498697860" sldId="258"/>
+            <ac:cxnSpMk id="48" creationId="{4F178F12-C76C-D9A5-B870-35E2F3188617}"/>
+          </ac:cxnSpMkLst>
+        </pc:cxnChg>
+        <pc:cxnChg chg="add mod">
+          <ac:chgData name="Jack Taylor" userId="c3d9b5bb4cd0a1fe" providerId="LiveId" clId="{AD2499E2-04A6-4FD8-B2DD-9F1066D5F19F}" dt="2025-10-17T15:57:38.415" v="455" actId="14100"/>
+          <ac:cxnSpMkLst>
+            <pc:docMk/>
+            <pc:sldMk cId="3498697860" sldId="258"/>
+            <ac:cxnSpMk id="51" creationId="{E32A1552-D348-29E8-5372-7E3148AF0D52}"/>
+          </ac:cxnSpMkLst>
+        </pc:cxnChg>
+        <pc:cxnChg chg="add mod">
+          <ac:chgData name="Jack Taylor" userId="c3d9b5bb4cd0a1fe" providerId="LiveId" clId="{AD2499E2-04A6-4FD8-B2DD-9F1066D5F19F}" dt="2025-10-17T15:59:39.997" v="476" actId="1076"/>
+          <ac:cxnSpMkLst>
+            <pc:docMk/>
+            <pc:sldMk cId="3498697860" sldId="258"/>
+            <ac:cxnSpMk id="57" creationId="{06DE0578-4CAF-0DF7-C53A-C3110AC2A276}"/>
+          </ac:cxnSpMkLst>
+        </pc:cxnChg>
+        <pc:cxnChg chg="add mod">
+          <ac:chgData name="Jack Taylor" userId="c3d9b5bb4cd0a1fe" providerId="LiveId" clId="{AD2499E2-04A6-4FD8-B2DD-9F1066D5F19F}" dt="2025-10-17T16:00:47.906" v="480" actId="14100"/>
+          <ac:cxnSpMkLst>
+            <pc:docMk/>
+            <pc:sldMk cId="3498697860" sldId="258"/>
+            <ac:cxnSpMk id="61" creationId="{11E89D0A-C2FA-A2D6-A5A4-2823FA3D4333}"/>
+          </ac:cxnSpMkLst>
+        </pc:cxnChg>
+        <pc:cxnChg chg="add mod">
+          <ac:chgData name="Jack Taylor" userId="c3d9b5bb4cd0a1fe" providerId="LiveId" clId="{AD2499E2-04A6-4FD8-B2DD-9F1066D5F19F}" dt="2025-10-17T16:01:15.248" v="504" actId="14100"/>
+          <ac:cxnSpMkLst>
+            <pc:docMk/>
+            <pc:sldMk cId="3498697860" sldId="258"/>
+            <ac:cxnSpMk id="65" creationId="{137BA8A1-B1E8-1F77-EC4D-17CDC0F5B15C}"/>
+          </ac:cxnSpMkLst>
+        </pc:cxnChg>
+      </pc:sldChg>
+      <pc:sldChg chg="addSp delSp modSp new mod">
+        <pc:chgData name="Jack Taylor" userId="c3d9b5bb4cd0a1fe" providerId="LiveId" clId="{AD2499E2-04A6-4FD8-B2DD-9F1066D5F19F}" dt="2025-10-17T16:43:48.970" v="1144" actId="1037"/>
+        <pc:sldMkLst>
+          <pc:docMk/>
+          <pc:sldMk cId="4079401195" sldId="259"/>
+        </pc:sldMkLst>
+        <pc:spChg chg="mod">
+          <ac:chgData name="Jack Taylor" userId="c3d9b5bb4cd0a1fe" providerId="LiveId" clId="{AD2499E2-04A6-4FD8-B2DD-9F1066D5F19F}" dt="2025-10-17T16:26:21.692" v="687" actId="20577"/>
+          <ac:spMkLst>
+            <pc:docMk/>
+            <pc:sldMk cId="4079401195" sldId="259"/>
+            <ac:spMk id="2" creationId="{2BFAB8F1-A9B2-174F-C7D5-E5D4E3F6B391}"/>
+          </ac:spMkLst>
+        </pc:spChg>
+        <pc:spChg chg="add del mod">
+          <ac:chgData name="Jack Taylor" userId="c3d9b5bb4cd0a1fe" providerId="LiveId" clId="{AD2499E2-04A6-4FD8-B2DD-9F1066D5F19F}" dt="2025-10-17T16:18:52.495" v="598"/>
+          <ac:spMkLst>
+            <pc:docMk/>
+            <pc:sldMk cId="4079401195" sldId="259"/>
+            <ac:spMk id="3" creationId="{5EC1CEF5-EBDA-14A4-2C0A-C67BD32B43EB}"/>
+          </ac:spMkLst>
+        </pc:spChg>
+        <pc:spChg chg="add del mod">
+          <ac:chgData name="Jack Taylor" userId="c3d9b5bb4cd0a1fe" providerId="LiveId" clId="{AD2499E2-04A6-4FD8-B2DD-9F1066D5F19F}" dt="2025-10-17T16:22:57.716" v="628" actId="478"/>
+          <ac:spMkLst>
+            <pc:docMk/>
+            <pc:sldMk cId="4079401195" sldId="259"/>
+            <ac:spMk id="4" creationId="{C7B6F350-4385-6DA9-3325-D4F589E0DB9A}"/>
+          </ac:spMkLst>
+        </pc:spChg>
+        <pc:spChg chg="add del ord">
+          <ac:chgData name="Jack Taylor" userId="c3d9b5bb4cd0a1fe" providerId="LiveId" clId="{AD2499E2-04A6-4FD8-B2DD-9F1066D5F19F}" dt="2025-10-17T16:22:57.716" v="628" actId="478"/>
+          <ac:spMkLst>
+            <pc:docMk/>
+            <pc:sldMk cId="4079401195" sldId="259"/>
+            <ac:spMk id="5" creationId="{471B2713-DFCE-8A42-1415-CC67E466754B}"/>
+          </ac:spMkLst>
+        </pc:spChg>
+        <pc:spChg chg="add mod">
+          <ac:chgData name="Jack Taylor" userId="c3d9b5bb4cd0a1fe" providerId="LiveId" clId="{AD2499E2-04A6-4FD8-B2DD-9F1066D5F19F}" dt="2025-10-17T16:32:22.144" v="1027" actId="20577"/>
+          <ac:spMkLst>
+            <pc:docMk/>
+            <pc:sldMk cId="4079401195" sldId="259"/>
+            <ac:spMk id="16" creationId="{1C870719-4C5B-EC90-71E7-56E7E7FCA025}"/>
+          </ac:spMkLst>
+        </pc:spChg>
+        <pc:spChg chg="add mod">
+          <ac:chgData name="Jack Taylor" userId="c3d9b5bb4cd0a1fe" providerId="LiveId" clId="{AD2499E2-04A6-4FD8-B2DD-9F1066D5F19F}" dt="2025-10-17T16:42:12.029" v="1129" actId="14100"/>
+          <ac:spMkLst>
+            <pc:docMk/>
+            <pc:sldMk cId="4079401195" sldId="259"/>
+            <ac:spMk id="18" creationId="{01E56274-891A-2CA0-4C4D-AC724B332AE0}"/>
+          </ac:spMkLst>
+        </pc:spChg>
+        <pc:spChg chg="add mod">
+          <ac:chgData name="Jack Taylor" userId="c3d9b5bb4cd0a1fe" providerId="LiveId" clId="{AD2499E2-04A6-4FD8-B2DD-9F1066D5F19F}" dt="2025-10-17T16:35:39.377" v="1082" actId="20577"/>
+          <ac:spMkLst>
+            <pc:docMk/>
+            <pc:sldMk cId="4079401195" sldId="259"/>
+            <ac:spMk id="19" creationId="{FD1200C5-FE71-CA93-78F4-AB838D5B47BA}"/>
+          </ac:spMkLst>
+        </pc:spChg>
+        <pc:spChg chg="add mod">
+          <ac:chgData name="Jack Taylor" userId="c3d9b5bb4cd0a1fe" providerId="LiveId" clId="{AD2499E2-04A6-4FD8-B2DD-9F1066D5F19F}" dt="2025-10-17T16:43:45.733" v="1134" actId="1038"/>
+          <ac:spMkLst>
+            <pc:docMk/>
+            <pc:sldMk cId="4079401195" sldId="259"/>
+            <ac:spMk id="20" creationId="{2C223210-E8FB-6C37-803D-C0C88D284756}"/>
+          </ac:spMkLst>
+        </pc:spChg>
+        <pc:spChg chg="add mod">
+          <ac:chgData name="Jack Taylor" userId="c3d9b5bb4cd0a1fe" providerId="LiveId" clId="{AD2499E2-04A6-4FD8-B2DD-9F1066D5F19F}" dt="2025-10-17T16:43:48.970" v="1144" actId="1037"/>
+          <ac:spMkLst>
+            <pc:docMk/>
+            <pc:sldMk cId="4079401195" sldId="259"/>
+            <ac:spMk id="21" creationId="{F5FB2118-BDED-8A29-FE7A-61A7F3376254}"/>
+          </ac:spMkLst>
+        </pc:spChg>
+        <pc:inkChg chg="add del">
+          <ac:chgData name="Jack Taylor" userId="c3d9b5bb4cd0a1fe" providerId="LiveId" clId="{AD2499E2-04A6-4FD8-B2DD-9F1066D5F19F}" dt="2025-10-17T16:20:26.653" v="606" actId="9405"/>
+          <ac:inkMkLst>
+            <pc:docMk/>
+            <pc:sldMk cId="4079401195" sldId="259"/>
+            <ac:inkMk id="6" creationId="{CC9DFE59-8C40-6362-8C87-5B9064C353E9}"/>
+          </ac:inkMkLst>
+        </pc:inkChg>
+        <pc:inkChg chg="add del">
+          <ac:chgData name="Jack Taylor" userId="c3d9b5bb4cd0a1fe" providerId="LiveId" clId="{AD2499E2-04A6-4FD8-B2DD-9F1066D5F19F}" dt="2025-10-17T16:20:26.421" v="605" actId="9405"/>
+          <ac:inkMkLst>
+            <pc:docMk/>
+            <pc:sldMk cId="4079401195" sldId="259"/>
+            <ac:inkMk id="7" creationId="{61A15F82-C04D-FBE1-972F-17D42A708C19}"/>
+          </ac:inkMkLst>
+        </pc:inkChg>
+        <pc:cxnChg chg="add del mod ord">
+          <ac:chgData name="Jack Taylor" userId="c3d9b5bb4cd0a1fe" providerId="LiveId" clId="{AD2499E2-04A6-4FD8-B2DD-9F1066D5F19F}" dt="2025-10-17T16:22:57.716" v="628" actId="478"/>
+          <ac:cxnSpMkLst>
+            <pc:docMk/>
+            <pc:sldMk cId="4079401195" sldId="259"/>
+            <ac:cxnSpMk id="9" creationId="{B605B035-ABB2-4F52-043B-AA2B44B94C44}"/>
+          </ac:cxnSpMkLst>
+        </pc:cxnChg>
+        <pc:cxnChg chg="add del mod">
+          <ac:chgData name="Jack Taylor" userId="c3d9b5bb4cd0a1fe" providerId="LiveId" clId="{AD2499E2-04A6-4FD8-B2DD-9F1066D5F19F}" dt="2025-10-17T16:22:57.716" v="628" actId="478"/>
+          <ac:cxnSpMkLst>
+            <pc:docMk/>
+            <pc:sldMk cId="4079401195" sldId="259"/>
+            <ac:cxnSpMk id="10" creationId="{CEDC7E1C-C771-9091-2C42-5A883706E488}"/>
+          </ac:cxnSpMkLst>
+        </pc:cxnChg>
+        <pc:cxnChg chg="add del mod">
+          <ac:chgData name="Jack Taylor" userId="c3d9b5bb4cd0a1fe" providerId="LiveId" clId="{AD2499E2-04A6-4FD8-B2DD-9F1066D5F19F}" dt="2025-10-17T16:22:57.716" v="628" actId="478"/>
+          <ac:cxnSpMkLst>
+            <pc:docMk/>
+            <pc:sldMk cId="4079401195" sldId="259"/>
+            <ac:cxnSpMk id="13" creationId="{E987095D-A50F-1823-6EB2-065A9CA1730A}"/>
+          </ac:cxnSpMkLst>
+        </pc:cxnChg>
+      </pc:sldChg>
+      <pc:sldMasterChg chg="modSp mod modSldLayout">
+        <pc:chgData name="Jack Taylor" userId="c3d9b5bb4cd0a1fe" providerId="LiveId" clId="{AD2499E2-04A6-4FD8-B2DD-9F1066D5F19F}" dt="2025-10-13T19:57:44.728" v="33" actId="14100"/>
+        <pc:sldMasterMkLst>
+          <pc:docMk/>
+          <pc:sldMasterMk cId="3013561015" sldId="2147483648"/>
+        </pc:sldMasterMkLst>
+        <pc:spChg chg="mod">
+          <ac:chgData name="Jack Taylor" userId="c3d9b5bb4cd0a1fe" providerId="LiveId" clId="{AD2499E2-04A6-4FD8-B2DD-9F1066D5F19F}" dt="2025-10-13T19:50:25.244" v="19" actId="14100"/>
+          <ac:spMkLst>
+            <pc:docMk/>
+            <pc:sldMasterMk cId="3013561015" sldId="2147483648"/>
+            <ac:spMk id="2" creationId="{574A8700-36B5-AC18-DD5D-F794DCC998D5}"/>
+          </ac:spMkLst>
+        </pc:spChg>
+        <pc:spChg chg="mod">
+          <ac:chgData name="Jack Taylor" userId="c3d9b5bb4cd0a1fe" providerId="LiveId" clId="{AD2499E2-04A6-4FD8-B2DD-9F1066D5F19F}" dt="2025-10-13T19:50:25.244" v="19" actId="14100"/>
+          <ac:spMkLst>
+            <pc:docMk/>
+            <pc:sldMasterMk cId="3013561015" sldId="2147483648"/>
+            <ac:spMk id="3" creationId="{E6031405-1CFD-1AF2-5E79-6ED8B15C5304}"/>
+          </ac:spMkLst>
+        </pc:spChg>
+        <pc:spChg chg="mod">
+          <ac:chgData name="Jack Taylor" userId="c3d9b5bb4cd0a1fe" providerId="LiveId" clId="{AD2499E2-04A6-4FD8-B2DD-9F1066D5F19F}" dt="2025-10-13T19:50:34.494" v="22" actId="14100"/>
+          <ac:spMkLst>
+            <pc:docMk/>
+            <pc:sldMasterMk cId="3013561015" sldId="2147483648"/>
+            <ac:spMk id="4" creationId="{3BC724C8-1107-7D1C-94C8-D1F08EB2DDDC}"/>
+          </ac:spMkLst>
+        </pc:spChg>
+        <pc:spChg chg="mod">
+          <ac:chgData name="Jack Taylor" userId="c3d9b5bb4cd0a1fe" providerId="LiveId" clId="{AD2499E2-04A6-4FD8-B2DD-9F1066D5F19F}" dt="2025-10-13T19:50:54.461" v="27" actId="12788"/>
+          <ac:spMkLst>
+            <pc:docMk/>
+            <pc:sldMasterMk cId="3013561015" sldId="2147483648"/>
+            <ac:spMk id="5" creationId="{9A6247F0-9250-B2F0-49E4-9C7129613B9F}"/>
+          </ac:spMkLst>
+        </pc:spChg>
+        <pc:spChg chg="mod">
+          <ac:chgData name="Jack Taylor" userId="c3d9b5bb4cd0a1fe" providerId="LiveId" clId="{AD2499E2-04A6-4FD8-B2DD-9F1066D5F19F}" dt="2025-10-13T19:50:37.282" v="23" actId="14100"/>
+          <ac:spMkLst>
+            <pc:docMk/>
+            <pc:sldMasterMk cId="3013561015" sldId="2147483648"/>
+            <ac:spMk id="6" creationId="{014298EB-28AC-35AE-C8D9-9D69657C7C49}"/>
+          </ac:spMkLst>
+        </pc:spChg>
+        <pc:sldLayoutChg chg="modSp mod">
+          <pc:chgData name="Jack Taylor" userId="c3d9b5bb4cd0a1fe" providerId="LiveId" clId="{AD2499E2-04A6-4FD8-B2DD-9F1066D5F19F}" dt="2025-10-13T19:57:44.728" v="33" actId="14100"/>
+          <pc:sldLayoutMkLst>
+            <pc:docMk/>
+            <pc:sldMasterMk cId="3013561015" sldId="2147483648"/>
+            <pc:sldLayoutMk cId="4038998834" sldId="2147483652"/>
+          </pc:sldLayoutMkLst>
+          <pc:spChg chg="mod">
+            <ac:chgData name="Jack Taylor" userId="c3d9b5bb4cd0a1fe" providerId="LiveId" clId="{AD2499E2-04A6-4FD8-B2DD-9F1066D5F19F}" dt="2025-10-13T19:57:42.443" v="32" actId="14100"/>
+            <ac:spMkLst>
+              <pc:docMk/>
+              <pc:sldMasterMk cId="3013561015" sldId="2147483648"/>
+              <pc:sldLayoutMk cId="4038998834" sldId="2147483652"/>
+              <ac:spMk id="3" creationId="{C8749424-B291-E436-4BB0-B0F0A07340FE}"/>
+            </ac:spMkLst>
+          </pc:spChg>
+          <pc:spChg chg="mod">
+            <ac:chgData name="Jack Taylor" userId="c3d9b5bb4cd0a1fe" providerId="LiveId" clId="{AD2499E2-04A6-4FD8-B2DD-9F1066D5F19F}" dt="2025-10-13T19:57:44.728" v="33" actId="14100"/>
+            <ac:spMkLst>
+              <pc:docMk/>
+              <pc:sldMasterMk cId="3013561015" sldId="2147483648"/>
+              <pc:sldLayoutMk cId="4038998834" sldId="2147483652"/>
+              <ac:spMk id="4" creationId="{28787417-8924-306B-0880-72B1FA272987}"/>
+            </ac:spMkLst>
+          </pc:spChg>
+        </pc:sldLayoutChg>
+        <pc:sldLayoutChg chg="modSp">
+          <pc:chgData name="Jack Taylor" userId="c3d9b5bb4cd0a1fe" providerId="LiveId" clId="{AD2499E2-04A6-4FD8-B2DD-9F1066D5F19F}" dt="2025-10-13T19:48:58.331" v="7" actId="735"/>
+          <pc:sldLayoutMkLst>
+            <pc:docMk/>
+            <pc:sldMasterMk cId="3013561015" sldId="2147483648"/>
+            <pc:sldLayoutMk cId="2009951385" sldId="2147483654"/>
+          </pc:sldLayoutMkLst>
+        </pc:sldLayoutChg>
+        <pc:sldLayoutChg chg="delSp mod">
+          <pc:chgData name="Jack Taylor" userId="c3d9b5bb4cd0a1fe" providerId="LiveId" clId="{AD2499E2-04A6-4FD8-B2DD-9F1066D5F19F}" dt="2025-10-13T19:57:08.017" v="30" actId="478"/>
+          <pc:sldLayoutMkLst>
+            <pc:docMk/>
+            <pc:sldMasterMk cId="3013561015" sldId="2147483648"/>
+            <pc:sldLayoutMk cId="2079748875" sldId="2147483655"/>
+          </pc:sldLayoutMkLst>
+        </pc:sldLayoutChg>
+      </pc:sldMasterChg>
+    </pc:docChg>
+  </pc:docChgLst>
+</pc:chgInfo>
 </file>
 
 <file path=ppt/slideLayouts/slideLayout1.xml><?xml version="1.0" encoding="utf-8"?>
@@ -270,7 +1054,7 @@
           <a:p>
             <a:fld id="{ED348A9C-BD5D-4D94-9FB0-6A54E4793266}" type="datetimeFigureOut">
               <a:rPr lang="en-US" smtClean="0"/>
-              <a:t>10/9/2025</a:t>
+              <a:t>10/17/2025</a:t>
             </a:fld>
             <a:endParaRPr lang="en-US"/>
           </a:p>
@@ -334,412 +1118,6 @@
     <p:extLst>
       <p:ext uri="{BB962C8B-B14F-4D97-AF65-F5344CB8AC3E}">
         <p14:creationId xmlns:p14="http://schemas.microsoft.com/office/powerpoint/2010/main" val="238047709"/>
-      </p:ext>
-    </p:extLst>
-  </p:cSld>
-  <p:clrMapOvr>
-    <a:masterClrMapping/>
-  </p:clrMapOvr>
-</p:sldLayout>
-</file>
-
-<file path=ppt/slideLayouts/slideLayout10.xml><?xml version="1.0" encoding="utf-8"?>
-<p:sldLayout xmlns:a="http://schemas.openxmlformats.org/drawingml/2006/main" xmlns:r="http://schemas.openxmlformats.org/officeDocument/2006/relationships" xmlns:p="http://schemas.openxmlformats.org/presentationml/2006/main" type="vertTx" preserve="1">
-  <p:cSld name="Title and Vertical Text">
-    <p:spTree>
-      <p:nvGrpSpPr>
-        <p:cNvPr id="1" name=""/>
-        <p:cNvGrpSpPr/>
-        <p:nvPr/>
-      </p:nvGrpSpPr>
-      <p:grpSpPr>
-        <a:xfrm>
-          <a:off x="0" y="0"/>
-          <a:ext cx="0" cy="0"/>
-          <a:chOff x="0" y="0"/>
-          <a:chExt cx="0" cy="0"/>
-        </a:xfrm>
-      </p:grpSpPr>
-      <p:sp>
-        <p:nvSpPr>
-          <p:cNvPr id="2" name="Title 1">
-            <a:extLst>
-              <a:ext uri="{FF2B5EF4-FFF2-40B4-BE49-F238E27FC236}">
-                <a16:creationId xmlns:a16="http://schemas.microsoft.com/office/drawing/2014/main" id="{7271A029-4AA2-90A8-BB0D-A96F61356623}"/>
-              </a:ext>
-            </a:extLst>
-          </p:cNvPr>
-          <p:cNvSpPr>
-            <a:spLocks noGrp="1"/>
-          </p:cNvSpPr>
-          <p:nvPr>
-            <p:ph type="title"/>
-          </p:nvPr>
-        </p:nvSpPr>
-        <p:spPr/>
-        <p:txBody>
-          <a:bodyPr/>
-          <a:lstStyle/>
-          <a:p>
-            <a:r>
-              <a:rPr lang="en-US"/>
-              <a:t>Click to edit Master title style</a:t>
-            </a:r>
-          </a:p>
-        </p:txBody>
-      </p:sp>
-      <p:sp>
-        <p:nvSpPr>
-          <p:cNvPr id="3" name="Vertical Text Placeholder 2">
-            <a:extLst>
-              <a:ext uri="{FF2B5EF4-FFF2-40B4-BE49-F238E27FC236}">
-                <a16:creationId xmlns:a16="http://schemas.microsoft.com/office/drawing/2014/main" id="{DBB18B84-339F-55C2-DB45-9682B446B91D}"/>
-              </a:ext>
-            </a:extLst>
-          </p:cNvPr>
-          <p:cNvSpPr>
-            <a:spLocks noGrp="1"/>
-          </p:cNvSpPr>
-          <p:nvPr>
-            <p:ph type="body" orient="vert" idx="1"/>
-          </p:nvPr>
-        </p:nvSpPr>
-        <p:spPr/>
-        <p:txBody>
-          <a:bodyPr vert="eaVert"/>
-          <a:lstStyle/>
-          <a:p>
-            <a:pPr lvl="0"/>
-            <a:r>
-              <a:rPr lang="en-US"/>
-              <a:t>Click to edit Master text styles</a:t>
-            </a:r>
-          </a:p>
-          <a:p>
-            <a:pPr lvl="1"/>
-            <a:r>
-              <a:rPr lang="en-US"/>
-              <a:t>Second level</a:t>
-            </a:r>
-          </a:p>
-          <a:p>
-            <a:pPr lvl="2"/>
-            <a:r>
-              <a:rPr lang="en-US"/>
-              <a:t>Third level</a:t>
-            </a:r>
-          </a:p>
-          <a:p>
-            <a:pPr lvl="3"/>
-            <a:r>
-              <a:rPr lang="en-US"/>
-              <a:t>Fourth level</a:t>
-            </a:r>
-          </a:p>
-          <a:p>
-            <a:pPr lvl="4"/>
-            <a:r>
-              <a:rPr lang="en-US"/>
-              <a:t>Fifth level</a:t>
-            </a:r>
-          </a:p>
-        </p:txBody>
-      </p:sp>
-      <p:sp>
-        <p:nvSpPr>
-          <p:cNvPr id="4" name="Date Placeholder 3">
-            <a:extLst>
-              <a:ext uri="{FF2B5EF4-FFF2-40B4-BE49-F238E27FC236}">
-                <a16:creationId xmlns:a16="http://schemas.microsoft.com/office/drawing/2014/main" id="{34BB5EB6-F725-45BE-ED33-9D020F64E495}"/>
-              </a:ext>
-            </a:extLst>
-          </p:cNvPr>
-          <p:cNvSpPr>
-            <a:spLocks noGrp="1"/>
-          </p:cNvSpPr>
-          <p:nvPr>
-            <p:ph type="dt" sz="half" idx="10"/>
-          </p:nvPr>
-        </p:nvSpPr>
-        <p:spPr/>
-        <p:txBody>
-          <a:bodyPr/>
-          <a:lstStyle/>
-          <a:p>
-            <a:fld id="{ED348A9C-BD5D-4D94-9FB0-6A54E4793266}" type="datetimeFigureOut">
-              <a:rPr lang="en-US" smtClean="0"/>
-              <a:t>10/9/2025</a:t>
-            </a:fld>
-            <a:endParaRPr lang="en-US"/>
-          </a:p>
-        </p:txBody>
-      </p:sp>
-      <p:sp>
-        <p:nvSpPr>
-          <p:cNvPr id="5" name="Footer Placeholder 4">
-            <a:extLst>
-              <a:ext uri="{FF2B5EF4-FFF2-40B4-BE49-F238E27FC236}">
-                <a16:creationId xmlns:a16="http://schemas.microsoft.com/office/drawing/2014/main" id="{6580DEFB-7BBF-5F54-1B8F-0169CEAC9A45}"/>
-              </a:ext>
-            </a:extLst>
-          </p:cNvPr>
-          <p:cNvSpPr>
-            <a:spLocks noGrp="1"/>
-          </p:cNvSpPr>
-          <p:nvPr>
-            <p:ph type="ftr" sz="quarter" idx="11"/>
-          </p:nvPr>
-        </p:nvSpPr>
-        <p:spPr/>
-        <p:txBody>
-          <a:bodyPr/>
-          <a:lstStyle/>
-          <a:p>
-            <a:endParaRPr lang="en-US"/>
-          </a:p>
-        </p:txBody>
-      </p:sp>
-      <p:sp>
-        <p:nvSpPr>
-          <p:cNvPr id="6" name="Slide Number Placeholder 5">
-            <a:extLst>
-              <a:ext uri="{FF2B5EF4-FFF2-40B4-BE49-F238E27FC236}">
-                <a16:creationId xmlns:a16="http://schemas.microsoft.com/office/drawing/2014/main" id="{9111711D-2FFE-EFB5-1406-9898D4E0DC9F}"/>
-              </a:ext>
-            </a:extLst>
-          </p:cNvPr>
-          <p:cNvSpPr>
-            <a:spLocks noGrp="1"/>
-          </p:cNvSpPr>
-          <p:nvPr>
-            <p:ph type="sldNum" sz="quarter" idx="12"/>
-          </p:nvPr>
-        </p:nvSpPr>
-        <p:spPr/>
-        <p:txBody>
-          <a:bodyPr/>
-          <a:lstStyle/>
-          <a:p>
-            <a:fld id="{DEF385AC-E751-4AD7-8066-B6D2A2571C10}" type="slidenum">
-              <a:rPr lang="en-US" smtClean="0"/>
-              <a:t>‹#›</a:t>
-            </a:fld>
-            <a:endParaRPr lang="en-US"/>
-          </a:p>
-        </p:txBody>
-      </p:sp>
-    </p:spTree>
-    <p:extLst>
-      <p:ext uri="{BB962C8B-B14F-4D97-AF65-F5344CB8AC3E}">
-        <p14:creationId xmlns:p14="http://schemas.microsoft.com/office/powerpoint/2010/main" val="3317527692"/>
-      </p:ext>
-    </p:extLst>
-  </p:cSld>
-  <p:clrMapOvr>
-    <a:masterClrMapping/>
-  </p:clrMapOvr>
-</p:sldLayout>
-</file>
-
-<file path=ppt/slideLayouts/slideLayout11.xml><?xml version="1.0" encoding="utf-8"?>
-<p:sldLayout xmlns:a="http://schemas.openxmlformats.org/drawingml/2006/main" xmlns:r="http://schemas.openxmlformats.org/officeDocument/2006/relationships" xmlns:p="http://schemas.openxmlformats.org/presentationml/2006/main" type="vertTitleAndTx" preserve="1">
-  <p:cSld name="Vertical Title and Text">
-    <p:spTree>
-      <p:nvGrpSpPr>
-        <p:cNvPr id="1" name=""/>
-        <p:cNvGrpSpPr/>
-        <p:nvPr/>
-      </p:nvGrpSpPr>
-      <p:grpSpPr>
-        <a:xfrm>
-          <a:off x="0" y="0"/>
-          <a:ext cx="0" cy="0"/>
-          <a:chOff x="0" y="0"/>
-          <a:chExt cx="0" cy="0"/>
-        </a:xfrm>
-      </p:grpSpPr>
-      <p:sp>
-        <p:nvSpPr>
-          <p:cNvPr id="2" name="Vertical Title 1">
-            <a:extLst>
-              <a:ext uri="{FF2B5EF4-FFF2-40B4-BE49-F238E27FC236}">
-                <a16:creationId xmlns:a16="http://schemas.microsoft.com/office/drawing/2014/main" id="{41777A99-21EA-FBC2-223D-0867FEF8D558}"/>
-              </a:ext>
-            </a:extLst>
-          </p:cNvPr>
-          <p:cNvSpPr>
-            <a:spLocks noGrp="1"/>
-          </p:cNvSpPr>
-          <p:nvPr>
-            <p:ph type="title" orient="vert"/>
-          </p:nvPr>
-        </p:nvSpPr>
-        <p:spPr>
-          <a:xfrm>
-            <a:off x="8724900" y="365125"/>
-            <a:ext cx="2628900" cy="5811838"/>
-          </a:xfrm>
-        </p:spPr>
-        <p:txBody>
-          <a:bodyPr vert="eaVert"/>
-          <a:lstStyle/>
-          <a:p>
-            <a:r>
-              <a:rPr lang="en-US"/>
-              <a:t>Click to edit Master title style</a:t>
-            </a:r>
-          </a:p>
-        </p:txBody>
-      </p:sp>
-      <p:sp>
-        <p:nvSpPr>
-          <p:cNvPr id="3" name="Vertical Text Placeholder 2">
-            <a:extLst>
-              <a:ext uri="{FF2B5EF4-FFF2-40B4-BE49-F238E27FC236}">
-                <a16:creationId xmlns:a16="http://schemas.microsoft.com/office/drawing/2014/main" id="{CA5112FA-E2B9-A485-9389-4C5F1A212BF4}"/>
-              </a:ext>
-            </a:extLst>
-          </p:cNvPr>
-          <p:cNvSpPr>
-            <a:spLocks noGrp="1"/>
-          </p:cNvSpPr>
-          <p:nvPr>
-            <p:ph type="body" orient="vert" idx="1"/>
-          </p:nvPr>
-        </p:nvSpPr>
-        <p:spPr>
-          <a:xfrm>
-            <a:off x="838200" y="365125"/>
-            <a:ext cx="7734300" cy="5811838"/>
-          </a:xfrm>
-        </p:spPr>
-        <p:txBody>
-          <a:bodyPr vert="eaVert"/>
-          <a:lstStyle/>
-          <a:p>
-            <a:pPr lvl="0"/>
-            <a:r>
-              <a:rPr lang="en-US"/>
-              <a:t>Click to edit Master text styles</a:t>
-            </a:r>
-          </a:p>
-          <a:p>
-            <a:pPr lvl="1"/>
-            <a:r>
-              <a:rPr lang="en-US"/>
-              <a:t>Second level</a:t>
-            </a:r>
-          </a:p>
-          <a:p>
-            <a:pPr lvl="2"/>
-            <a:r>
-              <a:rPr lang="en-US"/>
-              <a:t>Third level</a:t>
-            </a:r>
-          </a:p>
-          <a:p>
-            <a:pPr lvl="3"/>
-            <a:r>
-              <a:rPr lang="en-US"/>
-              <a:t>Fourth level</a:t>
-            </a:r>
-          </a:p>
-          <a:p>
-            <a:pPr lvl="4"/>
-            <a:r>
-              <a:rPr lang="en-US"/>
-              <a:t>Fifth level</a:t>
-            </a:r>
-          </a:p>
-        </p:txBody>
-      </p:sp>
-      <p:sp>
-        <p:nvSpPr>
-          <p:cNvPr id="4" name="Date Placeholder 3">
-            <a:extLst>
-              <a:ext uri="{FF2B5EF4-FFF2-40B4-BE49-F238E27FC236}">
-                <a16:creationId xmlns:a16="http://schemas.microsoft.com/office/drawing/2014/main" id="{1E0AC4F8-CF35-1681-8D6D-4C1422D5E1F1}"/>
-              </a:ext>
-            </a:extLst>
-          </p:cNvPr>
-          <p:cNvSpPr>
-            <a:spLocks noGrp="1"/>
-          </p:cNvSpPr>
-          <p:nvPr>
-            <p:ph type="dt" sz="half" idx="10"/>
-          </p:nvPr>
-        </p:nvSpPr>
-        <p:spPr/>
-        <p:txBody>
-          <a:bodyPr/>
-          <a:lstStyle/>
-          <a:p>
-            <a:fld id="{ED348A9C-BD5D-4D94-9FB0-6A54E4793266}" type="datetimeFigureOut">
-              <a:rPr lang="en-US" smtClean="0"/>
-              <a:t>10/9/2025</a:t>
-            </a:fld>
-            <a:endParaRPr lang="en-US"/>
-          </a:p>
-        </p:txBody>
-      </p:sp>
-      <p:sp>
-        <p:nvSpPr>
-          <p:cNvPr id="5" name="Footer Placeholder 4">
-            <a:extLst>
-              <a:ext uri="{FF2B5EF4-FFF2-40B4-BE49-F238E27FC236}">
-                <a16:creationId xmlns:a16="http://schemas.microsoft.com/office/drawing/2014/main" id="{A3DDC8AC-CBF0-9AD3-867F-A4339101BC20}"/>
-              </a:ext>
-            </a:extLst>
-          </p:cNvPr>
-          <p:cNvSpPr>
-            <a:spLocks noGrp="1"/>
-          </p:cNvSpPr>
-          <p:nvPr>
-            <p:ph type="ftr" sz="quarter" idx="11"/>
-          </p:nvPr>
-        </p:nvSpPr>
-        <p:spPr/>
-        <p:txBody>
-          <a:bodyPr/>
-          <a:lstStyle/>
-          <a:p>
-            <a:endParaRPr lang="en-US"/>
-          </a:p>
-        </p:txBody>
-      </p:sp>
-      <p:sp>
-        <p:nvSpPr>
-          <p:cNvPr id="6" name="Slide Number Placeholder 5">
-            <a:extLst>
-              <a:ext uri="{FF2B5EF4-FFF2-40B4-BE49-F238E27FC236}">
-                <a16:creationId xmlns:a16="http://schemas.microsoft.com/office/drawing/2014/main" id="{0B0FAB2C-E758-1EF8-3111-7763FB150CED}"/>
-              </a:ext>
-            </a:extLst>
-          </p:cNvPr>
-          <p:cNvSpPr>
-            <a:spLocks noGrp="1"/>
-          </p:cNvSpPr>
-          <p:nvPr>
-            <p:ph type="sldNum" sz="quarter" idx="12"/>
-          </p:nvPr>
-        </p:nvSpPr>
-        <p:spPr/>
-        <p:txBody>
-          <a:bodyPr/>
-          <a:lstStyle/>
-          <a:p>
-            <a:fld id="{DEF385AC-E751-4AD7-8066-B6D2A2571C10}" type="slidenum">
-              <a:rPr lang="en-US" smtClean="0"/>
-              <a:t>‹#›</a:t>
-            </a:fld>
-            <a:endParaRPr lang="en-US"/>
-          </a:p>
-        </p:txBody>
-      </p:sp>
-    </p:spTree>
-    <p:extLst>
-      <p:ext uri="{BB962C8B-B14F-4D97-AF65-F5344CB8AC3E}">
-        <p14:creationId xmlns:p14="http://schemas.microsoft.com/office/powerpoint/2010/main" val="2158401815"/>
       </p:ext>
     </p:extLst>
   </p:cSld>
@@ -874,7 +1252,7 @@
           <a:p>
             <a:fld id="{ED348A9C-BD5D-4D94-9FB0-6A54E4793266}" type="datetimeFigureOut">
               <a:rPr lang="en-US" smtClean="0"/>
-              <a:t>10/9/2025</a:t>
+              <a:t>10/17/2025</a:t>
             </a:fld>
             <a:endParaRPr lang="en-US"/>
           </a:p>
@@ -948,281 +1326,6 @@
 </file>
 
 <file path=ppt/slideLayouts/slideLayout3.xml><?xml version="1.0" encoding="utf-8"?>
-<p:sldLayout xmlns:a="http://schemas.openxmlformats.org/drawingml/2006/main" xmlns:r="http://schemas.openxmlformats.org/officeDocument/2006/relationships" xmlns:p="http://schemas.openxmlformats.org/presentationml/2006/main" type="secHead" preserve="1">
-  <p:cSld name="Section Header">
-    <p:spTree>
-      <p:nvGrpSpPr>
-        <p:cNvPr id="1" name=""/>
-        <p:cNvGrpSpPr/>
-        <p:nvPr/>
-      </p:nvGrpSpPr>
-      <p:grpSpPr>
-        <a:xfrm>
-          <a:off x="0" y="0"/>
-          <a:ext cx="0" cy="0"/>
-          <a:chOff x="0" y="0"/>
-          <a:chExt cx="0" cy="0"/>
-        </a:xfrm>
-      </p:grpSpPr>
-      <p:sp>
-        <p:nvSpPr>
-          <p:cNvPr id="2" name="Title 1">
-            <a:extLst>
-              <a:ext uri="{FF2B5EF4-FFF2-40B4-BE49-F238E27FC236}">
-                <a16:creationId xmlns:a16="http://schemas.microsoft.com/office/drawing/2014/main" id="{3130F298-4734-E635-E7C8-ADA59A866E6E}"/>
-              </a:ext>
-            </a:extLst>
-          </p:cNvPr>
-          <p:cNvSpPr>
-            <a:spLocks noGrp="1"/>
-          </p:cNvSpPr>
-          <p:nvPr>
-            <p:ph type="title"/>
-          </p:nvPr>
-        </p:nvSpPr>
-        <p:spPr>
-          <a:xfrm>
-            <a:off x="831850" y="1709738"/>
-            <a:ext cx="10515600" cy="2852737"/>
-          </a:xfrm>
-        </p:spPr>
-        <p:txBody>
-          <a:bodyPr anchor="b"/>
-          <a:lstStyle>
-            <a:lvl1pPr>
-              <a:defRPr sz="6000"/>
-            </a:lvl1pPr>
-          </a:lstStyle>
-          <a:p>
-            <a:r>
-              <a:rPr lang="en-US"/>
-              <a:t>Click to edit Master title style</a:t>
-            </a:r>
-          </a:p>
-        </p:txBody>
-      </p:sp>
-      <p:sp>
-        <p:nvSpPr>
-          <p:cNvPr id="3" name="Text Placeholder 2">
-            <a:extLst>
-              <a:ext uri="{FF2B5EF4-FFF2-40B4-BE49-F238E27FC236}">
-                <a16:creationId xmlns:a16="http://schemas.microsoft.com/office/drawing/2014/main" id="{786376F2-B233-A854-53CB-2E51AC3E8017}"/>
-              </a:ext>
-            </a:extLst>
-          </p:cNvPr>
-          <p:cNvSpPr>
-            <a:spLocks noGrp="1"/>
-          </p:cNvSpPr>
-          <p:nvPr>
-            <p:ph type="body" idx="1"/>
-          </p:nvPr>
-        </p:nvSpPr>
-        <p:spPr>
-          <a:xfrm>
-            <a:off x="831850" y="4589463"/>
-            <a:ext cx="10515600" cy="1500187"/>
-          </a:xfrm>
-        </p:spPr>
-        <p:txBody>
-          <a:bodyPr/>
-          <a:lstStyle>
-            <a:lvl1pPr marL="0" indent="0">
-              <a:buNone/>
-              <a:defRPr sz="2400">
-                <a:solidFill>
-                  <a:schemeClr val="tx1">
-                    <a:tint val="82000"/>
-                  </a:schemeClr>
-                </a:solidFill>
-              </a:defRPr>
-            </a:lvl1pPr>
-            <a:lvl2pPr marL="457200" indent="0">
-              <a:buNone/>
-              <a:defRPr sz="2000">
-                <a:solidFill>
-                  <a:schemeClr val="tx1">
-                    <a:tint val="82000"/>
-                  </a:schemeClr>
-                </a:solidFill>
-              </a:defRPr>
-            </a:lvl2pPr>
-            <a:lvl3pPr marL="914400" indent="0">
-              <a:buNone/>
-              <a:defRPr sz="1800">
-                <a:solidFill>
-                  <a:schemeClr val="tx1">
-                    <a:tint val="82000"/>
-                  </a:schemeClr>
-                </a:solidFill>
-              </a:defRPr>
-            </a:lvl3pPr>
-            <a:lvl4pPr marL="1371600" indent="0">
-              <a:buNone/>
-              <a:defRPr sz="1600">
-                <a:solidFill>
-                  <a:schemeClr val="tx1">
-                    <a:tint val="82000"/>
-                  </a:schemeClr>
-                </a:solidFill>
-              </a:defRPr>
-            </a:lvl4pPr>
-            <a:lvl5pPr marL="1828800" indent="0">
-              <a:buNone/>
-              <a:defRPr sz="1600">
-                <a:solidFill>
-                  <a:schemeClr val="tx1">
-                    <a:tint val="82000"/>
-                  </a:schemeClr>
-                </a:solidFill>
-              </a:defRPr>
-            </a:lvl5pPr>
-            <a:lvl6pPr marL="2286000" indent="0">
-              <a:buNone/>
-              <a:defRPr sz="1600">
-                <a:solidFill>
-                  <a:schemeClr val="tx1">
-                    <a:tint val="82000"/>
-                  </a:schemeClr>
-                </a:solidFill>
-              </a:defRPr>
-            </a:lvl6pPr>
-            <a:lvl7pPr marL="2743200" indent="0">
-              <a:buNone/>
-              <a:defRPr sz="1600">
-                <a:solidFill>
-                  <a:schemeClr val="tx1">
-                    <a:tint val="82000"/>
-                  </a:schemeClr>
-                </a:solidFill>
-              </a:defRPr>
-            </a:lvl7pPr>
-            <a:lvl8pPr marL="3200400" indent="0">
-              <a:buNone/>
-              <a:defRPr sz="1600">
-                <a:solidFill>
-                  <a:schemeClr val="tx1">
-                    <a:tint val="82000"/>
-                  </a:schemeClr>
-                </a:solidFill>
-              </a:defRPr>
-            </a:lvl8pPr>
-            <a:lvl9pPr marL="3657600" indent="0">
-              <a:buNone/>
-              <a:defRPr sz="1600">
-                <a:solidFill>
-                  <a:schemeClr val="tx1">
-                    <a:tint val="82000"/>
-                  </a:schemeClr>
-                </a:solidFill>
-              </a:defRPr>
-            </a:lvl9pPr>
-          </a:lstStyle>
-          <a:p>
-            <a:pPr lvl="0"/>
-            <a:r>
-              <a:rPr lang="en-US"/>
-              <a:t>Click to edit Master text styles</a:t>
-            </a:r>
-          </a:p>
-        </p:txBody>
-      </p:sp>
-      <p:sp>
-        <p:nvSpPr>
-          <p:cNvPr id="4" name="Date Placeholder 3">
-            <a:extLst>
-              <a:ext uri="{FF2B5EF4-FFF2-40B4-BE49-F238E27FC236}">
-                <a16:creationId xmlns:a16="http://schemas.microsoft.com/office/drawing/2014/main" id="{BFE28D4E-FEBB-8399-098F-E35B5133AE46}"/>
-              </a:ext>
-            </a:extLst>
-          </p:cNvPr>
-          <p:cNvSpPr>
-            <a:spLocks noGrp="1"/>
-          </p:cNvSpPr>
-          <p:nvPr>
-            <p:ph type="dt" sz="half" idx="10"/>
-          </p:nvPr>
-        </p:nvSpPr>
-        <p:spPr/>
-        <p:txBody>
-          <a:bodyPr/>
-          <a:lstStyle/>
-          <a:p>
-            <a:fld id="{ED348A9C-BD5D-4D94-9FB0-6A54E4793266}" type="datetimeFigureOut">
-              <a:rPr lang="en-US" smtClean="0"/>
-              <a:t>10/9/2025</a:t>
-            </a:fld>
-            <a:endParaRPr lang="en-US"/>
-          </a:p>
-        </p:txBody>
-      </p:sp>
-      <p:sp>
-        <p:nvSpPr>
-          <p:cNvPr id="5" name="Footer Placeholder 4">
-            <a:extLst>
-              <a:ext uri="{FF2B5EF4-FFF2-40B4-BE49-F238E27FC236}">
-                <a16:creationId xmlns:a16="http://schemas.microsoft.com/office/drawing/2014/main" id="{4E45B55F-85F5-8B1F-A4F3-717F16F1BADB}"/>
-              </a:ext>
-            </a:extLst>
-          </p:cNvPr>
-          <p:cNvSpPr>
-            <a:spLocks noGrp="1"/>
-          </p:cNvSpPr>
-          <p:nvPr>
-            <p:ph type="ftr" sz="quarter" idx="11"/>
-          </p:nvPr>
-        </p:nvSpPr>
-        <p:spPr/>
-        <p:txBody>
-          <a:bodyPr/>
-          <a:lstStyle/>
-          <a:p>
-            <a:endParaRPr lang="en-US"/>
-          </a:p>
-        </p:txBody>
-      </p:sp>
-      <p:sp>
-        <p:nvSpPr>
-          <p:cNvPr id="6" name="Slide Number Placeholder 5">
-            <a:extLst>
-              <a:ext uri="{FF2B5EF4-FFF2-40B4-BE49-F238E27FC236}">
-                <a16:creationId xmlns:a16="http://schemas.microsoft.com/office/drawing/2014/main" id="{992B4CF8-54A2-98AF-32D9-D63B42313E8C}"/>
-              </a:ext>
-            </a:extLst>
-          </p:cNvPr>
-          <p:cNvSpPr>
-            <a:spLocks noGrp="1"/>
-          </p:cNvSpPr>
-          <p:nvPr>
-            <p:ph type="sldNum" sz="quarter" idx="12"/>
-          </p:nvPr>
-        </p:nvSpPr>
-        <p:spPr/>
-        <p:txBody>
-          <a:bodyPr/>
-          <a:lstStyle/>
-          <a:p>
-            <a:fld id="{DEF385AC-E751-4AD7-8066-B6D2A2571C10}" type="slidenum">
-              <a:rPr lang="en-US" smtClean="0"/>
-              <a:t>‹#›</a:t>
-            </a:fld>
-            <a:endParaRPr lang="en-US"/>
-          </a:p>
-        </p:txBody>
-      </p:sp>
-    </p:spTree>
-    <p:extLst>
-      <p:ext uri="{BB962C8B-B14F-4D97-AF65-F5344CB8AC3E}">
-        <p14:creationId xmlns:p14="http://schemas.microsoft.com/office/powerpoint/2010/main" val="2454860427"/>
-      </p:ext>
-    </p:extLst>
-  </p:cSld>
-  <p:clrMapOvr>
-    <a:masterClrMapping/>
-  </p:clrMapOvr>
-</p:sldLayout>
-</file>
-
-<file path=ppt/slideLayouts/slideLayout4.xml><?xml version="1.0" encoding="utf-8"?>
 <p:sldLayout xmlns:a="http://schemas.openxmlformats.org/drawingml/2006/main" xmlns:r="http://schemas.openxmlformats.org/officeDocument/2006/relationships" xmlns:p="http://schemas.openxmlformats.org/presentationml/2006/main" type="twoObj" preserve="1">
   <p:cSld name="Two Content">
     <p:spTree>
@@ -1285,8 +1388,8 @@
         </p:nvSpPr>
         <p:spPr>
           <a:xfrm>
-            <a:off x="838200" y="1825625"/>
-            <a:ext cx="5181600" cy="4351338"/>
+            <a:off x="159799" y="798990"/>
+            <a:ext cx="5860001" cy="5377973"/>
           </a:xfrm>
         </p:spPr>
         <p:txBody>
@@ -1347,8 +1450,8 @@
         </p:nvSpPr>
         <p:spPr>
           <a:xfrm>
-            <a:off x="6172200" y="1825625"/>
-            <a:ext cx="5181600" cy="4351338"/>
+            <a:off x="6172200" y="798990"/>
+            <a:ext cx="5860000" cy="5377973"/>
           </a:xfrm>
         </p:spPr>
         <p:txBody>
@@ -1414,7 +1517,7 @@
           <a:p>
             <a:fld id="{ED348A9C-BD5D-4D94-9FB0-6A54E4793266}" type="datetimeFigureOut">
               <a:rPr lang="en-US" smtClean="0"/>
-              <a:t>10/9/2025</a:t>
+              <a:t>10/17/2025</a:t>
             </a:fld>
             <a:endParaRPr lang="en-US"/>
           </a:p>
@@ -1487,419 +1590,7 @@
 </p:sldLayout>
 </file>
 
-<file path=ppt/slideLayouts/slideLayout5.xml><?xml version="1.0" encoding="utf-8"?>
-<p:sldLayout xmlns:a="http://schemas.openxmlformats.org/drawingml/2006/main" xmlns:r="http://schemas.openxmlformats.org/officeDocument/2006/relationships" xmlns:p="http://schemas.openxmlformats.org/presentationml/2006/main" type="twoTxTwoObj" preserve="1">
-  <p:cSld name="Comparison">
-    <p:spTree>
-      <p:nvGrpSpPr>
-        <p:cNvPr id="1" name=""/>
-        <p:cNvGrpSpPr/>
-        <p:nvPr/>
-      </p:nvGrpSpPr>
-      <p:grpSpPr>
-        <a:xfrm>
-          <a:off x="0" y="0"/>
-          <a:ext cx="0" cy="0"/>
-          <a:chOff x="0" y="0"/>
-          <a:chExt cx="0" cy="0"/>
-        </a:xfrm>
-      </p:grpSpPr>
-      <p:sp>
-        <p:nvSpPr>
-          <p:cNvPr id="2" name="Title 1">
-            <a:extLst>
-              <a:ext uri="{FF2B5EF4-FFF2-40B4-BE49-F238E27FC236}">
-                <a16:creationId xmlns:a16="http://schemas.microsoft.com/office/drawing/2014/main" id="{1DB43F76-409B-6632-14C1-0DCC17C3B51B}"/>
-              </a:ext>
-            </a:extLst>
-          </p:cNvPr>
-          <p:cNvSpPr>
-            <a:spLocks noGrp="1"/>
-          </p:cNvSpPr>
-          <p:nvPr>
-            <p:ph type="title"/>
-          </p:nvPr>
-        </p:nvSpPr>
-        <p:spPr>
-          <a:xfrm>
-            <a:off x="839788" y="365125"/>
-            <a:ext cx="10515600" cy="1325563"/>
-          </a:xfrm>
-        </p:spPr>
-        <p:txBody>
-          <a:bodyPr/>
-          <a:lstStyle/>
-          <a:p>
-            <a:r>
-              <a:rPr lang="en-US"/>
-              <a:t>Click to edit Master title style</a:t>
-            </a:r>
-          </a:p>
-        </p:txBody>
-      </p:sp>
-      <p:sp>
-        <p:nvSpPr>
-          <p:cNvPr id="3" name="Text Placeholder 2">
-            <a:extLst>
-              <a:ext uri="{FF2B5EF4-FFF2-40B4-BE49-F238E27FC236}">
-                <a16:creationId xmlns:a16="http://schemas.microsoft.com/office/drawing/2014/main" id="{D67B304C-3DDC-C4B9-DDD3-E741109AF5DE}"/>
-              </a:ext>
-            </a:extLst>
-          </p:cNvPr>
-          <p:cNvSpPr>
-            <a:spLocks noGrp="1"/>
-          </p:cNvSpPr>
-          <p:nvPr>
-            <p:ph type="body" idx="1"/>
-          </p:nvPr>
-        </p:nvSpPr>
-        <p:spPr>
-          <a:xfrm>
-            <a:off x="839788" y="1681163"/>
-            <a:ext cx="5157787" cy="823912"/>
-          </a:xfrm>
-        </p:spPr>
-        <p:txBody>
-          <a:bodyPr anchor="b"/>
-          <a:lstStyle>
-            <a:lvl1pPr marL="0" indent="0">
-              <a:buNone/>
-              <a:defRPr sz="2400" b="1"/>
-            </a:lvl1pPr>
-            <a:lvl2pPr marL="457200" indent="0">
-              <a:buNone/>
-              <a:defRPr sz="2000" b="1"/>
-            </a:lvl2pPr>
-            <a:lvl3pPr marL="914400" indent="0">
-              <a:buNone/>
-              <a:defRPr sz="1800" b="1"/>
-            </a:lvl3pPr>
-            <a:lvl4pPr marL="1371600" indent="0">
-              <a:buNone/>
-              <a:defRPr sz="1600" b="1"/>
-            </a:lvl4pPr>
-            <a:lvl5pPr marL="1828800" indent="0">
-              <a:buNone/>
-              <a:defRPr sz="1600" b="1"/>
-            </a:lvl5pPr>
-            <a:lvl6pPr marL="2286000" indent="0">
-              <a:buNone/>
-              <a:defRPr sz="1600" b="1"/>
-            </a:lvl6pPr>
-            <a:lvl7pPr marL="2743200" indent="0">
-              <a:buNone/>
-              <a:defRPr sz="1600" b="1"/>
-            </a:lvl7pPr>
-            <a:lvl8pPr marL="3200400" indent="0">
-              <a:buNone/>
-              <a:defRPr sz="1600" b="1"/>
-            </a:lvl8pPr>
-            <a:lvl9pPr marL="3657600" indent="0">
-              <a:buNone/>
-              <a:defRPr sz="1600" b="1"/>
-            </a:lvl9pPr>
-          </a:lstStyle>
-          <a:p>
-            <a:pPr lvl="0"/>
-            <a:r>
-              <a:rPr lang="en-US"/>
-              <a:t>Click to edit Master text styles</a:t>
-            </a:r>
-          </a:p>
-        </p:txBody>
-      </p:sp>
-      <p:sp>
-        <p:nvSpPr>
-          <p:cNvPr id="4" name="Content Placeholder 3">
-            <a:extLst>
-              <a:ext uri="{FF2B5EF4-FFF2-40B4-BE49-F238E27FC236}">
-                <a16:creationId xmlns:a16="http://schemas.microsoft.com/office/drawing/2014/main" id="{B91D2621-67D9-D48B-EE8C-82046B4F0F51}"/>
-              </a:ext>
-            </a:extLst>
-          </p:cNvPr>
-          <p:cNvSpPr>
-            <a:spLocks noGrp="1"/>
-          </p:cNvSpPr>
-          <p:nvPr>
-            <p:ph sz="half" idx="2"/>
-          </p:nvPr>
-        </p:nvSpPr>
-        <p:spPr>
-          <a:xfrm>
-            <a:off x="839788" y="2505075"/>
-            <a:ext cx="5157787" cy="3684588"/>
-          </a:xfrm>
-        </p:spPr>
-        <p:txBody>
-          <a:bodyPr/>
-          <a:lstStyle/>
-          <a:p>
-            <a:pPr lvl="0"/>
-            <a:r>
-              <a:rPr lang="en-US"/>
-              <a:t>Click to edit Master text styles</a:t>
-            </a:r>
-          </a:p>
-          <a:p>
-            <a:pPr lvl="1"/>
-            <a:r>
-              <a:rPr lang="en-US"/>
-              <a:t>Second level</a:t>
-            </a:r>
-          </a:p>
-          <a:p>
-            <a:pPr lvl="2"/>
-            <a:r>
-              <a:rPr lang="en-US"/>
-              <a:t>Third level</a:t>
-            </a:r>
-          </a:p>
-          <a:p>
-            <a:pPr lvl="3"/>
-            <a:r>
-              <a:rPr lang="en-US"/>
-              <a:t>Fourth level</a:t>
-            </a:r>
-          </a:p>
-          <a:p>
-            <a:pPr lvl="4"/>
-            <a:r>
-              <a:rPr lang="en-US"/>
-              <a:t>Fifth level</a:t>
-            </a:r>
-          </a:p>
-        </p:txBody>
-      </p:sp>
-      <p:sp>
-        <p:nvSpPr>
-          <p:cNvPr id="5" name="Text Placeholder 4">
-            <a:extLst>
-              <a:ext uri="{FF2B5EF4-FFF2-40B4-BE49-F238E27FC236}">
-                <a16:creationId xmlns:a16="http://schemas.microsoft.com/office/drawing/2014/main" id="{8D7E327D-C196-A3B5-C1A8-A9CD53124E0E}"/>
-              </a:ext>
-            </a:extLst>
-          </p:cNvPr>
-          <p:cNvSpPr>
-            <a:spLocks noGrp="1"/>
-          </p:cNvSpPr>
-          <p:nvPr>
-            <p:ph type="body" sz="quarter" idx="3"/>
-          </p:nvPr>
-        </p:nvSpPr>
-        <p:spPr>
-          <a:xfrm>
-            <a:off x="6172200" y="1681163"/>
-            <a:ext cx="5183188" cy="823912"/>
-          </a:xfrm>
-        </p:spPr>
-        <p:txBody>
-          <a:bodyPr anchor="b"/>
-          <a:lstStyle>
-            <a:lvl1pPr marL="0" indent="0">
-              <a:buNone/>
-              <a:defRPr sz="2400" b="1"/>
-            </a:lvl1pPr>
-            <a:lvl2pPr marL="457200" indent="0">
-              <a:buNone/>
-              <a:defRPr sz="2000" b="1"/>
-            </a:lvl2pPr>
-            <a:lvl3pPr marL="914400" indent="0">
-              <a:buNone/>
-              <a:defRPr sz="1800" b="1"/>
-            </a:lvl3pPr>
-            <a:lvl4pPr marL="1371600" indent="0">
-              <a:buNone/>
-              <a:defRPr sz="1600" b="1"/>
-            </a:lvl4pPr>
-            <a:lvl5pPr marL="1828800" indent="0">
-              <a:buNone/>
-              <a:defRPr sz="1600" b="1"/>
-            </a:lvl5pPr>
-            <a:lvl6pPr marL="2286000" indent="0">
-              <a:buNone/>
-              <a:defRPr sz="1600" b="1"/>
-            </a:lvl6pPr>
-            <a:lvl7pPr marL="2743200" indent="0">
-              <a:buNone/>
-              <a:defRPr sz="1600" b="1"/>
-            </a:lvl7pPr>
-            <a:lvl8pPr marL="3200400" indent="0">
-              <a:buNone/>
-              <a:defRPr sz="1600" b="1"/>
-            </a:lvl8pPr>
-            <a:lvl9pPr marL="3657600" indent="0">
-              <a:buNone/>
-              <a:defRPr sz="1600" b="1"/>
-            </a:lvl9pPr>
-          </a:lstStyle>
-          <a:p>
-            <a:pPr lvl="0"/>
-            <a:r>
-              <a:rPr lang="en-US"/>
-              <a:t>Click to edit Master text styles</a:t>
-            </a:r>
-          </a:p>
-        </p:txBody>
-      </p:sp>
-      <p:sp>
-        <p:nvSpPr>
-          <p:cNvPr id="6" name="Content Placeholder 5">
-            <a:extLst>
-              <a:ext uri="{FF2B5EF4-FFF2-40B4-BE49-F238E27FC236}">
-                <a16:creationId xmlns:a16="http://schemas.microsoft.com/office/drawing/2014/main" id="{A2910954-0CD3-652C-2D14-9284ABE7C80B}"/>
-              </a:ext>
-            </a:extLst>
-          </p:cNvPr>
-          <p:cNvSpPr>
-            <a:spLocks noGrp="1"/>
-          </p:cNvSpPr>
-          <p:nvPr>
-            <p:ph sz="quarter" idx="4"/>
-          </p:nvPr>
-        </p:nvSpPr>
-        <p:spPr>
-          <a:xfrm>
-            <a:off x="6172200" y="2505075"/>
-            <a:ext cx="5183188" cy="3684588"/>
-          </a:xfrm>
-        </p:spPr>
-        <p:txBody>
-          <a:bodyPr/>
-          <a:lstStyle/>
-          <a:p>
-            <a:pPr lvl="0"/>
-            <a:r>
-              <a:rPr lang="en-US"/>
-              <a:t>Click to edit Master text styles</a:t>
-            </a:r>
-          </a:p>
-          <a:p>
-            <a:pPr lvl="1"/>
-            <a:r>
-              <a:rPr lang="en-US"/>
-              <a:t>Second level</a:t>
-            </a:r>
-          </a:p>
-          <a:p>
-            <a:pPr lvl="2"/>
-            <a:r>
-              <a:rPr lang="en-US"/>
-              <a:t>Third level</a:t>
-            </a:r>
-          </a:p>
-          <a:p>
-            <a:pPr lvl="3"/>
-            <a:r>
-              <a:rPr lang="en-US"/>
-              <a:t>Fourth level</a:t>
-            </a:r>
-          </a:p>
-          <a:p>
-            <a:pPr lvl="4"/>
-            <a:r>
-              <a:rPr lang="en-US"/>
-              <a:t>Fifth level</a:t>
-            </a:r>
-          </a:p>
-        </p:txBody>
-      </p:sp>
-      <p:sp>
-        <p:nvSpPr>
-          <p:cNvPr id="7" name="Date Placeholder 6">
-            <a:extLst>
-              <a:ext uri="{FF2B5EF4-FFF2-40B4-BE49-F238E27FC236}">
-                <a16:creationId xmlns:a16="http://schemas.microsoft.com/office/drawing/2014/main" id="{F1883B89-C4A6-018C-2EE4-6E3F4857BF73}"/>
-              </a:ext>
-            </a:extLst>
-          </p:cNvPr>
-          <p:cNvSpPr>
-            <a:spLocks noGrp="1"/>
-          </p:cNvSpPr>
-          <p:nvPr>
-            <p:ph type="dt" sz="half" idx="10"/>
-          </p:nvPr>
-        </p:nvSpPr>
-        <p:spPr/>
-        <p:txBody>
-          <a:bodyPr/>
-          <a:lstStyle/>
-          <a:p>
-            <a:fld id="{ED348A9C-BD5D-4D94-9FB0-6A54E4793266}" type="datetimeFigureOut">
-              <a:rPr lang="en-US" smtClean="0"/>
-              <a:t>10/9/2025</a:t>
-            </a:fld>
-            <a:endParaRPr lang="en-US"/>
-          </a:p>
-        </p:txBody>
-      </p:sp>
-      <p:sp>
-        <p:nvSpPr>
-          <p:cNvPr id="8" name="Footer Placeholder 7">
-            <a:extLst>
-              <a:ext uri="{FF2B5EF4-FFF2-40B4-BE49-F238E27FC236}">
-                <a16:creationId xmlns:a16="http://schemas.microsoft.com/office/drawing/2014/main" id="{882CD746-60F3-BFCB-65A9-354C872EADEC}"/>
-              </a:ext>
-            </a:extLst>
-          </p:cNvPr>
-          <p:cNvSpPr>
-            <a:spLocks noGrp="1"/>
-          </p:cNvSpPr>
-          <p:nvPr>
-            <p:ph type="ftr" sz="quarter" idx="11"/>
-          </p:nvPr>
-        </p:nvSpPr>
-        <p:spPr/>
-        <p:txBody>
-          <a:bodyPr/>
-          <a:lstStyle/>
-          <a:p>
-            <a:endParaRPr lang="en-US"/>
-          </a:p>
-        </p:txBody>
-      </p:sp>
-      <p:sp>
-        <p:nvSpPr>
-          <p:cNvPr id="9" name="Slide Number Placeholder 8">
-            <a:extLst>
-              <a:ext uri="{FF2B5EF4-FFF2-40B4-BE49-F238E27FC236}">
-                <a16:creationId xmlns:a16="http://schemas.microsoft.com/office/drawing/2014/main" id="{5D570FE8-8C5D-40D1-31CE-B809DC2BC418}"/>
-              </a:ext>
-            </a:extLst>
-          </p:cNvPr>
-          <p:cNvSpPr>
-            <a:spLocks noGrp="1"/>
-          </p:cNvSpPr>
-          <p:nvPr>
-            <p:ph type="sldNum" sz="quarter" idx="12"/>
-          </p:nvPr>
-        </p:nvSpPr>
-        <p:spPr/>
-        <p:txBody>
-          <a:bodyPr/>
-          <a:lstStyle/>
-          <a:p>
-            <a:fld id="{DEF385AC-E751-4AD7-8066-B6D2A2571C10}" type="slidenum">
-              <a:rPr lang="en-US" smtClean="0"/>
-              <a:t>‹#›</a:t>
-            </a:fld>
-            <a:endParaRPr lang="en-US"/>
-          </a:p>
-        </p:txBody>
-      </p:sp>
-    </p:spTree>
-    <p:extLst>
-      <p:ext uri="{BB962C8B-B14F-4D97-AF65-F5344CB8AC3E}">
-        <p14:creationId xmlns:p14="http://schemas.microsoft.com/office/powerpoint/2010/main" val="4038038301"/>
-      </p:ext>
-    </p:extLst>
-  </p:cSld>
-  <p:clrMapOvr>
-    <a:masterClrMapping/>
-  </p:clrMapOvr>
-</p:sldLayout>
-</file>
-
-<file path=ppt/slideLayouts/slideLayout6.xml><?xml version="1.0" encoding="utf-8"?>
+<file path=ppt/slideLayouts/slideLayout4.xml><?xml version="1.0" encoding="utf-8"?>
 <p:sldLayout xmlns:a="http://schemas.openxmlformats.org/drawingml/2006/main" xmlns:r="http://schemas.openxmlformats.org/officeDocument/2006/relationships" xmlns:p="http://schemas.openxmlformats.org/presentationml/2006/main" type="titleOnly" preserve="1">
   <p:cSld name="Title Only">
     <p:spTree>
@@ -1967,7 +1658,7 @@
           <a:p>
             <a:fld id="{ED348A9C-BD5D-4D94-9FB0-6A54E4793266}" type="datetimeFigureOut">
               <a:rPr lang="en-US" smtClean="0"/>
-              <a:t>10/9/2025</a:t>
+              <a:t>10/17/2025</a:t>
             </a:fld>
             <a:endParaRPr lang="en-US"/>
           </a:p>
@@ -2037,10 +1728,26 @@
   <p:clrMapOvr>
     <a:masterClrMapping/>
   </p:clrMapOvr>
+  <p:extLst>
+    <p:ext uri="{DCECCB84-F9BA-43D5-87BE-67443E8EF086}">
+      <p15:sldGuideLst xmlns:p15="http://schemas.microsoft.com/office/powerpoint/2012/main">
+        <p15:guide id="1" orient="horz" pos="2160" userDrawn="1">
+          <p15:clr>
+            <a:srgbClr val="FBAE40"/>
+          </p15:clr>
+        </p15:guide>
+        <p15:guide id="2" pos="3840" userDrawn="1">
+          <p15:clr>
+            <a:srgbClr val="FBAE40"/>
+          </p15:clr>
+        </p15:guide>
+      </p15:sldGuideLst>
+    </p:ext>
+  </p:extLst>
 </p:sldLayout>
 </file>
 
-<file path=ppt/slideLayouts/slideLayout7.xml><?xml version="1.0" encoding="utf-8"?>
+<file path=ppt/slideLayouts/slideLayout5.xml><?xml version="1.0" encoding="utf-8"?>
 <p:sldLayout xmlns:a="http://schemas.openxmlformats.org/drawingml/2006/main" xmlns:r="http://schemas.openxmlformats.org/officeDocument/2006/relationships" xmlns:p="http://schemas.openxmlformats.org/presentationml/2006/main" type="blank" preserve="1">
   <p:cSld name="Blank">
     <p:spTree>
@@ -2057,692 +1764,10 @@
           <a:chExt cx="0" cy="0"/>
         </a:xfrm>
       </p:grpSpPr>
-      <p:sp>
-        <p:nvSpPr>
-          <p:cNvPr id="2" name="Date Placeholder 1">
-            <a:extLst>
-              <a:ext uri="{FF2B5EF4-FFF2-40B4-BE49-F238E27FC236}">
-                <a16:creationId xmlns:a16="http://schemas.microsoft.com/office/drawing/2014/main" id="{6E7CE39A-4CEB-78D9-8A9F-6468B57C4C58}"/>
-              </a:ext>
-            </a:extLst>
-          </p:cNvPr>
-          <p:cNvSpPr>
-            <a:spLocks noGrp="1"/>
-          </p:cNvSpPr>
-          <p:nvPr>
-            <p:ph type="dt" sz="half" idx="10"/>
-          </p:nvPr>
-        </p:nvSpPr>
-        <p:spPr/>
-        <p:txBody>
-          <a:bodyPr/>
-          <a:lstStyle/>
-          <a:p>
-            <a:fld id="{ED348A9C-BD5D-4D94-9FB0-6A54E4793266}" type="datetimeFigureOut">
-              <a:rPr lang="en-US" smtClean="0"/>
-              <a:t>10/9/2025</a:t>
-            </a:fld>
-            <a:endParaRPr lang="en-US"/>
-          </a:p>
-        </p:txBody>
-      </p:sp>
-      <p:sp>
-        <p:nvSpPr>
-          <p:cNvPr id="3" name="Footer Placeholder 2">
-            <a:extLst>
-              <a:ext uri="{FF2B5EF4-FFF2-40B4-BE49-F238E27FC236}">
-                <a16:creationId xmlns:a16="http://schemas.microsoft.com/office/drawing/2014/main" id="{123139C6-5CAA-05A4-8A1F-27CD4AB9CD2E}"/>
-              </a:ext>
-            </a:extLst>
-          </p:cNvPr>
-          <p:cNvSpPr>
-            <a:spLocks noGrp="1"/>
-          </p:cNvSpPr>
-          <p:nvPr>
-            <p:ph type="ftr" sz="quarter" idx="11"/>
-          </p:nvPr>
-        </p:nvSpPr>
-        <p:spPr/>
-        <p:txBody>
-          <a:bodyPr/>
-          <a:lstStyle/>
-          <a:p>
-            <a:endParaRPr lang="en-US"/>
-          </a:p>
-        </p:txBody>
-      </p:sp>
-      <p:sp>
-        <p:nvSpPr>
-          <p:cNvPr id="4" name="Slide Number Placeholder 3">
-            <a:extLst>
-              <a:ext uri="{FF2B5EF4-FFF2-40B4-BE49-F238E27FC236}">
-                <a16:creationId xmlns:a16="http://schemas.microsoft.com/office/drawing/2014/main" id="{476CF88E-D1A3-3D8E-6C8F-B14FF90B32E2}"/>
-              </a:ext>
-            </a:extLst>
-          </p:cNvPr>
-          <p:cNvSpPr>
-            <a:spLocks noGrp="1"/>
-          </p:cNvSpPr>
-          <p:nvPr>
-            <p:ph type="sldNum" sz="quarter" idx="12"/>
-          </p:nvPr>
-        </p:nvSpPr>
-        <p:spPr/>
-        <p:txBody>
-          <a:bodyPr/>
-          <a:lstStyle/>
-          <a:p>
-            <a:fld id="{DEF385AC-E751-4AD7-8066-B6D2A2571C10}" type="slidenum">
-              <a:rPr lang="en-US" smtClean="0"/>
-              <a:t>‹#›</a:t>
-            </a:fld>
-            <a:endParaRPr lang="en-US"/>
-          </a:p>
-        </p:txBody>
-      </p:sp>
     </p:spTree>
     <p:extLst>
       <p:ext uri="{BB962C8B-B14F-4D97-AF65-F5344CB8AC3E}">
         <p14:creationId xmlns:p14="http://schemas.microsoft.com/office/powerpoint/2010/main" val="2079748875"/>
-      </p:ext>
-    </p:extLst>
-  </p:cSld>
-  <p:clrMapOvr>
-    <a:masterClrMapping/>
-  </p:clrMapOvr>
-</p:sldLayout>
-</file>
-
-<file path=ppt/slideLayouts/slideLayout8.xml><?xml version="1.0" encoding="utf-8"?>
-<p:sldLayout xmlns:a="http://schemas.openxmlformats.org/drawingml/2006/main" xmlns:r="http://schemas.openxmlformats.org/officeDocument/2006/relationships" xmlns:p="http://schemas.openxmlformats.org/presentationml/2006/main" type="objTx" preserve="1">
-  <p:cSld name="Content with Caption">
-    <p:spTree>
-      <p:nvGrpSpPr>
-        <p:cNvPr id="1" name=""/>
-        <p:cNvGrpSpPr/>
-        <p:nvPr/>
-      </p:nvGrpSpPr>
-      <p:grpSpPr>
-        <a:xfrm>
-          <a:off x="0" y="0"/>
-          <a:ext cx="0" cy="0"/>
-          <a:chOff x="0" y="0"/>
-          <a:chExt cx="0" cy="0"/>
-        </a:xfrm>
-      </p:grpSpPr>
-      <p:sp>
-        <p:nvSpPr>
-          <p:cNvPr id="2" name="Title 1">
-            <a:extLst>
-              <a:ext uri="{FF2B5EF4-FFF2-40B4-BE49-F238E27FC236}">
-                <a16:creationId xmlns:a16="http://schemas.microsoft.com/office/drawing/2014/main" id="{5C01955B-DE02-633C-3856-A24E6EBADFCC}"/>
-              </a:ext>
-            </a:extLst>
-          </p:cNvPr>
-          <p:cNvSpPr>
-            <a:spLocks noGrp="1"/>
-          </p:cNvSpPr>
-          <p:nvPr>
-            <p:ph type="title"/>
-          </p:nvPr>
-        </p:nvSpPr>
-        <p:spPr>
-          <a:xfrm>
-            <a:off x="839788" y="457200"/>
-            <a:ext cx="3932237" cy="1600200"/>
-          </a:xfrm>
-        </p:spPr>
-        <p:txBody>
-          <a:bodyPr anchor="b"/>
-          <a:lstStyle>
-            <a:lvl1pPr>
-              <a:defRPr sz="3200"/>
-            </a:lvl1pPr>
-          </a:lstStyle>
-          <a:p>
-            <a:r>
-              <a:rPr lang="en-US"/>
-              <a:t>Click to edit Master title style</a:t>
-            </a:r>
-          </a:p>
-        </p:txBody>
-      </p:sp>
-      <p:sp>
-        <p:nvSpPr>
-          <p:cNvPr id="3" name="Content Placeholder 2">
-            <a:extLst>
-              <a:ext uri="{FF2B5EF4-FFF2-40B4-BE49-F238E27FC236}">
-                <a16:creationId xmlns:a16="http://schemas.microsoft.com/office/drawing/2014/main" id="{4E54BA81-D54B-7084-B922-2A3D9FD14B4C}"/>
-              </a:ext>
-            </a:extLst>
-          </p:cNvPr>
-          <p:cNvSpPr>
-            <a:spLocks noGrp="1"/>
-          </p:cNvSpPr>
-          <p:nvPr>
-            <p:ph idx="1"/>
-          </p:nvPr>
-        </p:nvSpPr>
-        <p:spPr>
-          <a:xfrm>
-            <a:off x="5183188" y="987425"/>
-            <a:ext cx="6172200" cy="4873625"/>
-          </a:xfrm>
-        </p:spPr>
-        <p:txBody>
-          <a:bodyPr/>
-          <a:lstStyle>
-            <a:lvl1pPr>
-              <a:defRPr sz="3200"/>
-            </a:lvl1pPr>
-            <a:lvl2pPr>
-              <a:defRPr sz="2800"/>
-            </a:lvl2pPr>
-            <a:lvl3pPr>
-              <a:defRPr sz="2400"/>
-            </a:lvl3pPr>
-            <a:lvl4pPr>
-              <a:defRPr sz="2000"/>
-            </a:lvl4pPr>
-            <a:lvl5pPr>
-              <a:defRPr sz="2000"/>
-            </a:lvl5pPr>
-            <a:lvl6pPr>
-              <a:defRPr sz="2000"/>
-            </a:lvl6pPr>
-            <a:lvl7pPr>
-              <a:defRPr sz="2000"/>
-            </a:lvl7pPr>
-            <a:lvl8pPr>
-              <a:defRPr sz="2000"/>
-            </a:lvl8pPr>
-            <a:lvl9pPr>
-              <a:defRPr sz="2000"/>
-            </a:lvl9pPr>
-          </a:lstStyle>
-          <a:p>
-            <a:pPr lvl="0"/>
-            <a:r>
-              <a:rPr lang="en-US"/>
-              <a:t>Click to edit Master text styles</a:t>
-            </a:r>
-          </a:p>
-          <a:p>
-            <a:pPr lvl="1"/>
-            <a:r>
-              <a:rPr lang="en-US"/>
-              <a:t>Second level</a:t>
-            </a:r>
-          </a:p>
-          <a:p>
-            <a:pPr lvl="2"/>
-            <a:r>
-              <a:rPr lang="en-US"/>
-              <a:t>Third level</a:t>
-            </a:r>
-          </a:p>
-          <a:p>
-            <a:pPr lvl="3"/>
-            <a:r>
-              <a:rPr lang="en-US"/>
-              <a:t>Fourth level</a:t>
-            </a:r>
-          </a:p>
-          <a:p>
-            <a:pPr lvl="4"/>
-            <a:r>
-              <a:rPr lang="en-US"/>
-              <a:t>Fifth level</a:t>
-            </a:r>
-          </a:p>
-        </p:txBody>
-      </p:sp>
-      <p:sp>
-        <p:nvSpPr>
-          <p:cNvPr id="4" name="Text Placeholder 3">
-            <a:extLst>
-              <a:ext uri="{FF2B5EF4-FFF2-40B4-BE49-F238E27FC236}">
-                <a16:creationId xmlns:a16="http://schemas.microsoft.com/office/drawing/2014/main" id="{ACF7B0F2-AFAB-D6B2-0E73-BC12A3E6AFA2}"/>
-              </a:ext>
-            </a:extLst>
-          </p:cNvPr>
-          <p:cNvSpPr>
-            <a:spLocks noGrp="1"/>
-          </p:cNvSpPr>
-          <p:nvPr>
-            <p:ph type="body" sz="half" idx="2"/>
-          </p:nvPr>
-        </p:nvSpPr>
-        <p:spPr>
-          <a:xfrm>
-            <a:off x="839788" y="2057400"/>
-            <a:ext cx="3932237" cy="3811588"/>
-          </a:xfrm>
-        </p:spPr>
-        <p:txBody>
-          <a:bodyPr/>
-          <a:lstStyle>
-            <a:lvl1pPr marL="0" indent="0">
-              <a:buNone/>
-              <a:defRPr sz="1600"/>
-            </a:lvl1pPr>
-            <a:lvl2pPr marL="457200" indent="0">
-              <a:buNone/>
-              <a:defRPr sz="1400"/>
-            </a:lvl2pPr>
-            <a:lvl3pPr marL="914400" indent="0">
-              <a:buNone/>
-              <a:defRPr sz="1200"/>
-            </a:lvl3pPr>
-            <a:lvl4pPr marL="1371600" indent="0">
-              <a:buNone/>
-              <a:defRPr sz="1000"/>
-            </a:lvl4pPr>
-            <a:lvl5pPr marL="1828800" indent="0">
-              <a:buNone/>
-              <a:defRPr sz="1000"/>
-            </a:lvl5pPr>
-            <a:lvl6pPr marL="2286000" indent="0">
-              <a:buNone/>
-              <a:defRPr sz="1000"/>
-            </a:lvl6pPr>
-            <a:lvl7pPr marL="2743200" indent="0">
-              <a:buNone/>
-              <a:defRPr sz="1000"/>
-            </a:lvl7pPr>
-            <a:lvl8pPr marL="3200400" indent="0">
-              <a:buNone/>
-              <a:defRPr sz="1000"/>
-            </a:lvl8pPr>
-            <a:lvl9pPr marL="3657600" indent="0">
-              <a:buNone/>
-              <a:defRPr sz="1000"/>
-            </a:lvl9pPr>
-          </a:lstStyle>
-          <a:p>
-            <a:pPr lvl="0"/>
-            <a:r>
-              <a:rPr lang="en-US"/>
-              <a:t>Click to edit Master text styles</a:t>
-            </a:r>
-          </a:p>
-        </p:txBody>
-      </p:sp>
-      <p:sp>
-        <p:nvSpPr>
-          <p:cNvPr id="5" name="Date Placeholder 4">
-            <a:extLst>
-              <a:ext uri="{FF2B5EF4-FFF2-40B4-BE49-F238E27FC236}">
-                <a16:creationId xmlns:a16="http://schemas.microsoft.com/office/drawing/2014/main" id="{B62584E5-14F0-BDF2-46F1-3F9842525AC0}"/>
-              </a:ext>
-            </a:extLst>
-          </p:cNvPr>
-          <p:cNvSpPr>
-            <a:spLocks noGrp="1"/>
-          </p:cNvSpPr>
-          <p:nvPr>
-            <p:ph type="dt" sz="half" idx="10"/>
-          </p:nvPr>
-        </p:nvSpPr>
-        <p:spPr/>
-        <p:txBody>
-          <a:bodyPr/>
-          <a:lstStyle/>
-          <a:p>
-            <a:fld id="{ED348A9C-BD5D-4D94-9FB0-6A54E4793266}" type="datetimeFigureOut">
-              <a:rPr lang="en-US" smtClean="0"/>
-              <a:t>10/9/2025</a:t>
-            </a:fld>
-            <a:endParaRPr lang="en-US"/>
-          </a:p>
-        </p:txBody>
-      </p:sp>
-      <p:sp>
-        <p:nvSpPr>
-          <p:cNvPr id="6" name="Footer Placeholder 5">
-            <a:extLst>
-              <a:ext uri="{FF2B5EF4-FFF2-40B4-BE49-F238E27FC236}">
-                <a16:creationId xmlns:a16="http://schemas.microsoft.com/office/drawing/2014/main" id="{601BE11B-400D-2748-1087-8D94F1B0596B}"/>
-              </a:ext>
-            </a:extLst>
-          </p:cNvPr>
-          <p:cNvSpPr>
-            <a:spLocks noGrp="1"/>
-          </p:cNvSpPr>
-          <p:nvPr>
-            <p:ph type="ftr" sz="quarter" idx="11"/>
-          </p:nvPr>
-        </p:nvSpPr>
-        <p:spPr/>
-        <p:txBody>
-          <a:bodyPr/>
-          <a:lstStyle/>
-          <a:p>
-            <a:endParaRPr lang="en-US"/>
-          </a:p>
-        </p:txBody>
-      </p:sp>
-      <p:sp>
-        <p:nvSpPr>
-          <p:cNvPr id="7" name="Slide Number Placeholder 6">
-            <a:extLst>
-              <a:ext uri="{FF2B5EF4-FFF2-40B4-BE49-F238E27FC236}">
-                <a16:creationId xmlns:a16="http://schemas.microsoft.com/office/drawing/2014/main" id="{4D2AA0DF-561D-CF5D-5DE4-F5BF7BCCF616}"/>
-              </a:ext>
-            </a:extLst>
-          </p:cNvPr>
-          <p:cNvSpPr>
-            <a:spLocks noGrp="1"/>
-          </p:cNvSpPr>
-          <p:nvPr>
-            <p:ph type="sldNum" sz="quarter" idx="12"/>
-          </p:nvPr>
-        </p:nvSpPr>
-        <p:spPr/>
-        <p:txBody>
-          <a:bodyPr/>
-          <a:lstStyle/>
-          <a:p>
-            <a:fld id="{DEF385AC-E751-4AD7-8066-B6D2A2571C10}" type="slidenum">
-              <a:rPr lang="en-US" smtClean="0"/>
-              <a:t>‹#›</a:t>
-            </a:fld>
-            <a:endParaRPr lang="en-US"/>
-          </a:p>
-        </p:txBody>
-      </p:sp>
-    </p:spTree>
-    <p:extLst>
-      <p:ext uri="{BB962C8B-B14F-4D97-AF65-F5344CB8AC3E}">
-        <p14:creationId xmlns:p14="http://schemas.microsoft.com/office/powerpoint/2010/main" val="486168784"/>
-      </p:ext>
-    </p:extLst>
-  </p:cSld>
-  <p:clrMapOvr>
-    <a:masterClrMapping/>
-  </p:clrMapOvr>
-</p:sldLayout>
-</file>
-
-<file path=ppt/slideLayouts/slideLayout9.xml><?xml version="1.0" encoding="utf-8"?>
-<p:sldLayout xmlns:a="http://schemas.openxmlformats.org/drawingml/2006/main" xmlns:r="http://schemas.openxmlformats.org/officeDocument/2006/relationships" xmlns:p="http://schemas.openxmlformats.org/presentationml/2006/main" type="picTx" preserve="1">
-  <p:cSld name="Picture with Caption">
-    <p:spTree>
-      <p:nvGrpSpPr>
-        <p:cNvPr id="1" name=""/>
-        <p:cNvGrpSpPr/>
-        <p:nvPr/>
-      </p:nvGrpSpPr>
-      <p:grpSpPr>
-        <a:xfrm>
-          <a:off x="0" y="0"/>
-          <a:ext cx="0" cy="0"/>
-          <a:chOff x="0" y="0"/>
-          <a:chExt cx="0" cy="0"/>
-        </a:xfrm>
-      </p:grpSpPr>
-      <p:sp>
-        <p:nvSpPr>
-          <p:cNvPr id="2" name="Title 1">
-            <a:extLst>
-              <a:ext uri="{FF2B5EF4-FFF2-40B4-BE49-F238E27FC236}">
-                <a16:creationId xmlns:a16="http://schemas.microsoft.com/office/drawing/2014/main" id="{BA813C8F-91AD-8184-262A-E7CEF563AB68}"/>
-              </a:ext>
-            </a:extLst>
-          </p:cNvPr>
-          <p:cNvSpPr>
-            <a:spLocks noGrp="1"/>
-          </p:cNvSpPr>
-          <p:nvPr>
-            <p:ph type="title"/>
-          </p:nvPr>
-        </p:nvSpPr>
-        <p:spPr>
-          <a:xfrm>
-            <a:off x="839788" y="457200"/>
-            <a:ext cx="3932237" cy="1600200"/>
-          </a:xfrm>
-        </p:spPr>
-        <p:txBody>
-          <a:bodyPr anchor="b"/>
-          <a:lstStyle>
-            <a:lvl1pPr>
-              <a:defRPr sz="3200"/>
-            </a:lvl1pPr>
-          </a:lstStyle>
-          <a:p>
-            <a:r>
-              <a:rPr lang="en-US"/>
-              <a:t>Click to edit Master title style</a:t>
-            </a:r>
-          </a:p>
-        </p:txBody>
-      </p:sp>
-      <p:sp>
-        <p:nvSpPr>
-          <p:cNvPr id="3" name="Picture Placeholder 2">
-            <a:extLst>
-              <a:ext uri="{FF2B5EF4-FFF2-40B4-BE49-F238E27FC236}">
-                <a16:creationId xmlns:a16="http://schemas.microsoft.com/office/drawing/2014/main" id="{3B278A45-3AA2-50E7-6CE2-2361C84CC92A}"/>
-              </a:ext>
-            </a:extLst>
-          </p:cNvPr>
-          <p:cNvSpPr>
-            <a:spLocks noGrp="1"/>
-          </p:cNvSpPr>
-          <p:nvPr>
-            <p:ph type="pic" idx="1"/>
-          </p:nvPr>
-        </p:nvSpPr>
-        <p:spPr>
-          <a:xfrm>
-            <a:off x="5183188" y="987425"/>
-            <a:ext cx="6172200" cy="4873625"/>
-          </a:xfrm>
-        </p:spPr>
-        <p:txBody>
-          <a:bodyPr/>
-          <a:lstStyle>
-            <a:lvl1pPr marL="0" indent="0">
-              <a:buNone/>
-              <a:defRPr sz="3200"/>
-            </a:lvl1pPr>
-            <a:lvl2pPr marL="457200" indent="0">
-              <a:buNone/>
-              <a:defRPr sz="2800"/>
-            </a:lvl2pPr>
-            <a:lvl3pPr marL="914400" indent="0">
-              <a:buNone/>
-              <a:defRPr sz="2400"/>
-            </a:lvl3pPr>
-            <a:lvl4pPr marL="1371600" indent="0">
-              <a:buNone/>
-              <a:defRPr sz="2000"/>
-            </a:lvl4pPr>
-            <a:lvl5pPr marL="1828800" indent="0">
-              <a:buNone/>
-              <a:defRPr sz="2000"/>
-            </a:lvl5pPr>
-            <a:lvl6pPr marL="2286000" indent="0">
-              <a:buNone/>
-              <a:defRPr sz="2000"/>
-            </a:lvl6pPr>
-            <a:lvl7pPr marL="2743200" indent="0">
-              <a:buNone/>
-              <a:defRPr sz="2000"/>
-            </a:lvl7pPr>
-            <a:lvl8pPr marL="3200400" indent="0">
-              <a:buNone/>
-              <a:defRPr sz="2000"/>
-            </a:lvl8pPr>
-            <a:lvl9pPr marL="3657600" indent="0">
-              <a:buNone/>
-              <a:defRPr sz="2000"/>
-            </a:lvl9pPr>
-          </a:lstStyle>
-          <a:p>
-            <a:endParaRPr lang="en-US"/>
-          </a:p>
-        </p:txBody>
-      </p:sp>
-      <p:sp>
-        <p:nvSpPr>
-          <p:cNvPr id="4" name="Text Placeholder 3">
-            <a:extLst>
-              <a:ext uri="{FF2B5EF4-FFF2-40B4-BE49-F238E27FC236}">
-                <a16:creationId xmlns:a16="http://schemas.microsoft.com/office/drawing/2014/main" id="{2C92ED42-C0DD-7D4E-9096-ACF0D993F845}"/>
-              </a:ext>
-            </a:extLst>
-          </p:cNvPr>
-          <p:cNvSpPr>
-            <a:spLocks noGrp="1"/>
-          </p:cNvSpPr>
-          <p:nvPr>
-            <p:ph type="body" sz="half" idx="2"/>
-          </p:nvPr>
-        </p:nvSpPr>
-        <p:spPr>
-          <a:xfrm>
-            <a:off x="839788" y="2057400"/>
-            <a:ext cx="3932237" cy="3811588"/>
-          </a:xfrm>
-        </p:spPr>
-        <p:txBody>
-          <a:bodyPr/>
-          <a:lstStyle>
-            <a:lvl1pPr marL="0" indent="0">
-              <a:buNone/>
-              <a:defRPr sz="1600"/>
-            </a:lvl1pPr>
-            <a:lvl2pPr marL="457200" indent="0">
-              <a:buNone/>
-              <a:defRPr sz="1400"/>
-            </a:lvl2pPr>
-            <a:lvl3pPr marL="914400" indent="0">
-              <a:buNone/>
-              <a:defRPr sz="1200"/>
-            </a:lvl3pPr>
-            <a:lvl4pPr marL="1371600" indent="0">
-              <a:buNone/>
-              <a:defRPr sz="1000"/>
-            </a:lvl4pPr>
-            <a:lvl5pPr marL="1828800" indent="0">
-              <a:buNone/>
-              <a:defRPr sz="1000"/>
-            </a:lvl5pPr>
-            <a:lvl6pPr marL="2286000" indent="0">
-              <a:buNone/>
-              <a:defRPr sz="1000"/>
-            </a:lvl6pPr>
-            <a:lvl7pPr marL="2743200" indent="0">
-              <a:buNone/>
-              <a:defRPr sz="1000"/>
-            </a:lvl7pPr>
-            <a:lvl8pPr marL="3200400" indent="0">
-              <a:buNone/>
-              <a:defRPr sz="1000"/>
-            </a:lvl8pPr>
-            <a:lvl9pPr marL="3657600" indent="0">
-              <a:buNone/>
-              <a:defRPr sz="1000"/>
-            </a:lvl9pPr>
-          </a:lstStyle>
-          <a:p>
-            <a:pPr lvl="0"/>
-            <a:r>
-              <a:rPr lang="en-US"/>
-              <a:t>Click to edit Master text styles</a:t>
-            </a:r>
-          </a:p>
-        </p:txBody>
-      </p:sp>
-      <p:sp>
-        <p:nvSpPr>
-          <p:cNvPr id="5" name="Date Placeholder 4">
-            <a:extLst>
-              <a:ext uri="{FF2B5EF4-FFF2-40B4-BE49-F238E27FC236}">
-                <a16:creationId xmlns:a16="http://schemas.microsoft.com/office/drawing/2014/main" id="{5B7B35C6-73AE-4ADE-051B-DE441843FF2A}"/>
-              </a:ext>
-            </a:extLst>
-          </p:cNvPr>
-          <p:cNvSpPr>
-            <a:spLocks noGrp="1"/>
-          </p:cNvSpPr>
-          <p:nvPr>
-            <p:ph type="dt" sz="half" idx="10"/>
-          </p:nvPr>
-        </p:nvSpPr>
-        <p:spPr/>
-        <p:txBody>
-          <a:bodyPr/>
-          <a:lstStyle/>
-          <a:p>
-            <a:fld id="{ED348A9C-BD5D-4D94-9FB0-6A54E4793266}" type="datetimeFigureOut">
-              <a:rPr lang="en-US" smtClean="0"/>
-              <a:t>10/9/2025</a:t>
-            </a:fld>
-            <a:endParaRPr lang="en-US"/>
-          </a:p>
-        </p:txBody>
-      </p:sp>
-      <p:sp>
-        <p:nvSpPr>
-          <p:cNvPr id="6" name="Footer Placeholder 5">
-            <a:extLst>
-              <a:ext uri="{FF2B5EF4-FFF2-40B4-BE49-F238E27FC236}">
-                <a16:creationId xmlns:a16="http://schemas.microsoft.com/office/drawing/2014/main" id="{BD3B37C8-4DE8-2942-FDB4-C9040C7C9AC1}"/>
-              </a:ext>
-            </a:extLst>
-          </p:cNvPr>
-          <p:cNvSpPr>
-            <a:spLocks noGrp="1"/>
-          </p:cNvSpPr>
-          <p:nvPr>
-            <p:ph type="ftr" sz="quarter" idx="11"/>
-          </p:nvPr>
-        </p:nvSpPr>
-        <p:spPr/>
-        <p:txBody>
-          <a:bodyPr/>
-          <a:lstStyle/>
-          <a:p>
-            <a:endParaRPr lang="en-US"/>
-          </a:p>
-        </p:txBody>
-      </p:sp>
-      <p:sp>
-        <p:nvSpPr>
-          <p:cNvPr id="7" name="Slide Number Placeholder 6">
-            <a:extLst>
-              <a:ext uri="{FF2B5EF4-FFF2-40B4-BE49-F238E27FC236}">
-                <a16:creationId xmlns:a16="http://schemas.microsoft.com/office/drawing/2014/main" id="{F0B28D34-940D-5E86-B15F-925797E808EB}"/>
-              </a:ext>
-            </a:extLst>
-          </p:cNvPr>
-          <p:cNvSpPr>
-            <a:spLocks noGrp="1"/>
-          </p:cNvSpPr>
-          <p:nvPr>
-            <p:ph type="sldNum" sz="quarter" idx="12"/>
-          </p:nvPr>
-        </p:nvSpPr>
-        <p:spPr/>
-        <p:txBody>
-          <a:bodyPr/>
-          <a:lstStyle/>
-          <a:p>
-            <a:fld id="{DEF385AC-E751-4AD7-8066-B6D2A2571C10}" type="slidenum">
-              <a:rPr lang="en-US" smtClean="0"/>
-              <a:t>‹#›</a:t>
-            </a:fld>
-            <a:endParaRPr lang="en-US"/>
-          </a:p>
-        </p:txBody>
-      </p:sp>
-    </p:spTree>
-    <p:extLst>
-      <p:ext uri="{BB962C8B-B14F-4D97-AF65-F5344CB8AC3E}">
-        <p14:creationId xmlns:p14="http://schemas.microsoft.com/office/powerpoint/2010/main" val="3276938972"/>
       </p:ext>
     </p:extLst>
   </p:cSld>
@@ -2792,8 +1817,8 @@
         </p:nvSpPr>
         <p:spPr>
           <a:xfrm>
-            <a:off x="838200" y="365125"/>
-            <a:ext cx="10515600" cy="1325563"/>
+            <a:off x="159799" y="136526"/>
+            <a:ext cx="11878322" cy="544512"/>
           </a:xfrm>
           <a:prstGeom prst="rect">
             <a:avLst/>
@@ -2830,8 +1855,8 @@
         </p:nvSpPr>
         <p:spPr>
           <a:xfrm>
-            <a:off x="838200" y="1825625"/>
-            <a:ext cx="10515600" cy="4351338"/>
+            <a:off x="159799" y="861134"/>
+            <a:ext cx="11878322" cy="5315829"/>
           </a:xfrm>
           <a:prstGeom prst="rect">
             <a:avLst/>
@@ -2897,8 +1922,8 @@
         </p:nvSpPr>
         <p:spPr>
           <a:xfrm>
-            <a:off x="838200" y="6356350"/>
-            <a:ext cx="2743200" cy="365125"/>
+            <a:off x="159800" y="6356350"/>
+            <a:ext cx="1313894" cy="365125"/>
           </a:xfrm>
           <a:prstGeom prst="rect">
             <a:avLst/>
@@ -2920,7 +1945,7 @@
           <a:p>
             <a:fld id="{ED348A9C-BD5D-4D94-9FB0-6A54E4793266}" type="datetimeFigureOut">
               <a:rPr lang="en-US" smtClean="0"/>
-              <a:t>10/9/2025</a:t>
+              <a:t>10/17/2025</a:t>
             </a:fld>
             <a:endParaRPr lang="en-US"/>
           </a:p>
@@ -2944,8 +1969,8 @@
         </p:nvSpPr>
         <p:spPr>
           <a:xfrm>
-            <a:off x="4038600" y="6356350"/>
-            <a:ext cx="4114800" cy="365125"/>
+            <a:off x="2207581" y="6356350"/>
+            <a:ext cx="7776839" cy="365125"/>
           </a:xfrm>
           <a:prstGeom prst="rect">
             <a:avLst/>
@@ -2965,7 +1990,7 @@
             </a:lvl1pPr>
           </a:lstStyle>
           <a:p>
-            <a:endParaRPr lang="en-US"/>
+            <a:endParaRPr lang="en-US" dirty="0"/>
           </a:p>
         </p:txBody>
       </p:sp>
@@ -2987,8 +2012,8 @@
         </p:nvSpPr>
         <p:spPr>
           <a:xfrm>
-            <a:off x="8610600" y="6356350"/>
-            <a:ext cx="2743200" cy="365125"/>
+            <a:off x="11310151" y="6356350"/>
+            <a:ext cx="722049" cy="365125"/>
           </a:xfrm>
           <a:prstGeom prst="rect">
             <a:avLst/>
@@ -3027,19 +2052,13 @@
   <p:sldLayoutIdLst>
     <p:sldLayoutId id="2147483649" r:id="rId1"/>
     <p:sldLayoutId id="2147483650" r:id="rId2"/>
-    <p:sldLayoutId id="2147483651" r:id="rId3"/>
-    <p:sldLayoutId id="2147483652" r:id="rId4"/>
-    <p:sldLayoutId id="2147483653" r:id="rId5"/>
-    <p:sldLayoutId id="2147483654" r:id="rId6"/>
-    <p:sldLayoutId id="2147483655" r:id="rId7"/>
-    <p:sldLayoutId id="2147483656" r:id="rId8"/>
-    <p:sldLayoutId id="2147483657" r:id="rId9"/>
-    <p:sldLayoutId id="2147483658" r:id="rId10"/>
-    <p:sldLayoutId id="2147483659" r:id="rId11"/>
+    <p:sldLayoutId id="2147483652" r:id="rId3"/>
+    <p:sldLayoutId id="2147483654" r:id="rId4"/>
+    <p:sldLayoutId id="2147483655" r:id="rId5"/>
   </p:sldLayoutIdLst>
   <p:txStyles>
     <p:titleStyle>
-      <a:lvl1pPr algn="l" defTabSz="914400" rtl="0" eaLnBrk="1" latinLnBrk="0" hangingPunct="1">
+      <a:lvl1pPr algn="ctr" defTabSz="914400" rtl="0" eaLnBrk="1" latinLnBrk="0" hangingPunct="1">
         <a:lnSpc>
           <a:spcPct val="90000"/>
         </a:lnSpc>
@@ -3317,10 +2336,2345 @@
       </a:lvl9pPr>
     </p:otherStyle>
   </p:txStyles>
+  <p:extLst>
+    <p:ext uri="{27BBF7A9-308A-43DC-89C8-2F10F3537804}">
+      <p15:sldGuideLst xmlns:p15="http://schemas.microsoft.com/office/powerpoint/2012/main">
+        <p15:guide id="1" orient="horz" pos="2160" userDrawn="1">
+          <p15:clr>
+            <a:srgbClr val="F26B43"/>
+          </p15:clr>
+        </p15:guide>
+        <p15:guide id="2" pos="3840" userDrawn="1">
+          <p15:clr>
+            <a:srgbClr val="F26B43"/>
+          </p15:clr>
+        </p15:guide>
+      </p15:sldGuideLst>
+    </p:ext>
+  </p:extLst>
 </p:sldMaster>
 </file>
 
 <file path=ppt/slides/slide1.xml><?xml version="1.0" encoding="utf-8"?>
+<p:sld xmlns:a="http://schemas.openxmlformats.org/drawingml/2006/main" xmlns:r="http://schemas.openxmlformats.org/officeDocument/2006/relationships" xmlns:p="http://schemas.openxmlformats.org/presentationml/2006/main">
+  <p:cSld>
+    <p:spTree>
+      <p:nvGrpSpPr>
+        <p:cNvPr id="1" name=""/>
+        <p:cNvGrpSpPr/>
+        <p:nvPr/>
+      </p:nvGrpSpPr>
+      <p:grpSpPr>
+        <a:xfrm>
+          <a:off x="0" y="0"/>
+          <a:ext cx="0" cy="0"/>
+          <a:chOff x="0" y="0"/>
+          <a:chExt cx="0" cy="0"/>
+        </a:xfrm>
+      </p:grpSpPr>
+      <p:sp>
+        <p:nvSpPr>
+          <p:cNvPr id="2" name="Title 1">
+            <a:extLst>
+              <a:ext uri="{FF2B5EF4-FFF2-40B4-BE49-F238E27FC236}">
+                <a16:creationId xmlns:a16="http://schemas.microsoft.com/office/drawing/2014/main" id="{4C5106B2-A94C-4D50-7E53-F8ED2DCB5037}"/>
+              </a:ext>
+            </a:extLst>
+          </p:cNvPr>
+          <p:cNvSpPr>
+            <a:spLocks noGrp="1"/>
+          </p:cNvSpPr>
+          <p:nvPr>
+            <p:ph type="title"/>
+          </p:nvPr>
+        </p:nvSpPr>
+        <p:spPr/>
+        <p:txBody>
+          <a:bodyPr>
+            <a:normAutofit fontScale="90000"/>
+          </a:bodyPr>
+          <a:lstStyle/>
+          <a:p>
+            <a:r>
+              <a:rPr lang="en-US" dirty="0"/>
+              <a:t>Dialog Tree Class Diagram</a:t>
+            </a:r>
+          </a:p>
+        </p:txBody>
+      </p:sp>
+      <p:sp>
+        <p:nvSpPr>
+          <p:cNvPr id="7" name="Rectangle 6">
+            <a:extLst>
+              <a:ext uri="{FF2B5EF4-FFF2-40B4-BE49-F238E27FC236}">
+                <a16:creationId xmlns:a16="http://schemas.microsoft.com/office/drawing/2014/main" id="{FE193329-4E32-49A3-1241-B63B5CD1AD7C}"/>
+              </a:ext>
+            </a:extLst>
+          </p:cNvPr>
+          <p:cNvSpPr/>
+          <p:nvPr/>
+        </p:nvSpPr>
+        <p:spPr>
+          <a:xfrm>
+            <a:off x="4827141" y="928313"/>
+            <a:ext cx="2537717" cy="783404"/>
+          </a:xfrm>
+          <a:prstGeom prst="rect">
+            <a:avLst/>
+          </a:prstGeom>
+        </p:spPr>
+        <p:style>
+          <a:lnRef idx="2">
+            <a:schemeClr val="accent1">
+              <a:shade val="15000"/>
+            </a:schemeClr>
+          </a:lnRef>
+          <a:fillRef idx="1">
+            <a:schemeClr val="accent1"/>
+          </a:fillRef>
+          <a:effectRef idx="0">
+            <a:schemeClr val="accent1"/>
+          </a:effectRef>
+          <a:fontRef idx="minor">
+            <a:schemeClr val="lt1"/>
+          </a:fontRef>
+        </p:style>
+        <p:txBody>
+          <a:bodyPr rtlCol="0" anchor="ctr"/>
+          <a:lstStyle/>
+          <a:p>
+            <a:pPr algn="ctr"/>
+            <a:r>
+              <a:rPr lang="en-US" dirty="0" err="1"/>
+              <a:t>DialogTree</a:t>
+            </a:r>
+            <a:endParaRPr lang="en-US" dirty="0"/>
+          </a:p>
+        </p:txBody>
+      </p:sp>
+      <p:pic>
+        <p:nvPicPr>
+          <p:cNvPr id="4" name="Graphic 3" descr="Tree With Roots with solid fill">
+            <a:extLst>
+              <a:ext uri="{FF2B5EF4-FFF2-40B4-BE49-F238E27FC236}">
+                <a16:creationId xmlns:a16="http://schemas.microsoft.com/office/drawing/2014/main" id="{0166B64B-135E-F760-307A-395276F28196}"/>
+              </a:ext>
+            </a:extLst>
+          </p:cNvPr>
+          <p:cNvPicPr>
+            <a:picLocks noChangeAspect="1"/>
+          </p:cNvPicPr>
+          <p:nvPr/>
+        </p:nvPicPr>
+        <p:blipFill>
+          <a:blip r:embed="rId2">
+            <a:extLst>
+              <a:ext uri="{96DAC541-7B7A-43D3-8B79-37D633B846F1}">
+                <asvg:svgBlip xmlns:asvg="http://schemas.microsoft.com/office/drawing/2016/SVG/main" r:embed="rId3"/>
+              </a:ext>
+            </a:extLst>
+          </a:blip>
+          <a:stretch>
+            <a:fillRect/>
+          </a:stretch>
+        </p:blipFill>
+        <p:spPr>
+          <a:xfrm>
+            <a:off x="6691044" y="1002587"/>
+            <a:ext cx="597613" cy="597613"/>
+          </a:xfrm>
+          <a:prstGeom prst="rect">
+            <a:avLst/>
+          </a:prstGeom>
+        </p:spPr>
+      </p:pic>
+      <p:grpSp>
+        <p:nvGrpSpPr>
+          <p:cNvPr id="23" name="Group 22">
+            <a:extLst>
+              <a:ext uri="{FF2B5EF4-FFF2-40B4-BE49-F238E27FC236}">
+                <a16:creationId xmlns:a16="http://schemas.microsoft.com/office/drawing/2014/main" id="{1B321CC0-FEC5-6B14-A7C1-C836847ED41D}"/>
+              </a:ext>
+            </a:extLst>
+          </p:cNvPr>
+          <p:cNvGrpSpPr/>
+          <p:nvPr/>
+        </p:nvGrpSpPr>
+        <p:grpSpPr>
+          <a:xfrm>
+            <a:off x="4827141" y="3037298"/>
+            <a:ext cx="2537717" cy="783404"/>
+            <a:chOff x="4827141" y="3037298"/>
+            <a:chExt cx="2537717" cy="783404"/>
+          </a:xfrm>
+        </p:grpSpPr>
+        <p:sp>
+          <p:nvSpPr>
+            <p:cNvPr id="11" name="Rectangle 10">
+              <a:extLst>
+                <a:ext uri="{FF2B5EF4-FFF2-40B4-BE49-F238E27FC236}">
+                  <a16:creationId xmlns:a16="http://schemas.microsoft.com/office/drawing/2014/main" id="{66F5ACF3-412C-546F-E3D1-B2460E412BE0}"/>
+                </a:ext>
+              </a:extLst>
+            </p:cNvPr>
+            <p:cNvSpPr/>
+            <p:nvPr/>
+          </p:nvSpPr>
+          <p:spPr>
+            <a:xfrm>
+              <a:off x="4827141" y="3037298"/>
+              <a:ext cx="2537717" cy="783404"/>
+            </a:xfrm>
+            <a:prstGeom prst="rect">
+              <a:avLst/>
+            </a:prstGeom>
+          </p:spPr>
+          <p:style>
+            <a:lnRef idx="2">
+              <a:schemeClr val="accent1">
+                <a:shade val="15000"/>
+              </a:schemeClr>
+            </a:lnRef>
+            <a:fillRef idx="1">
+              <a:schemeClr val="accent1"/>
+            </a:fillRef>
+            <a:effectRef idx="0">
+              <a:schemeClr val="accent1"/>
+            </a:effectRef>
+            <a:fontRef idx="minor">
+              <a:schemeClr val="lt1"/>
+            </a:fontRef>
+          </p:style>
+          <p:txBody>
+            <a:bodyPr rtlCol="0" anchor="ctr"/>
+            <a:lstStyle/>
+            <a:p>
+              <a:pPr algn="ctr"/>
+              <a:r>
+                <a:rPr lang="en-US" dirty="0" err="1"/>
+                <a:t>DialogNode</a:t>
+              </a:r>
+              <a:endParaRPr lang="en-US" dirty="0"/>
+            </a:p>
+          </p:txBody>
+        </p:sp>
+        <p:pic>
+          <p:nvPicPr>
+            <p:cNvPr id="10" name="Graphic 9" descr="Leaf with solid fill">
+              <a:extLst>
+                <a:ext uri="{FF2B5EF4-FFF2-40B4-BE49-F238E27FC236}">
+                  <a16:creationId xmlns:a16="http://schemas.microsoft.com/office/drawing/2014/main" id="{14A93AAB-F640-5306-28B9-BAC6CE6C5BAA}"/>
+                </a:ext>
+              </a:extLst>
+            </p:cNvPr>
+            <p:cNvPicPr>
+              <a:picLocks noChangeAspect="1"/>
+            </p:cNvPicPr>
+            <p:nvPr/>
+          </p:nvPicPr>
+          <p:blipFill>
+            <a:blip r:embed="rId4">
+              <a:extLst>
+                <a:ext uri="{96DAC541-7B7A-43D3-8B79-37D633B846F1}">
+                  <asvg:svgBlip xmlns:asvg="http://schemas.microsoft.com/office/drawing/2016/SVG/main" r:embed="rId5"/>
+                </a:ext>
+              </a:extLst>
+            </a:blip>
+            <a:stretch>
+              <a:fillRect/>
+            </a:stretch>
+          </p:blipFill>
+          <p:spPr>
+            <a:xfrm>
+              <a:off x="6694297" y="3131820"/>
+              <a:ext cx="594360" cy="594360"/>
+            </a:xfrm>
+            <a:prstGeom prst="rect">
+              <a:avLst/>
+            </a:prstGeom>
+          </p:spPr>
+        </p:pic>
+      </p:grpSp>
+      <p:sp>
+        <p:nvSpPr>
+          <p:cNvPr id="12" name="TextBox 11">
+            <a:extLst>
+              <a:ext uri="{FF2B5EF4-FFF2-40B4-BE49-F238E27FC236}">
+                <a16:creationId xmlns:a16="http://schemas.microsoft.com/office/drawing/2014/main" id="{FC1C2B6E-EDC3-F9F0-2243-0AFF452EF10B}"/>
+              </a:ext>
+            </a:extLst>
+          </p:cNvPr>
+          <p:cNvSpPr txBox="1"/>
+          <p:nvPr/>
+        </p:nvSpPr>
+        <p:spPr>
+          <a:xfrm>
+            <a:off x="6368255" y="1808252"/>
+            <a:ext cx="5669866" cy="584775"/>
+          </a:xfrm>
+          <a:prstGeom prst="rect">
+            <a:avLst/>
+          </a:prstGeom>
+          <a:noFill/>
+        </p:spPr>
+        <p:txBody>
+          <a:bodyPr wrap="square" rtlCol="0">
+            <a:spAutoFit/>
+          </a:bodyPr>
+          <a:lstStyle/>
+          <a:p>
+            <a:r>
+              <a:rPr lang="en-US" sz="1600" dirty="0"/>
+              <a:t>Props: Name, </a:t>
+            </a:r>
+          </a:p>
+          <a:p>
+            <a:r>
+              <a:rPr lang="en-US" sz="1600" dirty="0"/>
+              <a:t>Methods: Node Creation Methods, integration with Unity Editor</a:t>
+            </a:r>
+          </a:p>
+        </p:txBody>
+      </p:sp>
+      <p:sp>
+        <p:nvSpPr>
+          <p:cNvPr id="14" name="Rectangle 13">
+            <a:extLst>
+              <a:ext uri="{FF2B5EF4-FFF2-40B4-BE49-F238E27FC236}">
+                <a16:creationId xmlns:a16="http://schemas.microsoft.com/office/drawing/2014/main" id="{208C3F12-86B4-CC81-28DF-292104D6747C}"/>
+              </a:ext>
+            </a:extLst>
+          </p:cNvPr>
+          <p:cNvSpPr/>
+          <p:nvPr/>
+        </p:nvSpPr>
+        <p:spPr>
+          <a:xfrm>
+            <a:off x="7364858" y="5146283"/>
+            <a:ext cx="2537717" cy="783404"/>
+          </a:xfrm>
+          <a:prstGeom prst="rect">
+            <a:avLst/>
+          </a:prstGeom>
+        </p:spPr>
+        <p:style>
+          <a:lnRef idx="2">
+            <a:schemeClr val="accent1">
+              <a:shade val="15000"/>
+            </a:schemeClr>
+          </a:lnRef>
+          <a:fillRef idx="1">
+            <a:schemeClr val="accent1"/>
+          </a:fillRef>
+          <a:effectRef idx="0">
+            <a:schemeClr val="accent1"/>
+          </a:effectRef>
+          <a:fontRef idx="minor">
+            <a:schemeClr val="lt1"/>
+          </a:fontRef>
+        </p:style>
+        <p:txBody>
+          <a:bodyPr rtlCol="0" anchor="ctr"/>
+          <a:lstStyle/>
+          <a:p>
+            <a:pPr algn="ctr"/>
+            <a:r>
+              <a:rPr lang="en-US" dirty="0" err="1"/>
+              <a:t>DialogEvents</a:t>
+            </a:r>
+            <a:endParaRPr lang="en-US" dirty="0"/>
+          </a:p>
+        </p:txBody>
+      </p:sp>
+      <p:grpSp>
+        <p:nvGrpSpPr>
+          <p:cNvPr id="15" name="Group 14">
+            <a:extLst>
+              <a:ext uri="{FF2B5EF4-FFF2-40B4-BE49-F238E27FC236}">
+                <a16:creationId xmlns:a16="http://schemas.microsoft.com/office/drawing/2014/main" id="{64C8769F-8EB2-FFF5-F1C5-5441D537AA21}"/>
+              </a:ext>
+            </a:extLst>
+          </p:cNvPr>
+          <p:cNvGrpSpPr/>
+          <p:nvPr/>
+        </p:nvGrpSpPr>
+        <p:grpSpPr>
+          <a:xfrm>
+            <a:off x="641590" y="837772"/>
+            <a:ext cx="2537717" cy="1747890"/>
+            <a:chOff x="8811453" y="309510"/>
+            <a:chExt cx="2537717" cy="1747890"/>
+          </a:xfrm>
+        </p:grpSpPr>
+        <p:pic>
+          <p:nvPicPr>
+            <p:cNvPr id="16" name="Graphic 15" descr="Open folder with solid fill">
+              <a:extLst>
+                <a:ext uri="{FF2B5EF4-FFF2-40B4-BE49-F238E27FC236}">
+                  <a16:creationId xmlns:a16="http://schemas.microsoft.com/office/drawing/2014/main" id="{0EA942B1-8810-383B-88D7-4BA017D0169B}"/>
+                </a:ext>
+              </a:extLst>
+            </p:cNvPr>
+            <p:cNvPicPr>
+              <a:picLocks noChangeAspect="1"/>
+            </p:cNvPicPr>
+            <p:nvPr/>
+          </p:nvPicPr>
+          <p:blipFill>
+            <a:blip r:embed="rId6">
+              <a:extLst>
+                <a:ext uri="{96DAC541-7B7A-43D3-8B79-37D633B846F1}">
+                  <asvg:svgBlip xmlns:asvg="http://schemas.microsoft.com/office/drawing/2016/SVG/main" r:embed="rId7"/>
+                </a:ext>
+              </a:extLst>
+            </a:blip>
+            <a:stretch>
+              <a:fillRect/>
+            </a:stretch>
+          </p:blipFill>
+          <p:spPr>
+            <a:xfrm>
+              <a:off x="9623112" y="1143000"/>
+              <a:ext cx="914400" cy="914400"/>
+            </a:xfrm>
+            <a:prstGeom prst="rect">
+              <a:avLst/>
+            </a:prstGeom>
+          </p:spPr>
+        </p:pic>
+        <p:sp>
+          <p:nvSpPr>
+            <p:cNvPr id="17" name="Rectangle 16">
+              <a:extLst>
+                <a:ext uri="{FF2B5EF4-FFF2-40B4-BE49-F238E27FC236}">
+                  <a16:creationId xmlns:a16="http://schemas.microsoft.com/office/drawing/2014/main" id="{739DB669-2B25-89F0-D808-2E3EA8C0D48B}"/>
+                </a:ext>
+              </a:extLst>
+            </p:cNvPr>
+            <p:cNvSpPr/>
+            <p:nvPr/>
+          </p:nvSpPr>
+          <p:spPr>
+            <a:xfrm>
+              <a:off x="8811453" y="309510"/>
+              <a:ext cx="2537717" cy="783404"/>
+            </a:xfrm>
+            <a:prstGeom prst="rect">
+              <a:avLst/>
+            </a:prstGeom>
+          </p:spPr>
+          <p:style>
+            <a:lnRef idx="2">
+              <a:schemeClr val="accent1">
+                <a:shade val="15000"/>
+              </a:schemeClr>
+            </a:lnRef>
+            <a:fillRef idx="1">
+              <a:schemeClr val="accent1"/>
+            </a:fillRef>
+            <a:effectRef idx="0">
+              <a:schemeClr val="accent1"/>
+            </a:effectRef>
+            <a:fontRef idx="minor">
+              <a:schemeClr val="lt1"/>
+            </a:fontRef>
+          </p:style>
+          <p:txBody>
+            <a:bodyPr rtlCol="0" anchor="ctr"/>
+            <a:lstStyle/>
+            <a:p>
+              <a:pPr algn="ctr"/>
+              <a:r>
+                <a:rPr lang="en-US" dirty="0"/>
+                <a:t>NPC Content</a:t>
+              </a:r>
+            </a:p>
+          </p:txBody>
+        </p:sp>
+      </p:grpSp>
+      <p:sp>
+        <p:nvSpPr>
+          <p:cNvPr id="18" name="Arrow: Right 17">
+            <a:extLst>
+              <a:ext uri="{FF2B5EF4-FFF2-40B4-BE49-F238E27FC236}">
+                <a16:creationId xmlns:a16="http://schemas.microsoft.com/office/drawing/2014/main" id="{7BCEF424-7CF9-5B32-B3FE-22D3CA94226F}"/>
+              </a:ext>
+            </a:extLst>
+          </p:cNvPr>
+          <p:cNvSpPr/>
+          <p:nvPr/>
+        </p:nvSpPr>
+        <p:spPr>
+          <a:xfrm rot="18508659">
+            <a:off x="3715491" y="4143929"/>
+            <a:ext cx="1343891" cy="544512"/>
+          </a:xfrm>
+          <a:prstGeom prst="rightArrow">
+            <a:avLst/>
+          </a:prstGeom>
+        </p:spPr>
+        <p:style>
+          <a:lnRef idx="2">
+            <a:schemeClr val="accent1">
+              <a:shade val="15000"/>
+            </a:schemeClr>
+          </a:lnRef>
+          <a:fillRef idx="1">
+            <a:schemeClr val="accent1"/>
+          </a:fillRef>
+          <a:effectRef idx="0">
+            <a:schemeClr val="accent1"/>
+          </a:effectRef>
+          <a:fontRef idx="minor">
+            <a:schemeClr val="lt1"/>
+          </a:fontRef>
+        </p:style>
+        <p:txBody>
+          <a:bodyPr rtlCol="0" anchor="ctr"/>
+          <a:lstStyle/>
+          <a:p>
+            <a:pPr algn="ctr"/>
+            <a:endParaRPr lang="en-US"/>
+          </a:p>
+        </p:txBody>
+      </p:sp>
+      <p:sp>
+        <p:nvSpPr>
+          <p:cNvPr id="19" name="Arrow: Right 18">
+            <a:extLst>
+              <a:ext uri="{FF2B5EF4-FFF2-40B4-BE49-F238E27FC236}">
+                <a16:creationId xmlns:a16="http://schemas.microsoft.com/office/drawing/2014/main" id="{D8111E95-5911-532A-0D35-9F0DD83CCB31}"/>
+              </a:ext>
+            </a:extLst>
+          </p:cNvPr>
+          <p:cNvSpPr/>
+          <p:nvPr/>
+        </p:nvSpPr>
+        <p:spPr>
+          <a:xfrm rot="13846779">
+            <a:off x="7252507" y="4170291"/>
+            <a:ext cx="1343891" cy="544512"/>
+          </a:xfrm>
+          <a:prstGeom prst="rightArrow">
+            <a:avLst/>
+          </a:prstGeom>
+        </p:spPr>
+        <p:style>
+          <a:lnRef idx="2">
+            <a:schemeClr val="accent1">
+              <a:shade val="15000"/>
+            </a:schemeClr>
+          </a:lnRef>
+          <a:fillRef idx="1">
+            <a:schemeClr val="accent1"/>
+          </a:fillRef>
+          <a:effectRef idx="0">
+            <a:schemeClr val="accent1"/>
+          </a:effectRef>
+          <a:fontRef idx="minor">
+            <a:schemeClr val="lt1"/>
+          </a:fontRef>
+        </p:style>
+        <p:txBody>
+          <a:bodyPr rtlCol="0" anchor="ctr"/>
+          <a:lstStyle/>
+          <a:p>
+            <a:pPr algn="ctr"/>
+            <a:endParaRPr lang="en-US"/>
+          </a:p>
+        </p:txBody>
+      </p:sp>
+      <p:sp>
+        <p:nvSpPr>
+          <p:cNvPr id="20" name="Arrow: Right 19">
+            <a:extLst>
+              <a:ext uri="{FF2B5EF4-FFF2-40B4-BE49-F238E27FC236}">
+                <a16:creationId xmlns:a16="http://schemas.microsoft.com/office/drawing/2014/main" id="{DA9F6908-021E-04A7-FF66-295D57B5CD94}"/>
+              </a:ext>
+            </a:extLst>
+          </p:cNvPr>
+          <p:cNvSpPr/>
+          <p:nvPr/>
+        </p:nvSpPr>
+        <p:spPr>
+          <a:xfrm rot="16200000">
+            <a:off x="5611090" y="2081766"/>
+            <a:ext cx="969818" cy="544512"/>
+          </a:xfrm>
+          <a:prstGeom prst="rightArrow">
+            <a:avLst/>
+          </a:prstGeom>
+        </p:spPr>
+        <p:style>
+          <a:lnRef idx="2">
+            <a:schemeClr val="accent1">
+              <a:shade val="15000"/>
+            </a:schemeClr>
+          </a:lnRef>
+          <a:fillRef idx="1">
+            <a:schemeClr val="accent1"/>
+          </a:fillRef>
+          <a:effectRef idx="0">
+            <a:schemeClr val="accent1"/>
+          </a:effectRef>
+          <a:fontRef idx="minor">
+            <a:schemeClr val="lt1"/>
+          </a:fontRef>
+        </p:style>
+        <p:txBody>
+          <a:bodyPr rtlCol="0" anchor="ctr"/>
+          <a:lstStyle/>
+          <a:p>
+            <a:pPr algn="ctr"/>
+            <a:endParaRPr lang="en-US"/>
+          </a:p>
+        </p:txBody>
+      </p:sp>
+      <p:grpSp>
+        <p:nvGrpSpPr>
+          <p:cNvPr id="24" name="Group 23">
+            <a:extLst>
+              <a:ext uri="{FF2B5EF4-FFF2-40B4-BE49-F238E27FC236}">
+                <a16:creationId xmlns:a16="http://schemas.microsoft.com/office/drawing/2014/main" id="{48FB74E9-FC86-4AAD-C6FB-B3AB72F87B3E}"/>
+              </a:ext>
+            </a:extLst>
+          </p:cNvPr>
+          <p:cNvGrpSpPr/>
+          <p:nvPr/>
+        </p:nvGrpSpPr>
+        <p:grpSpPr>
+          <a:xfrm>
+            <a:off x="2700485" y="4747238"/>
+            <a:ext cx="1371600" cy="1471118"/>
+            <a:chOff x="2700485" y="4747238"/>
+            <a:chExt cx="1371600" cy="1471118"/>
+          </a:xfrm>
+        </p:grpSpPr>
+        <p:sp>
+          <p:nvSpPr>
+            <p:cNvPr id="13" name="Diamond 12">
+              <a:extLst>
+                <a:ext uri="{FF2B5EF4-FFF2-40B4-BE49-F238E27FC236}">
+                  <a16:creationId xmlns:a16="http://schemas.microsoft.com/office/drawing/2014/main" id="{76AEFC3E-CCF9-FB4B-6735-F8DC653FC12C}"/>
+                </a:ext>
+              </a:extLst>
+            </p:cNvPr>
+            <p:cNvSpPr/>
+            <p:nvPr/>
+          </p:nvSpPr>
+          <p:spPr>
+            <a:xfrm>
+              <a:off x="2700485" y="4846756"/>
+              <a:ext cx="1371600" cy="1371600"/>
+            </a:xfrm>
+            <a:prstGeom prst="diamond">
+              <a:avLst/>
+            </a:prstGeom>
+          </p:spPr>
+          <p:style>
+            <a:lnRef idx="2">
+              <a:schemeClr val="accent1">
+                <a:shade val="15000"/>
+              </a:schemeClr>
+            </a:lnRef>
+            <a:fillRef idx="1">
+              <a:schemeClr val="accent1"/>
+            </a:fillRef>
+            <a:effectRef idx="0">
+              <a:schemeClr val="accent1"/>
+            </a:effectRef>
+            <a:fontRef idx="minor">
+              <a:schemeClr val="lt1"/>
+            </a:fontRef>
+          </p:style>
+          <p:txBody>
+            <a:bodyPr lIns="0" tIns="0" rIns="0" bIns="0" rtlCol="0" anchor="ctr"/>
+            <a:lstStyle/>
+            <a:p>
+              <a:pPr algn="ctr"/>
+              <a:r>
+                <a:rPr lang="en-US" sz="1400" dirty="0"/>
+                <a:t>Dialog</a:t>
+              </a:r>
+            </a:p>
+            <a:p>
+              <a:pPr algn="ctr"/>
+              <a:r>
+                <a:rPr lang="en-US" sz="1400" dirty="0"/>
+                <a:t>Choices</a:t>
+              </a:r>
+            </a:p>
+          </p:txBody>
+        </p:sp>
+        <p:pic>
+          <p:nvPicPr>
+            <p:cNvPr id="22" name="Graphic 21" descr="Decision chart with solid fill">
+              <a:extLst>
+                <a:ext uri="{FF2B5EF4-FFF2-40B4-BE49-F238E27FC236}">
+                  <a16:creationId xmlns:a16="http://schemas.microsoft.com/office/drawing/2014/main" id="{CA1A9B8C-F5AD-A921-0A9D-C5B6C45F929F}"/>
+                </a:ext>
+              </a:extLst>
+            </p:cNvPr>
+            <p:cNvPicPr>
+              <a:picLocks noChangeAspect="1"/>
+            </p:cNvPicPr>
+            <p:nvPr/>
+          </p:nvPicPr>
+          <p:blipFill>
+            <a:blip r:embed="rId8">
+              <a:extLst>
+                <a:ext uri="{96DAC541-7B7A-43D3-8B79-37D633B846F1}">
+                  <asvg:svgBlip xmlns:asvg="http://schemas.microsoft.com/office/drawing/2016/SVG/main" r:embed="rId9"/>
+                </a:ext>
+              </a:extLst>
+            </a:blip>
+            <a:stretch>
+              <a:fillRect/>
+            </a:stretch>
+          </p:blipFill>
+          <p:spPr>
+            <a:xfrm>
+              <a:off x="3089105" y="4747238"/>
+              <a:ext cx="594360" cy="594360"/>
+            </a:xfrm>
+            <a:prstGeom prst="rect">
+              <a:avLst/>
+            </a:prstGeom>
+          </p:spPr>
+        </p:pic>
+      </p:grpSp>
+      <p:sp>
+        <p:nvSpPr>
+          <p:cNvPr id="3" name="TextBox 2">
+            <a:extLst>
+              <a:ext uri="{FF2B5EF4-FFF2-40B4-BE49-F238E27FC236}">
+                <a16:creationId xmlns:a16="http://schemas.microsoft.com/office/drawing/2014/main" id="{2334D44B-EE4B-70E4-F11A-C797960BEE02}"/>
+              </a:ext>
+            </a:extLst>
+          </p:cNvPr>
+          <p:cNvSpPr txBox="1"/>
+          <p:nvPr/>
+        </p:nvSpPr>
+        <p:spPr>
+          <a:xfrm>
+            <a:off x="0" y="5272633"/>
+            <a:ext cx="2733348" cy="584775"/>
+          </a:xfrm>
+          <a:prstGeom prst="rect">
+            <a:avLst/>
+          </a:prstGeom>
+          <a:noFill/>
+        </p:spPr>
+        <p:txBody>
+          <a:bodyPr wrap="square" rtlCol="0">
+            <a:spAutoFit/>
+          </a:bodyPr>
+          <a:lstStyle/>
+          <a:p>
+            <a:r>
+              <a:rPr lang="en-US" sz="1600" dirty="0"/>
+              <a:t>Props: Conditions (for allowing choice), </a:t>
+            </a:r>
+            <a:r>
+              <a:rPr lang="en-US" sz="1600"/>
+              <a:t>List Events</a:t>
+            </a:r>
+            <a:endParaRPr lang="en-US" sz="1600" dirty="0"/>
+          </a:p>
+        </p:txBody>
+      </p:sp>
+    </p:spTree>
+    <p:extLst>
+      <p:ext uri="{BB962C8B-B14F-4D97-AF65-F5344CB8AC3E}">
+        <p14:creationId xmlns:p14="http://schemas.microsoft.com/office/powerpoint/2010/main" val="2091717394"/>
+      </p:ext>
+    </p:extLst>
+  </p:cSld>
+  <p:clrMapOvr>
+    <a:masterClrMapping/>
+  </p:clrMapOvr>
+</p:sld>
+</file>
+
+<file path=ppt/slides/slide2.xml><?xml version="1.0" encoding="utf-8"?>
+<p:sld xmlns:a="http://schemas.openxmlformats.org/drawingml/2006/main" xmlns:r="http://schemas.openxmlformats.org/officeDocument/2006/relationships" xmlns:p="http://schemas.openxmlformats.org/presentationml/2006/main">
+  <p:cSld>
+    <p:spTree>
+      <p:nvGrpSpPr>
+        <p:cNvPr id="1" name=""/>
+        <p:cNvGrpSpPr/>
+        <p:nvPr/>
+      </p:nvGrpSpPr>
+      <p:grpSpPr>
+        <a:xfrm>
+          <a:off x="0" y="0"/>
+          <a:ext cx="0" cy="0"/>
+          <a:chOff x="0" y="0"/>
+          <a:chExt cx="0" cy="0"/>
+        </a:xfrm>
+      </p:grpSpPr>
+      <p:sp>
+        <p:nvSpPr>
+          <p:cNvPr id="2" name="Title 1">
+            <a:extLst>
+              <a:ext uri="{FF2B5EF4-FFF2-40B4-BE49-F238E27FC236}">
+                <a16:creationId xmlns:a16="http://schemas.microsoft.com/office/drawing/2014/main" id="{127D6C53-1B0C-AFFC-A1D5-0275FD2F784D}"/>
+              </a:ext>
+            </a:extLst>
+          </p:cNvPr>
+          <p:cNvSpPr>
+            <a:spLocks noGrp="1"/>
+          </p:cNvSpPr>
+          <p:nvPr>
+            <p:ph type="title"/>
+          </p:nvPr>
+        </p:nvSpPr>
+        <p:spPr/>
+        <p:txBody>
+          <a:bodyPr>
+            <a:normAutofit fontScale="90000"/>
+          </a:bodyPr>
+          <a:lstStyle/>
+          <a:p>
+            <a:r>
+              <a:rPr lang="en-US" dirty="0"/>
+              <a:t>Dialog Tree Structure</a:t>
+            </a:r>
+          </a:p>
+        </p:txBody>
+      </p:sp>
+      <p:grpSp>
+        <p:nvGrpSpPr>
+          <p:cNvPr id="3" name="Group 2">
+            <a:extLst>
+              <a:ext uri="{FF2B5EF4-FFF2-40B4-BE49-F238E27FC236}">
+                <a16:creationId xmlns:a16="http://schemas.microsoft.com/office/drawing/2014/main" id="{984FD061-5337-D93B-A81B-B55249FF0850}"/>
+              </a:ext>
+            </a:extLst>
+          </p:cNvPr>
+          <p:cNvGrpSpPr/>
+          <p:nvPr/>
+        </p:nvGrpSpPr>
+        <p:grpSpPr>
+          <a:xfrm>
+            <a:off x="289518" y="3233149"/>
+            <a:ext cx="1478536" cy="986062"/>
+            <a:chOff x="4827142" y="3233149"/>
+            <a:chExt cx="1478536" cy="986062"/>
+          </a:xfrm>
+        </p:grpSpPr>
+        <p:sp>
+          <p:nvSpPr>
+            <p:cNvPr id="4" name="Rectangle 3">
+              <a:extLst>
+                <a:ext uri="{FF2B5EF4-FFF2-40B4-BE49-F238E27FC236}">
+                  <a16:creationId xmlns:a16="http://schemas.microsoft.com/office/drawing/2014/main" id="{F402E679-DD2F-1EAD-7F54-FBE996E8C4AF}"/>
+                </a:ext>
+              </a:extLst>
+            </p:cNvPr>
+            <p:cNvSpPr/>
+            <p:nvPr/>
+          </p:nvSpPr>
+          <p:spPr>
+            <a:xfrm>
+              <a:off x="4827142" y="3233149"/>
+              <a:ext cx="1478536" cy="391702"/>
+            </a:xfrm>
+            <a:prstGeom prst="rect">
+              <a:avLst/>
+            </a:prstGeom>
+          </p:spPr>
+          <p:style>
+            <a:lnRef idx="2">
+              <a:schemeClr val="accent1">
+                <a:shade val="15000"/>
+              </a:schemeClr>
+            </a:lnRef>
+            <a:fillRef idx="1">
+              <a:schemeClr val="accent1"/>
+            </a:fillRef>
+            <a:effectRef idx="0">
+              <a:schemeClr val="accent1"/>
+            </a:effectRef>
+            <a:fontRef idx="minor">
+              <a:schemeClr val="lt1"/>
+            </a:fontRef>
+          </p:style>
+          <p:txBody>
+            <a:bodyPr rtlCol="0" anchor="ctr"/>
+            <a:lstStyle/>
+            <a:p>
+              <a:pPr algn="ctr"/>
+              <a:r>
+                <a:rPr lang="en-US" dirty="0" err="1"/>
+                <a:t>DialogNode</a:t>
+              </a:r>
+              <a:endParaRPr lang="en-US" dirty="0"/>
+            </a:p>
+          </p:txBody>
+        </p:sp>
+        <p:pic>
+          <p:nvPicPr>
+            <p:cNvPr id="5" name="Graphic 4" descr="Leaf with solid fill">
+              <a:extLst>
+                <a:ext uri="{FF2B5EF4-FFF2-40B4-BE49-F238E27FC236}">
+                  <a16:creationId xmlns:a16="http://schemas.microsoft.com/office/drawing/2014/main" id="{431D7115-479F-2861-E8C6-86B515146605}"/>
+                </a:ext>
+              </a:extLst>
+            </p:cNvPr>
+            <p:cNvPicPr>
+              <a:picLocks noChangeAspect="1"/>
+            </p:cNvPicPr>
+            <p:nvPr/>
+          </p:nvPicPr>
+          <p:blipFill>
+            <a:blip r:embed="rId2">
+              <a:extLst>
+                <a:ext uri="{96DAC541-7B7A-43D3-8B79-37D633B846F1}">
+                  <asvg:svgBlip xmlns:asvg="http://schemas.microsoft.com/office/drawing/2016/SVG/main" r:embed="rId3"/>
+                </a:ext>
+              </a:extLst>
+            </a:blip>
+            <a:stretch>
+              <a:fillRect/>
+            </a:stretch>
+          </p:blipFill>
+          <p:spPr>
+            <a:xfrm>
+              <a:off x="5269230" y="3624851"/>
+              <a:ext cx="594360" cy="594360"/>
+            </a:xfrm>
+            <a:prstGeom prst="rect">
+              <a:avLst/>
+            </a:prstGeom>
+          </p:spPr>
+        </p:pic>
+      </p:grpSp>
+      <p:grpSp>
+        <p:nvGrpSpPr>
+          <p:cNvPr id="6" name="Group 5">
+            <a:extLst>
+              <a:ext uri="{FF2B5EF4-FFF2-40B4-BE49-F238E27FC236}">
+                <a16:creationId xmlns:a16="http://schemas.microsoft.com/office/drawing/2014/main" id="{E4C15F8F-CE24-06D2-F310-2D9F0DDC438B}"/>
+              </a:ext>
+            </a:extLst>
+          </p:cNvPr>
+          <p:cNvGrpSpPr/>
+          <p:nvPr/>
+        </p:nvGrpSpPr>
+        <p:grpSpPr>
+          <a:xfrm>
+            <a:off x="3143709" y="2638440"/>
+            <a:ext cx="1371600" cy="1471118"/>
+            <a:chOff x="2700485" y="4747238"/>
+            <a:chExt cx="1371600" cy="1471118"/>
+          </a:xfrm>
+        </p:grpSpPr>
+        <p:sp>
+          <p:nvSpPr>
+            <p:cNvPr id="7" name="Diamond 6">
+              <a:extLst>
+                <a:ext uri="{FF2B5EF4-FFF2-40B4-BE49-F238E27FC236}">
+                  <a16:creationId xmlns:a16="http://schemas.microsoft.com/office/drawing/2014/main" id="{12ADA28D-8CA7-8BD0-093F-078E3096FAE4}"/>
+                </a:ext>
+              </a:extLst>
+            </p:cNvPr>
+            <p:cNvSpPr/>
+            <p:nvPr/>
+          </p:nvSpPr>
+          <p:spPr>
+            <a:xfrm>
+              <a:off x="2700485" y="4846756"/>
+              <a:ext cx="1371600" cy="1371600"/>
+            </a:xfrm>
+            <a:prstGeom prst="diamond">
+              <a:avLst/>
+            </a:prstGeom>
+          </p:spPr>
+          <p:style>
+            <a:lnRef idx="1">
+              <a:schemeClr val="accent2"/>
+            </a:lnRef>
+            <a:fillRef idx="2">
+              <a:schemeClr val="accent2"/>
+            </a:fillRef>
+            <a:effectRef idx="1">
+              <a:schemeClr val="accent2"/>
+            </a:effectRef>
+            <a:fontRef idx="minor">
+              <a:schemeClr val="dk1"/>
+            </a:fontRef>
+          </p:style>
+          <p:txBody>
+            <a:bodyPr lIns="0" tIns="0" rIns="0" bIns="0" rtlCol="0" anchor="ctr"/>
+            <a:lstStyle/>
+            <a:p>
+              <a:pPr algn="ctr"/>
+              <a:r>
+                <a:rPr lang="en-US" sz="1400" dirty="0"/>
+                <a:t>Dialog</a:t>
+              </a:r>
+            </a:p>
+            <a:p>
+              <a:pPr algn="ctr"/>
+              <a:r>
+                <a:rPr lang="en-US" sz="1400" dirty="0"/>
+                <a:t>Choices</a:t>
+              </a:r>
+            </a:p>
+          </p:txBody>
+        </p:sp>
+        <p:pic>
+          <p:nvPicPr>
+            <p:cNvPr id="8" name="Graphic 7" descr="Decision chart with solid fill">
+              <a:extLst>
+                <a:ext uri="{FF2B5EF4-FFF2-40B4-BE49-F238E27FC236}">
+                  <a16:creationId xmlns:a16="http://schemas.microsoft.com/office/drawing/2014/main" id="{C745A45E-6736-30E9-B537-C177EB97D268}"/>
+                </a:ext>
+              </a:extLst>
+            </p:cNvPr>
+            <p:cNvPicPr>
+              <a:picLocks noChangeAspect="1"/>
+            </p:cNvPicPr>
+            <p:nvPr/>
+          </p:nvPicPr>
+          <p:blipFill>
+            <a:blip r:embed="rId4">
+              <a:extLst>
+                <a:ext uri="{96DAC541-7B7A-43D3-8B79-37D633B846F1}">
+                  <asvg:svgBlip xmlns:asvg="http://schemas.microsoft.com/office/drawing/2016/SVG/main" r:embed="rId5"/>
+                </a:ext>
+              </a:extLst>
+            </a:blip>
+            <a:stretch>
+              <a:fillRect/>
+            </a:stretch>
+          </p:blipFill>
+          <p:spPr>
+            <a:xfrm>
+              <a:off x="3089105" y="4747238"/>
+              <a:ext cx="594360" cy="594360"/>
+            </a:xfrm>
+            <a:prstGeom prst="rect">
+              <a:avLst/>
+            </a:prstGeom>
+          </p:spPr>
+        </p:pic>
+      </p:grpSp>
+      <p:cxnSp>
+        <p:nvCxnSpPr>
+          <p:cNvPr id="13" name="Straight Connector 12">
+            <a:extLst>
+              <a:ext uri="{FF2B5EF4-FFF2-40B4-BE49-F238E27FC236}">
+                <a16:creationId xmlns:a16="http://schemas.microsoft.com/office/drawing/2014/main" id="{89005B24-0EBD-9F89-F38A-7A1419DFB1F6}"/>
+              </a:ext>
+            </a:extLst>
+          </p:cNvPr>
+          <p:cNvCxnSpPr>
+            <a:stCxn id="4" idx="3"/>
+            <a:endCxn id="7" idx="1"/>
+          </p:cNvCxnSpPr>
+          <p:nvPr/>
+        </p:nvCxnSpPr>
+        <p:spPr>
+          <a:xfrm flipV="1">
+            <a:off x="1768054" y="3423758"/>
+            <a:ext cx="1375655" cy="5242"/>
+          </a:xfrm>
+          <a:prstGeom prst="line">
+            <a:avLst/>
+          </a:prstGeom>
+        </p:spPr>
+        <p:style>
+          <a:lnRef idx="2">
+            <a:schemeClr val="accent1"/>
+          </a:lnRef>
+          <a:fillRef idx="0">
+            <a:schemeClr val="accent1"/>
+          </a:fillRef>
+          <a:effectRef idx="1">
+            <a:schemeClr val="accent1"/>
+          </a:effectRef>
+          <a:fontRef idx="minor">
+            <a:schemeClr val="tx1"/>
+          </a:fontRef>
+        </p:style>
+      </p:cxnSp>
+      <p:grpSp>
+        <p:nvGrpSpPr>
+          <p:cNvPr id="9" name="Group 8">
+            <a:extLst>
+              <a:ext uri="{FF2B5EF4-FFF2-40B4-BE49-F238E27FC236}">
+                <a16:creationId xmlns:a16="http://schemas.microsoft.com/office/drawing/2014/main" id="{5E283C32-0BAD-A90D-17DB-2E0CF7579657}"/>
+              </a:ext>
+            </a:extLst>
+          </p:cNvPr>
+          <p:cNvGrpSpPr/>
+          <p:nvPr/>
+        </p:nvGrpSpPr>
+        <p:grpSpPr>
+          <a:xfrm>
+            <a:off x="3143709" y="4469817"/>
+            <a:ext cx="1371600" cy="1471118"/>
+            <a:chOff x="2700485" y="4747238"/>
+            <a:chExt cx="1371600" cy="1471118"/>
+          </a:xfrm>
+        </p:grpSpPr>
+        <p:sp>
+          <p:nvSpPr>
+            <p:cNvPr id="10" name="Diamond 9">
+              <a:extLst>
+                <a:ext uri="{FF2B5EF4-FFF2-40B4-BE49-F238E27FC236}">
+                  <a16:creationId xmlns:a16="http://schemas.microsoft.com/office/drawing/2014/main" id="{9AD65F5F-8B87-4816-F0B4-3A7B72578703}"/>
+                </a:ext>
+              </a:extLst>
+            </p:cNvPr>
+            <p:cNvSpPr/>
+            <p:nvPr/>
+          </p:nvSpPr>
+          <p:spPr>
+            <a:xfrm>
+              <a:off x="2700485" y="4846756"/>
+              <a:ext cx="1371600" cy="1371600"/>
+            </a:xfrm>
+            <a:prstGeom prst="diamond">
+              <a:avLst/>
+            </a:prstGeom>
+          </p:spPr>
+          <p:style>
+            <a:lnRef idx="1">
+              <a:schemeClr val="accent2"/>
+            </a:lnRef>
+            <a:fillRef idx="2">
+              <a:schemeClr val="accent2"/>
+            </a:fillRef>
+            <a:effectRef idx="1">
+              <a:schemeClr val="accent2"/>
+            </a:effectRef>
+            <a:fontRef idx="minor">
+              <a:schemeClr val="dk1"/>
+            </a:fontRef>
+          </p:style>
+          <p:txBody>
+            <a:bodyPr lIns="0" tIns="0" rIns="0" bIns="0" rtlCol="0" anchor="ctr"/>
+            <a:lstStyle/>
+            <a:p>
+              <a:pPr algn="ctr"/>
+              <a:r>
+                <a:rPr lang="en-US" sz="1400" dirty="0"/>
+                <a:t>Dialog</a:t>
+              </a:r>
+            </a:p>
+            <a:p>
+              <a:pPr algn="ctr"/>
+              <a:r>
+                <a:rPr lang="en-US" sz="1400" dirty="0"/>
+                <a:t>Choices</a:t>
+              </a:r>
+            </a:p>
+          </p:txBody>
+        </p:sp>
+        <p:pic>
+          <p:nvPicPr>
+            <p:cNvPr id="11" name="Graphic 10" descr="Decision chart with solid fill">
+              <a:extLst>
+                <a:ext uri="{FF2B5EF4-FFF2-40B4-BE49-F238E27FC236}">
+                  <a16:creationId xmlns:a16="http://schemas.microsoft.com/office/drawing/2014/main" id="{ECFEFE89-6682-4B5C-D7E7-22204C4F460B}"/>
+                </a:ext>
+              </a:extLst>
+            </p:cNvPr>
+            <p:cNvPicPr>
+              <a:picLocks noChangeAspect="1"/>
+            </p:cNvPicPr>
+            <p:nvPr/>
+          </p:nvPicPr>
+          <p:blipFill>
+            <a:blip r:embed="rId4">
+              <a:extLst>
+                <a:ext uri="{96DAC541-7B7A-43D3-8B79-37D633B846F1}">
+                  <asvg:svgBlip xmlns:asvg="http://schemas.microsoft.com/office/drawing/2016/SVG/main" r:embed="rId5"/>
+                </a:ext>
+              </a:extLst>
+            </a:blip>
+            <a:stretch>
+              <a:fillRect/>
+            </a:stretch>
+          </p:blipFill>
+          <p:spPr>
+            <a:xfrm>
+              <a:off x="3089105" y="4747238"/>
+              <a:ext cx="594360" cy="594360"/>
+            </a:xfrm>
+            <a:prstGeom prst="rect">
+              <a:avLst/>
+            </a:prstGeom>
+          </p:spPr>
+        </p:pic>
+      </p:grpSp>
+      <p:grpSp>
+        <p:nvGrpSpPr>
+          <p:cNvPr id="12" name="Group 11">
+            <a:extLst>
+              <a:ext uri="{FF2B5EF4-FFF2-40B4-BE49-F238E27FC236}">
+                <a16:creationId xmlns:a16="http://schemas.microsoft.com/office/drawing/2014/main" id="{90E70D8B-D9DC-0304-DD19-EDFD92F657BF}"/>
+              </a:ext>
+            </a:extLst>
+          </p:cNvPr>
+          <p:cNvGrpSpPr/>
+          <p:nvPr/>
+        </p:nvGrpSpPr>
+        <p:grpSpPr>
+          <a:xfrm>
+            <a:off x="3143709" y="803797"/>
+            <a:ext cx="1371600" cy="1471118"/>
+            <a:chOff x="2700485" y="4747238"/>
+            <a:chExt cx="1371600" cy="1471118"/>
+          </a:xfrm>
+        </p:grpSpPr>
+        <p:sp>
+          <p:nvSpPr>
+            <p:cNvPr id="14" name="Diamond 13">
+              <a:extLst>
+                <a:ext uri="{FF2B5EF4-FFF2-40B4-BE49-F238E27FC236}">
+                  <a16:creationId xmlns:a16="http://schemas.microsoft.com/office/drawing/2014/main" id="{8729ABDD-E70C-8585-5663-EE1F6DB2A0AD}"/>
+                </a:ext>
+              </a:extLst>
+            </p:cNvPr>
+            <p:cNvSpPr/>
+            <p:nvPr/>
+          </p:nvSpPr>
+          <p:spPr>
+            <a:xfrm>
+              <a:off x="2700485" y="4846756"/>
+              <a:ext cx="1371600" cy="1371600"/>
+            </a:xfrm>
+            <a:prstGeom prst="diamond">
+              <a:avLst/>
+            </a:prstGeom>
+          </p:spPr>
+          <p:style>
+            <a:lnRef idx="1">
+              <a:schemeClr val="accent2"/>
+            </a:lnRef>
+            <a:fillRef idx="2">
+              <a:schemeClr val="accent2"/>
+            </a:fillRef>
+            <a:effectRef idx="1">
+              <a:schemeClr val="accent2"/>
+            </a:effectRef>
+            <a:fontRef idx="minor">
+              <a:schemeClr val="dk1"/>
+            </a:fontRef>
+          </p:style>
+          <p:txBody>
+            <a:bodyPr lIns="0" tIns="0" rIns="0" bIns="0" rtlCol="0" anchor="ctr"/>
+            <a:lstStyle/>
+            <a:p>
+              <a:pPr algn="ctr"/>
+              <a:r>
+                <a:rPr lang="en-US" sz="1400" dirty="0"/>
+                <a:t>Dialog</a:t>
+              </a:r>
+            </a:p>
+            <a:p>
+              <a:pPr algn="ctr"/>
+              <a:r>
+                <a:rPr lang="en-US" sz="1400" dirty="0"/>
+                <a:t>Choices</a:t>
+              </a:r>
+            </a:p>
+          </p:txBody>
+        </p:sp>
+        <p:pic>
+          <p:nvPicPr>
+            <p:cNvPr id="15" name="Graphic 14" descr="Decision chart with solid fill">
+              <a:extLst>
+                <a:ext uri="{FF2B5EF4-FFF2-40B4-BE49-F238E27FC236}">
+                  <a16:creationId xmlns:a16="http://schemas.microsoft.com/office/drawing/2014/main" id="{AD289B3F-BD23-2C04-CD4F-1A057DD7AD69}"/>
+                </a:ext>
+              </a:extLst>
+            </p:cNvPr>
+            <p:cNvPicPr>
+              <a:picLocks noChangeAspect="1"/>
+            </p:cNvPicPr>
+            <p:nvPr/>
+          </p:nvPicPr>
+          <p:blipFill>
+            <a:blip r:embed="rId4">
+              <a:extLst>
+                <a:ext uri="{96DAC541-7B7A-43D3-8B79-37D633B846F1}">
+                  <asvg:svgBlip xmlns:asvg="http://schemas.microsoft.com/office/drawing/2016/SVG/main" r:embed="rId5"/>
+                </a:ext>
+              </a:extLst>
+            </a:blip>
+            <a:stretch>
+              <a:fillRect/>
+            </a:stretch>
+          </p:blipFill>
+          <p:spPr>
+            <a:xfrm>
+              <a:off x="3089105" y="4747238"/>
+              <a:ext cx="594360" cy="594360"/>
+            </a:xfrm>
+            <a:prstGeom prst="rect">
+              <a:avLst/>
+            </a:prstGeom>
+          </p:spPr>
+        </p:pic>
+      </p:grpSp>
+      <p:cxnSp>
+        <p:nvCxnSpPr>
+          <p:cNvPr id="16" name="Straight Connector 15">
+            <a:extLst>
+              <a:ext uri="{FF2B5EF4-FFF2-40B4-BE49-F238E27FC236}">
+                <a16:creationId xmlns:a16="http://schemas.microsoft.com/office/drawing/2014/main" id="{405E144E-9332-18AD-89A3-AE19A4E265EE}"/>
+              </a:ext>
+            </a:extLst>
+          </p:cNvPr>
+          <p:cNvCxnSpPr>
+            <a:cxnSpLocks/>
+            <a:stCxn id="4" idx="3"/>
+            <a:endCxn id="14" idx="1"/>
+          </p:cNvCxnSpPr>
+          <p:nvPr/>
+        </p:nvCxnSpPr>
+        <p:spPr>
+          <a:xfrm flipV="1">
+            <a:off x="1768054" y="1589115"/>
+            <a:ext cx="1375655" cy="1839885"/>
+          </a:xfrm>
+          <a:prstGeom prst="line">
+            <a:avLst/>
+          </a:prstGeom>
+        </p:spPr>
+        <p:style>
+          <a:lnRef idx="2">
+            <a:schemeClr val="accent1"/>
+          </a:lnRef>
+          <a:fillRef idx="0">
+            <a:schemeClr val="accent1"/>
+          </a:fillRef>
+          <a:effectRef idx="1">
+            <a:schemeClr val="accent1"/>
+          </a:effectRef>
+          <a:fontRef idx="minor">
+            <a:schemeClr val="tx1"/>
+          </a:fontRef>
+        </p:style>
+      </p:cxnSp>
+      <p:cxnSp>
+        <p:nvCxnSpPr>
+          <p:cNvPr id="17" name="Straight Connector 16">
+            <a:extLst>
+              <a:ext uri="{FF2B5EF4-FFF2-40B4-BE49-F238E27FC236}">
+                <a16:creationId xmlns:a16="http://schemas.microsoft.com/office/drawing/2014/main" id="{EB78123F-0246-8EB9-B3C7-E725D1940435}"/>
+              </a:ext>
+            </a:extLst>
+          </p:cNvPr>
+          <p:cNvCxnSpPr>
+            <a:cxnSpLocks/>
+            <a:stCxn id="4" idx="3"/>
+            <a:endCxn id="10" idx="1"/>
+          </p:cNvCxnSpPr>
+          <p:nvPr/>
+        </p:nvCxnSpPr>
+        <p:spPr>
+          <a:xfrm>
+            <a:off x="1768054" y="3429000"/>
+            <a:ext cx="1375655" cy="1826135"/>
+          </a:xfrm>
+          <a:prstGeom prst="line">
+            <a:avLst/>
+          </a:prstGeom>
+        </p:spPr>
+        <p:style>
+          <a:lnRef idx="2">
+            <a:schemeClr val="accent1"/>
+          </a:lnRef>
+          <a:fillRef idx="0">
+            <a:schemeClr val="accent1"/>
+          </a:fillRef>
+          <a:effectRef idx="1">
+            <a:schemeClr val="accent1"/>
+          </a:effectRef>
+          <a:fontRef idx="minor">
+            <a:schemeClr val="tx1"/>
+          </a:fontRef>
+        </p:style>
+      </p:cxnSp>
+      <p:grpSp>
+        <p:nvGrpSpPr>
+          <p:cNvPr id="22" name="Group 21">
+            <a:extLst>
+              <a:ext uri="{FF2B5EF4-FFF2-40B4-BE49-F238E27FC236}">
+                <a16:creationId xmlns:a16="http://schemas.microsoft.com/office/drawing/2014/main" id="{73A72A88-5871-F107-9268-5643B38A7503}"/>
+              </a:ext>
+            </a:extLst>
+          </p:cNvPr>
+          <p:cNvGrpSpPr/>
+          <p:nvPr/>
+        </p:nvGrpSpPr>
+        <p:grpSpPr>
+          <a:xfrm>
+            <a:off x="5356732" y="1398157"/>
+            <a:ext cx="1478536" cy="986062"/>
+            <a:chOff x="4827142" y="3233149"/>
+            <a:chExt cx="1478536" cy="986062"/>
+          </a:xfrm>
+        </p:grpSpPr>
+        <p:sp>
+          <p:nvSpPr>
+            <p:cNvPr id="23" name="Rectangle 22">
+              <a:extLst>
+                <a:ext uri="{FF2B5EF4-FFF2-40B4-BE49-F238E27FC236}">
+                  <a16:creationId xmlns:a16="http://schemas.microsoft.com/office/drawing/2014/main" id="{C4878A0D-FD7E-8FEA-B5D4-FC93BDE5A8B7}"/>
+                </a:ext>
+              </a:extLst>
+            </p:cNvPr>
+            <p:cNvSpPr/>
+            <p:nvPr/>
+          </p:nvSpPr>
+          <p:spPr>
+            <a:xfrm>
+              <a:off x="4827142" y="3233149"/>
+              <a:ext cx="1478536" cy="391702"/>
+            </a:xfrm>
+            <a:prstGeom prst="rect">
+              <a:avLst/>
+            </a:prstGeom>
+          </p:spPr>
+          <p:style>
+            <a:lnRef idx="2">
+              <a:schemeClr val="accent1">
+                <a:shade val="15000"/>
+              </a:schemeClr>
+            </a:lnRef>
+            <a:fillRef idx="1">
+              <a:schemeClr val="accent1"/>
+            </a:fillRef>
+            <a:effectRef idx="0">
+              <a:schemeClr val="accent1"/>
+            </a:effectRef>
+            <a:fontRef idx="minor">
+              <a:schemeClr val="lt1"/>
+            </a:fontRef>
+          </p:style>
+          <p:txBody>
+            <a:bodyPr rtlCol="0" anchor="ctr"/>
+            <a:lstStyle/>
+            <a:p>
+              <a:pPr algn="ctr"/>
+              <a:r>
+                <a:rPr lang="en-US" dirty="0" err="1"/>
+                <a:t>DialogNode</a:t>
+              </a:r>
+              <a:endParaRPr lang="en-US" dirty="0"/>
+            </a:p>
+          </p:txBody>
+        </p:sp>
+        <p:pic>
+          <p:nvPicPr>
+            <p:cNvPr id="24" name="Graphic 23" descr="Leaf with solid fill">
+              <a:extLst>
+                <a:ext uri="{FF2B5EF4-FFF2-40B4-BE49-F238E27FC236}">
+                  <a16:creationId xmlns:a16="http://schemas.microsoft.com/office/drawing/2014/main" id="{44FDC757-7A45-76D0-829C-4CDCC36772E2}"/>
+                </a:ext>
+              </a:extLst>
+            </p:cNvPr>
+            <p:cNvPicPr>
+              <a:picLocks noChangeAspect="1"/>
+            </p:cNvPicPr>
+            <p:nvPr/>
+          </p:nvPicPr>
+          <p:blipFill>
+            <a:blip r:embed="rId2">
+              <a:extLst>
+                <a:ext uri="{96DAC541-7B7A-43D3-8B79-37D633B846F1}">
+                  <asvg:svgBlip xmlns:asvg="http://schemas.microsoft.com/office/drawing/2016/SVG/main" r:embed="rId3"/>
+                </a:ext>
+              </a:extLst>
+            </a:blip>
+            <a:stretch>
+              <a:fillRect/>
+            </a:stretch>
+          </p:blipFill>
+          <p:spPr>
+            <a:xfrm>
+              <a:off x="5269230" y="3624851"/>
+              <a:ext cx="594360" cy="594360"/>
+            </a:xfrm>
+            <a:prstGeom prst="rect">
+              <a:avLst/>
+            </a:prstGeom>
+          </p:spPr>
+        </p:pic>
+      </p:grpSp>
+      <p:cxnSp>
+        <p:nvCxnSpPr>
+          <p:cNvPr id="25" name="Straight Connector 24">
+            <a:extLst>
+              <a:ext uri="{FF2B5EF4-FFF2-40B4-BE49-F238E27FC236}">
+                <a16:creationId xmlns:a16="http://schemas.microsoft.com/office/drawing/2014/main" id="{35DC6392-E1A3-D595-C44D-C2CC18673C28}"/>
+              </a:ext>
+            </a:extLst>
+          </p:cNvPr>
+          <p:cNvCxnSpPr>
+            <a:cxnSpLocks/>
+            <a:stCxn id="14" idx="3"/>
+            <a:endCxn id="23" idx="1"/>
+          </p:cNvCxnSpPr>
+          <p:nvPr/>
+        </p:nvCxnSpPr>
+        <p:spPr>
+          <a:xfrm>
+            <a:off x="4515309" y="1589115"/>
+            <a:ext cx="841423" cy="4893"/>
+          </a:xfrm>
+          <a:prstGeom prst="line">
+            <a:avLst/>
+          </a:prstGeom>
+        </p:spPr>
+        <p:style>
+          <a:lnRef idx="2">
+            <a:schemeClr val="accent1"/>
+          </a:lnRef>
+          <a:fillRef idx="0">
+            <a:schemeClr val="accent1"/>
+          </a:fillRef>
+          <a:effectRef idx="1">
+            <a:schemeClr val="accent1"/>
+          </a:effectRef>
+          <a:fontRef idx="minor">
+            <a:schemeClr val="tx1"/>
+          </a:fontRef>
+        </p:style>
+      </p:cxnSp>
+      <p:grpSp>
+        <p:nvGrpSpPr>
+          <p:cNvPr id="31" name="Group 30">
+            <a:extLst>
+              <a:ext uri="{FF2B5EF4-FFF2-40B4-BE49-F238E27FC236}">
+                <a16:creationId xmlns:a16="http://schemas.microsoft.com/office/drawing/2014/main" id="{1B3ED218-434F-6F3F-B224-C3611D5C51AE}"/>
+              </a:ext>
+            </a:extLst>
+          </p:cNvPr>
+          <p:cNvGrpSpPr/>
+          <p:nvPr/>
+        </p:nvGrpSpPr>
+        <p:grpSpPr>
+          <a:xfrm>
+            <a:off x="5356732" y="3226872"/>
+            <a:ext cx="1478536" cy="986062"/>
+            <a:chOff x="4827142" y="3233149"/>
+            <a:chExt cx="1478536" cy="986062"/>
+          </a:xfrm>
+        </p:grpSpPr>
+        <p:sp>
+          <p:nvSpPr>
+            <p:cNvPr id="32" name="Rectangle 31">
+              <a:extLst>
+                <a:ext uri="{FF2B5EF4-FFF2-40B4-BE49-F238E27FC236}">
+                  <a16:creationId xmlns:a16="http://schemas.microsoft.com/office/drawing/2014/main" id="{180A9DFD-9C56-1128-FF65-5EBDD4D45AC7}"/>
+                </a:ext>
+              </a:extLst>
+            </p:cNvPr>
+            <p:cNvSpPr/>
+            <p:nvPr/>
+          </p:nvSpPr>
+          <p:spPr>
+            <a:xfrm>
+              <a:off x="4827142" y="3233149"/>
+              <a:ext cx="1478536" cy="391702"/>
+            </a:xfrm>
+            <a:prstGeom prst="rect">
+              <a:avLst/>
+            </a:prstGeom>
+          </p:spPr>
+          <p:style>
+            <a:lnRef idx="2">
+              <a:schemeClr val="accent1">
+                <a:shade val="15000"/>
+              </a:schemeClr>
+            </a:lnRef>
+            <a:fillRef idx="1">
+              <a:schemeClr val="accent1"/>
+            </a:fillRef>
+            <a:effectRef idx="0">
+              <a:schemeClr val="accent1"/>
+            </a:effectRef>
+            <a:fontRef idx="minor">
+              <a:schemeClr val="lt1"/>
+            </a:fontRef>
+          </p:style>
+          <p:txBody>
+            <a:bodyPr rtlCol="0" anchor="ctr"/>
+            <a:lstStyle/>
+            <a:p>
+              <a:pPr algn="ctr"/>
+              <a:r>
+                <a:rPr lang="en-US" dirty="0" err="1"/>
+                <a:t>DialogNode</a:t>
+              </a:r>
+              <a:endParaRPr lang="en-US" dirty="0"/>
+            </a:p>
+          </p:txBody>
+        </p:sp>
+        <p:pic>
+          <p:nvPicPr>
+            <p:cNvPr id="33" name="Graphic 32" descr="Leaf with solid fill">
+              <a:extLst>
+                <a:ext uri="{FF2B5EF4-FFF2-40B4-BE49-F238E27FC236}">
+                  <a16:creationId xmlns:a16="http://schemas.microsoft.com/office/drawing/2014/main" id="{5598D13D-8995-B049-7A76-E969976BD54E}"/>
+                </a:ext>
+              </a:extLst>
+            </p:cNvPr>
+            <p:cNvPicPr>
+              <a:picLocks noChangeAspect="1"/>
+            </p:cNvPicPr>
+            <p:nvPr/>
+          </p:nvPicPr>
+          <p:blipFill>
+            <a:blip r:embed="rId2">
+              <a:extLst>
+                <a:ext uri="{96DAC541-7B7A-43D3-8B79-37D633B846F1}">
+                  <asvg:svgBlip xmlns:asvg="http://schemas.microsoft.com/office/drawing/2016/SVG/main" r:embed="rId3"/>
+                </a:ext>
+              </a:extLst>
+            </a:blip>
+            <a:stretch>
+              <a:fillRect/>
+            </a:stretch>
+          </p:blipFill>
+          <p:spPr>
+            <a:xfrm>
+              <a:off x="5269230" y="3624851"/>
+              <a:ext cx="594360" cy="594360"/>
+            </a:xfrm>
+            <a:prstGeom prst="rect">
+              <a:avLst/>
+            </a:prstGeom>
+          </p:spPr>
+        </p:pic>
+      </p:grpSp>
+      <p:cxnSp>
+        <p:nvCxnSpPr>
+          <p:cNvPr id="34" name="Straight Connector 33">
+            <a:extLst>
+              <a:ext uri="{FF2B5EF4-FFF2-40B4-BE49-F238E27FC236}">
+                <a16:creationId xmlns:a16="http://schemas.microsoft.com/office/drawing/2014/main" id="{74857F1B-CBC9-F93E-8994-A5040177C26C}"/>
+              </a:ext>
+            </a:extLst>
+          </p:cNvPr>
+          <p:cNvCxnSpPr>
+            <a:cxnSpLocks/>
+            <a:stCxn id="7" idx="3"/>
+            <a:endCxn id="32" idx="1"/>
+          </p:cNvCxnSpPr>
+          <p:nvPr/>
+        </p:nvCxnSpPr>
+        <p:spPr>
+          <a:xfrm flipV="1">
+            <a:off x="4515309" y="3422723"/>
+            <a:ext cx="841423" cy="1035"/>
+          </a:xfrm>
+          <a:prstGeom prst="line">
+            <a:avLst/>
+          </a:prstGeom>
+        </p:spPr>
+        <p:style>
+          <a:lnRef idx="2">
+            <a:schemeClr val="accent1"/>
+          </a:lnRef>
+          <a:fillRef idx="0">
+            <a:schemeClr val="accent1"/>
+          </a:fillRef>
+          <a:effectRef idx="1">
+            <a:schemeClr val="accent1"/>
+          </a:effectRef>
+          <a:fontRef idx="minor">
+            <a:schemeClr val="tx1"/>
+          </a:fontRef>
+        </p:style>
+      </p:cxnSp>
+      <p:cxnSp>
+        <p:nvCxnSpPr>
+          <p:cNvPr id="39" name="Straight Connector 38">
+            <a:extLst>
+              <a:ext uri="{FF2B5EF4-FFF2-40B4-BE49-F238E27FC236}">
+                <a16:creationId xmlns:a16="http://schemas.microsoft.com/office/drawing/2014/main" id="{DE9546A4-F272-2F80-245E-7C40F3403F6F}"/>
+              </a:ext>
+            </a:extLst>
+          </p:cNvPr>
+          <p:cNvCxnSpPr>
+            <a:cxnSpLocks/>
+            <a:stCxn id="10" idx="3"/>
+            <a:endCxn id="32" idx="1"/>
+          </p:cNvCxnSpPr>
+          <p:nvPr/>
+        </p:nvCxnSpPr>
+        <p:spPr>
+          <a:xfrm flipV="1">
+            <a:off x="4515309" y="3422723"/>
+            <a:ext cx="841423" cy="1832412"/>
+          </a:xfrm>
+          <a:prstGeom prst="line">
+            <a:avLst/>
+          </a:prstGeom>
+        </p:spPr>
+        <p:style>
+          <a:lnRef idx="2">
+            <a:schemeClr val="accent1"/>
+          </a:lnRef>
+          <a:fillRef idx="0">
+            <a:schemeClr val="accent1"/>
+          </a:fillRef>
+          <a:effectRef idx="1">
+            <a:schemeClr val="accent1"/>
+          </a:effectRef>
+          <a:fontRef idx="minor">
+            <a:schemeClr val="tx1"/>
+          </a:fontRef>
+        </p:style>
+      </p:cxnSp>
+      <p:grpSp>
+        <p:nvGrpSpPr>
+          <p:cNvPr id="42" name="Group 41">
+            <a:extLst>
+              <a:ext uri="{FF2B5EF4-FFF2-40B4-BE49-F238E27FC236}">
+                <a16:creationId xmlns:a16="http://schemas.microsoft.com/office/drawing/2014/main" id="{359DBE3C-81B0-CF72-C9E9-B4B60ACDF145}"/>
+              </a:ext>
+            </a:extLst>
+          </p:cNvPr>
+          <p:cNvGrpSpPr/>
+          <p:nvPr/>
+        </p:nvGrpSpPr>
+        <p:grpSpPr>
+          <a:xfrm>
+            <a:off x="7483099" y="2638440"/>
+            <a:ext cx="1371600" cy="1471118"/>
+            <a:chOff x="2700485" y="4747238"/>
+            <a:chExt cx="1371600" cy="1471118"/>
+          </a:xfrm>
+        </p:grpSpPr>
+        <p:sp>
+          <p:nvSpPr>
+            <p:cNvPr id="43" name="Diamond 42">
+              <a:extLst>
+                <a:ext uri="{FF2B5EF4-FFF2-40B4-BE49-F238E27FC236}">
+                  <a16:creationId xmlns:a16="http://schemas.microsoft.com/office/drawing/2014/main" id="{49833BFE-FFF4-F27E-E97B-DE62068D0B4D}"/>
+                </a:ext>
+              </a:extLst>
+            </p:cNvPr>
+            <p:cNvSpPr/>
+            <p:nvPr/>
+          </p:nvSpPr>
+          <p:spPr>
+            <a:xfrm>
+              <a:off x="2700485" y="4846756"/>
+              <a:ext cx="1371600" cy="1371600"/>
+            </a:xfrm>
+            <a:prstGeom prst="diamond">
+              <a:avLst/>
+            </a:prstGeom>
+          </p:spPr>
+          <p:style>
+            <a:lnRef idx="1">
+              <a:schemeClr val="accent2"/>
+            </a:lnRef>
+            <a:fillRef idx="2">
+              <a:schemeClr val="accent2"/>
+            </a:fillRef>
+            <a:effectRef idx="1">
+              <a:schemeClr val="accent2"/>
+            </a:effectRef>
+            <a:fontRef idx="minor">
+              <a:schemeClr val="dk1"/>
+            </a:fontRef>
+          </p:style>
+          <p:txBody>
+            <a:bodyPr lIns="0" tIns="0" rIns="0" bIns="0" rtlCol="0" anchor="ctr"/>
+            <a:lstStyle/>
+            <a:p>
+              <a:pPr algn="ctr"/>
+              <a:r>
+                <a:rPr lang="en-US" sz="1400" dirty="0"/>
+                <a:t>Dialog</a:t>
+              </a:r>
+            </a:p>
+            <a:p>
+              <a:pPr algn="ctr"/>
+              <a:r>
+                <a:rPr lang="en-US" sz="1400" dirty="0"/>
+                <a:t>Choices</a:t>
+              </a:r>
+            </a:p>
+          </p:txBody>
+        </p:sp>
+        <p:pic>
+          <p:nvPicPr>
+            <p:cNvPr id="44" name="Graphic 43" descr="Decision chart with solid fill">
+              <a:extLst>
+                <a:ext uri="{FF2B5EF4-FFF2-40B4-BE49-F238E27FC236}">
+                  <a16:creationId xmlns:a16="http://schemas.microsoft.com/office/drawing/2014/main" id="{D0E8809E-8D9C-08A7-49F4-FFCA6F1657C1}"/>
+                </a:ext>
+              </a:extLst>
+            </p:cNvPr>
+            <p:cNvPicPr>
+              <a:picLocks noChangeAspect="1"/>
+            </p:cNvPicPr>
+            <p:nvPr/>
+          </p:nvPicPr>
+          <p:blipFill>
+            <a:blip r:embed="rId4">
+              <a:extLst>
+                <a:ext uri="{96DAC541-7B7A-43D3-8B79-37D633B846F1}">
+                  <asvg:svgBlip xmlns:asvg="http://schemas.microsoft.com/office/drawing/2016/SVG/main" r:embed="rId5"/>
+                </a:ext>
+              </a:extLst>
+            </a:blip>
+            <a:stretch>
+              <a:fillRect/>
+            </a:stretch>
+          </p:blipFill>
+          <p:spPr>
+            <a:xfrm>
+              <a:off x="3089105" y="4747238"/>
+              <a:ext cx="594360" cy="594360"/>
+            </a:xfrm>
+            <a:prstGeom prst="rect">
+              <a:avLst/>
+            </a:prstGeom>
+          </p:spPr>
+        </p:pic>
+      </p:grpSp>
+      <p:grpSp>
+        <p:nvGrpSpPr>
+          <p:cNvPr id="45" name="Group 44">
+            <a:extLst>
+              <a:ext uri="{FF2B5EF4-FFF2-40B4-BE49-F238E27FC236}">
+                <a16:creationId xmlns:a16="http://schemas.microsoft.com/office/drawing/2014/main" id="{2A1421FE-8BDD-419D-9991-DF8605BEA6B3}"/>
+              </a:ext>
+            </a:extLst>
+          </p:cNvPr>
+          <p:cNvGrpSpPr/>
+          <p:nvPr/>
+        </p:nvGrpSpPr>
+        <p:grpSpPr>
+          <a:xfrm>
+            <a:off x="7483099" y="4469817"/>
+            <a:ext cx="1371600" cy="1471118"/>
+            <a:chOff x="2700485" y="4747238"/>
+            <a:chExt cx="1371600" cy="1471118"/>
+          </a:xfrm>
+        </p:grpSpPr>
+        <p:sp>
+          <p:nvSpPr>
+            <p:cNvPr id="46" name="Diamond 45">
+              <a:extLst>
+                <a:ext uri="{FF2B5EF4-FFF2-40B4-BE49-F238E27FC236}">
+                  <a16:creationId xmlns:a16="http://schemas.microsoft.com/office/drawing/2014/main" id="{8411E40D-CF69-F9EF-DF39-C8125B6CE24D}"/>
+                </a:ext>
+              </a:extLst>
+            </p:cNvPr>
+            <p:cNvSpPr/>
+            <p:nvPr/>
+          </p:nvSpPr>
+          <p:spPr>
+            <a:xfrm>
+              <a:off x="2700485" y="4846756"/>
+              <a:ext cx="1371600" cy="1371600"/>
+            </a:xfrm>
+            <a:prstGeom prst="diamond">
+              <a:avLst/>
+            </a:prstGeom>
+          </p:spPr>
+          <p:style>
+            <a:lnRef idx="1">
+              <a:schemeClr val="accent2"/>
+            </a:lnRef>
+            <a:fillRef idx="2">
+              <a:schemeClr val="accent2"/>
+            </a:fillRef>
+            <a:effectRef idx="1">
+              <a:schemeClr val="accent2"/>
+            </a:effectRef>
+            <a:fontRef idx="minor">
+              <a:schemeClr val="dk1"/>
+            </a:fontRef>
+          </p:style>
+          <p:txBody>
+            <a:bodyPr lIns="0" tIns="0" rIns="0" bIns="0" rtlCol="0" anchor="ctr"/>
+            <a:lstStyle/>
+            <a:p>
+              <a:pPr algn="ctr"/>
+              <a:r>
+                <a:rPr lang="en-US" sz="1400" dirty="0"/>
+                <a:t>Dialog</a:t>
+              </a:r>
+            </a:p>
+            <a:p>
+              <a:pPr algn="ctr"/>
+              <a:r>
+                <a:rPr lang="en-US" sz="1400" dirty="0"/>
+                <a:t>Choices</a:t>
+              </a:r>
+            </a:p>
+          </p:txBody>
+        </p:sp>
+        <p:pic>
+          <p:nvPicPr>
+            <p:cNvPr id="47" name="Graphic 46" descr="Decision chart with solid fill">
+              <a:extLst>
+                <a:ext uri="{FF2B5EF4-FFF2-40B4-BE49-F238E27FC236}">
+                  <a16:creationId xmlns:a16="http://schemas.microsoft.com/office/drawing/2014/main" id="{F10D7D6C-938E-E16F-0C21-41E246766A1B}"/>
+                </a:ext>
+              </a:extLst>
+            </p:cNvPr>
+            <p:cNvPicPr>
+              <a:picLocks noChangeAspect="1"/>
+            </p:cNvPicPr>
+            <p:nvPr/>
+          </p:nvPicPr>
+          <p:blipFill>
+            <a:blip r:embed="rId4">
+              <a:extLst>
+                <a:ext uri="{96DAC541-7B7A-43D3-8B79-37D633B846F1}">
+                  <asvg:svgBlip xmlns:asvg="http://schemas.microsoft.com/office/drawing/2016/SVG/main" r:embed="rId5"/>
+                </a:ext>
+              </a:extLst>
+            </a:blip>
+            <a:stretch>
+              <a:fillRect/>
+            </a:stretch>
+          </p:blipFill>
+          <p:spPr>
+            <a:xfrm>
+              <a:off x="3089105" y="4747238"/>
+              <a:ext cx="594360" cy="594360"/>
+            </a:xfrm>
+            <a:prstGeom prst="rect">
+              <a:avLst/>
+            </a:prstGeom>
+          </p:spPr>
+        </p:pic>
+      </p:grpSp>
+      <p:cxnSp>
+        <p:nvCxnSpPr>
+          <p:cNvPr id="48" name="Straight Connector 47">
+            <a:extLst>
+              <a:ext uri="{FF2B5EF4-FFF2-40B4-BE49-F238E27FC236}">
+                <a16:creationId xmlns:a16="http://schemas.microsoft.com/office/drawing/2014/main" id="{4F178F12-C76C-D9A5-B870-35E2F3188617}"/>
+              </a:ext>
+            </a:extLst>
+          </p:cNvPr>
+          <p:cNvCxnSpPr>
+            <a:cxnSpLocks/>
+            <a:stCxn id="43" idx="1"/>
+            <a:endCxn id="32" idx="3"/>
+          </p:cNvCxnSpPr>
+          <p:nvPr/>
+        </p:nvCxnSpPr>
+        <p:spPr>
+          <a:xfrm flipH="1" flipV="1">
+            <a:off x="6835268" y="3422723"/>
+            <a:ext cx="647831" cy="1035"/>
+          </a:xfrm>
+          <a:prstGeom prst="line">
+            <a:avLst/>
+          </a:prstGeom>
+        </p:spPr>
+        <p:style>
+          <a:lnRef idx="2">
+            <a:schemeClr val="accent1"/>
+          </a:lnRef>
+          <a:fillRef idx="0">
+            <a:schemeClr val="accent1"/>
+          </a:fillRef>
+          <a:effectRef idx="1">
+            <a:schemeClr val="accent1"/>
+          </a:effectRef>
+          <a:fontRef idx="minor">
+            <a:schemeClr val="tx1"/>
+          </a:fontRef>
+        </p:style>
+      </p:cxnSp>
+      <p:cxnSp>
+        <p:nvCxnSpPr>
+          <p:cNvPr id="51" name="Straight Connector 50">
+            <a:extLst>
+              <a:ext uri="{FF2B5EF4-FFF2-40B4-BE49-F238E27FC236}">
+                <a16:creationId xmlns:a16="http://schemas.microsoft.com/office/drawing/2014/main" id="{E32A1552-D348-29E8-5372-7E3148AF0D52}"/>
+              </a:ext>
+            </a:extLst>
+          </p:cNvPr>
+          <p:cNvCxnSpPr>
+            <a:cxnSpLocks/>
+            <a:stCxn id="46" idx="1"/>
+            <a:endCxn id="32" idx="3"/>
+          </p:cNvCxnSpPr>
+          <p:nvPr/>
+        </p:nvCxnSpPr>
+        <p:spPr>
+          <a:xfrm flipH="1" flipV="1">
+            <a:off x="6835268" y="3422723"/>
+            <a:ext cx="647831" cy="1832412"/>
+          </a:xfrm>
+          <a:prstGeom prst="line">
+            <a:avLst/>
+          </a:prstGeom>
+        </p:spPr>
+        <p:style>
+          <a:lnRef idx="2">
+            <a:schemeClr val="accent1"/>
+          </a:lnRef>
+          <a:fillRef idx="0">
+            <a:schemeClr val="accent1"/>
+          </a:fillRef>
+          <a:effectRef idx="1">
+            <a:schemeClr val="accent1"/>
+          </a:effectRef>
+          <a:fontRef idx="minor">
+            <a:schemeClr val="tx1"/>
+          </a:fontRef>
+        </p:style>
+      </p:cxnSp>
+      <p:sp>
+        <p:nvSpPr>
+          <p:cNvPr id="55" name="Freeform: Shape 54">
+            <a:extLst>
+              <a:ext uri="{FF2B5EF4-FFF2-40B4-BE49-F238E27FC236}">
+                <a16:creationId xmlns:a16="http://schemas.microsoft.com/office/drawing/2014/main" id="{238BC30C-B52D-6800-7632-2A500B289701}"/>
+              </a:ext>
+            </a:extLst>
+          </p:cNvPr>
+          <p:cNvSpPr/>
+          <p:nvPr/>
+        </p:nvSpPr>
+        <p:spPr>
+          <a:xfrm>
+            <a:off x="90424" y="3437594"/>
+            <a:ext cx="8077299" cy="3127953"/>
+          </a:xfrm>
+          <a:custGeom>
+            <a:avLst/>
+            <a:gdLst>
+              <a:gd name="connsiteX0" fmla="*/ 8077299 w 8077299"/>
+              <a:gd name="connsiteY0" fmla="*/ 2502568 h 3127953"/>
+              <a:gd name="connsiteX1" fmla="*/ 3635928 w 8077299"/>
+              <a:gd name="connsiteY1" fmla="*/ 3121335 h 3127953"/>
+              <a:gd name="connsiteX2" fmla="*/ 1050857 w 8077299"/>
+              <a:gd name="connsiteY2" fmla="*/ 2151934 h 3127953"/>
+              <a:gd name="connsiteX3" fmla="*/ 60830 w 8077299"/>
+              <a:gd name="connsiteY3" fmla="*/ 378135 h 3127953"/>
+              <a:gd name="connsiteX4" fmla="*/ 191459 w 8077299"/>
+              <a:gd name="connsiteY4" fmla="*/ 0 h 3127953"/>
+            </a:gdLst>
+            <a:ahLst/>
+            <a:cxnLst>
+              <a:cxn ang="0">
+                <a:pos x="connsiteX0" y="connsiteY0"/>
+              </a:cxn>
+              <a:cxn ang="0">
+                <a:pos x="connsiteX1" y="connsiteY1"/>
+              </a:cxn>
+              <a:cxn ang="0">
+                <a:pos x="connsiteX2" y="connsiteY2"/>
+              </a:cxn>
+              <a:cxn ang="0">
+                <a:pos x="connsiteX3" y="connsiteY3"/>
+              </a:cxn>
+              <a:cxn ang="0">
+                <a:pos x="connsiteX4" y="connsiteY4"/>
+              </a:cxn>
+            </a:cxnLst>
+            <a:rect l="l" t="t" r="r" b="b"/>
+            <a:pathLst>
+              <a:path w="8077299" h="3127953">
+                <a:moveTo>
+                  <a:pt x="8077299" y="2502568"/>
+                </a:moveTo>
+                <a:cubicBezTo>
+                  <a:pt x="6442150" y="2841171"/>
+                  <a:pt x="4807002" y="3179774"/>
+                  <a:pt x="3635928" y="3121335"/>
+                </a:cubicBezTo>
+                <a:cubicBezTo>
+                  <a:pt x="2464854" y="3062896"/>
+                  <a:pt x="1646707" y="2609134"/>
+                  <a:pt x="1050857" y="2151934"/>
+                </a:cubicBezTo>
+                <a:cubicBezTo>
+                  <a:pt x="455007" y="1694734"/>
+                  <a:pt x="204063" y="736791"/>
+                  <a:pt x="60830" y="378135"/>
+                </a:cubicBezTo>
+                <a:cubicBezTo>
+                  <a:pt x="-82403" y="19479"/>
+                  <a:pt x="54528" y="9739"/>
+                  <a:pt x="191459" y="0"/>
+                </a:cubicBezTo>
+              </a:path>
+            </a:pathLst>
+          </a:custGeom>
+          <a:noFill/>
+        </p:spPr>
+        <p:style>
+          <a:lnRef idx="2">
+            <a:schemeClr val="accent1">
+              <a:shade val="15000"/>
+            </a:schemeClr>
+          </a:lnRef>
+          <a:fillRef idx="1">
+            <a:schemeClr val="accent1"/>
+          </a:fillRef>
+          <a:effectRef idx="0">
+            <a:schemeClr val="accent1"/>
+          </a:effectRef>
+          <a:fontRef idx="minor">
+            <a:schemeClr val="lt1"/>
+          </a:fontRef>
+        </p:style>
+        <p:txBody>
+          <a:bodyPr rtlCol="0" anchor="ctr"/>
+          <a:lstStyle/>
+          <a:p>
+            <a:pPr algn="ctr"/>
+            <a:endParaRPr lang="en-US"/>
+          </a:p>
+        </p:txBody>
+      </p:sp>
+      <p:sp>
+        <p:nvSpPr>
+          <p:cNvPr id="56" name="Rectangle: Rounded Corners 55">
+            <a:extLst>
+              <a:ext uri="{FF2B5EF4-FFF2-40B4-BE49-F238E27FC236}">
+                <a16:creationId xmlns:a16="http://schemas.microsoft.com/office/drawing/2014/main" id="{6A6742EC-CFDC-8A30-3DFB-A91FC4A48089}"/>
+              </a:ext>
+            </a:extLst>
+          </p:cNvPr>
+          <p:cNvSpPr/>
+          <p:nvPr/>
+        </p:nvSpPr>
+        <p:spPr>
+          <a:xfrm>
+            <a:off x="10191678" y="3234690"/>
+            <a:ext cx="1203158" cy="378136"/>
+          </a:xfrm>
+          <a:prstGeom prst="roundRect">
+            <a:avLst/>
+          </a:prstGeom>
+        </p:spPr>
+        <p:style>
+          <a:lnRef idx="2">
+            <a:schemeClr val="accent4">
+              <a:shade val="15000"/>
+            </a:schemeClr>
+          </a:lnRef>
+          <a:fillRef idx="1">
+            <a:schemeClr val="accent4"/>
+          </a:fillRef>
+          <a:effectRef idx="0">
+            <a:schemeClr val="accent4"/>
+          </a:effectRef>
+          <a:fontRef idx="minor">
+            <a:schemeClr val="lt1"/>
+          </a:fontRef>
+        </p:style>
+        <p:txBody>
+          <a:bodyPr rtlCol="0" anchor="ctr"/>
+          <a:lstStyle/>
+          <a:p>
+            <a:pPr algn="ctr"/>
+            <a:r>
+              <a:rPr lang="en-US" dirty="0"/>
+              <a:t>End</a:t>
+            </a:r>
+          </a:p>
+        </p:txBody>
+      </p:sp>
+      <p:cxnSp>
+        <p:nvCxnSpPr>
+          <p:cNvPr id="57" name="Straight Connector 56">
+            <a:extLst>
+              <a:ext uri="{FF2B5EF4-FFF2-40B4-BE49-F238E27FC236}">
+                <a16:creationId xmlns:a16="http://schemas.microsoft.com/office/drawing/2014/main" id="{06DE0578-4CAF-0DF7-C53A-C3110AC2A276}"/>
+              </a:ext>
+            </a:extLst>
+          </p:cNvPr>
+          <p:cNvCxnSpPr>
+            <a:cxnSpLocks/>
+            <a:stCxn id="56" idx="1"/>
+            <a:endCxn id="43" idx="3"/>
+          </p:cNvCxnSpPr>
+          <p:nvPr/>
+        </p:nvCxnSpPr>
+        <p:spPr>
+          <a:xfrm flipH="1">
+            <a:off x="8854699" y="3423758"/>
+            <a:ext cx="1336979" cy="0"/>
+          </a:xfrm>
+          <a:prstGeom prst="line">
+            <a:avLst/>
+          </a:prstGeom>
+        </p:spPr>
+        <p:style>
+          <a:lnRef idx="2">
+            <a:schemeClr val="accent1"/>
+          </a:lnRef>
+          <a:fillRef idx="0">
+            <a:schemeClr val="accent1"/>
+          </a:fillRef>
+          <a:effectRef idx="1">
+            <a:schemeClr val="accent1"/>
+          </a:effectRef>
+          <a:fontRef idx="minor">
+            <a:schemeClr val="tx1"/>
+          </a:fontRef>
+        </p:style>
+      </p:cxnSp>
+      <p:cxnSp>
+        <p:nvCxnSpPr>
+          <p:cNvPr id="61" name="Straight Connector 60">
+            <a:extLst>
+              <a:ext uri="{FF2B5EF4-FFF2-40B4-BE49-F238E27FC236}">
+                <a16:creationId xmlns:a16="http://schemas.microsoft.com/office/drawing/2014/main" id="{11E89D0A-C2FA-A2D6-A5A4-2823FA3D4333}"/>
+              </a:ext>
+            </a:extLst>
+          </p:cNvPr>
+          <p:cNvCxnSpPr>
+            <a:cxnSpLocks/>
+            <a:stCxn id="23" idx="3"/>
+            <a:endCxn id="56" idx="1"/>
+          </p:cNvCxnSpPr>
+          <p:nvPr/>
+        </p:nvCxnSpPr>
+        <p:spPr>
+          <a:xfrm>
+            <a:off x="6835268" y="1594008"/>
+            <a:ext cx="3356410" cy="1829750"/>
+          </a:xfrm>
+          <a:prstGeom prst="line">
+            <a:avLst/>
+          </a:prstGeom>
+        </p:spPr>
+        <p:style>
+          <a:lnRef idx="2">
+            <a:schemeClr val="accent1"/>
+          </a:lnRef>
+          <a:fillRef idx="0">
+            <a:schemeClr val="accent1"/>
+          </a:fillRef>
+          <a:effectRef idx="1">
+            <a:schemeClr val="accent1"/>
+          </a:effectRef>
+          <a:fontRef idx="minor">
+            <a:schemeClr val="tx1"/>
+          </a:fontRef>
+        </p:style>
+      </p:cxnSp>
+      <p:sp>
+        <p:nvSpPr>
+          <p:cNvPr id="64" name="Rectangle: Rounded Corners 63">
+            <a:extLst>
+              <a:ext uri="{FF2B5EF4-FFF2-40B4-BE49-F238E27FC236}">
+                <a16:creationId xmlns:a16="http://schemas.microsoft.com/office/drawing/2014/main" id="{38FBF2D9-AC63-B9D9-9304-B19B0E331933}"/>
+              </a:ext>
+            </a:extLst>
+          </p:cNvPr>
+          <p:cNvSpPr/>
+          <p:nvPr/>
+        </p:nvSpPr>
+        <p:spPr>
+          <a:xfrm>
+            <a:off x="289517" y="2113345"/>
+            <a:ext cx="1478535" cy="395537"/>
+          </a:xfrm>
+          <a:prstGeom prst="roundRect">
+            <a:avLst/>
+          </a:prstGeom>
+        </p:spPr>
+        <p:style>
+          <a:lnRef idx="2">
+            <a:schemeClr val="accent4">
+              <a:shade val="15000"/>
+            </a:schemeClr>
+          </a:lnRef>
+          <a:fillRef idx="1">
+            <a:schemeClr val="accent4"/>
+          </a:fillRef>
+          <a:effectRef idx="0">
+            <a:schemeClr val="accent4"/>
+          </a:effectRef>
+          <a:fontRef idx="minor">
+            <a:schemeClr val="lt1"/>
+          </a:fontRef>
+        </p:style>
+        <p:txBody>
+          <a:bodyPr rtlCol="0" anchor="ctr"/>
+          <a:lstStyle/>
+          <a:p>
+            <a:pPr algn="ctr"/>
+            <a:r>
+              <a:rPr lang="en-US" dirty="0"/>
+              <a:t>Start/Trigger</a:t>
+            </a:r>
+          </a:p>
+        </p:txBody>
+      </p:sp>
+      <p:cxnSp>
+        <p:nvCxnSpPr>
+          <p:cNvPr id="65" name="Straight Connector 64">
+            <a:extLst>
+              <a:ext uri="{FF2B5EF4-FFF2-40B4-BE49-F238E27FC236}">
+                <a16:creationId xmlns:a16="http://schemas.microsoft.com/office/drawing/2014/main" id="{137BA8A1-B1E8-1F77-EC4D-17CDC0F5B15C}"/>
+              </a:ext>
+            </a:extLst>
+          </p:cNvPr>
+          <p:cNvCxnSpPr>
+            <a:cxnSpLocks/>
+            <a:stCxn id="4" idx="0"/>
+            <a:endCxn id="64" idx="2"/>
+          </p:cNvCxnSpPr>
+          <p:nvPr/>
+        </p:nvCxnSpPr>
+        <p:spPr>
+          <a:xfrm flipH="1" flipV="1">
+            <a:off x="1028785" y="2508882"/>
+            <a:ext cx="1" cy="724267"/>
+          </a:xfrm>
+          <a:prstGeom prst="line">
+            <a:avLst/>
+          </a:prstGeom>
+        </p:spPr>
+        <p:style>
+          <a:lnRef idx="2">
+            <a:schemeClr val="accent1"/>
+          </a:lnRef>
+          <a:fillRef idx="0">
+            <a:schemeClr val="accent1"/>
+          </a:fillRef>
+          <a:effectRef idx="1">
+            <a:schemeClr val="accent1"/>
+          </a:effectRef>
+          <a:fontRef idx="minor">
+            <a:schemeClr val="tx1"/>
+          </a:fontRef>
+        </p:style>
+      </p:cxnSp>
+    </p:spTree>
+    <p:extLst>
+      <p:ext uri="{BB962C8B-B14F-4D97-AF65-F5344CB8AC3E}">
+        <p14:creationId xmlns:p14="http://schemas.microsoft.com/office/powerpoint/2010/main" val="3498697860"/>
+      </p:ext>
+    </p:extLst>
+  </p:cSld>
+  <p:clrMapOvr>
+    <a:masterClrMapping/>
+  </p:clrMapOvr>
+</p:sld>
+</file>
+
+<file path=ppt/slides/slide3.xml><?xml version="1.0" encoding="utf-8"?>
 <p:sld xmlns:a="http://schemas.openxmlformats.org/drawingml/2006/main" xmlns:r="http://schemas.openxmlformats.org/officeDocument/2006/relationships" xmlns:p="http://schemas.openxmlformats.org/presentationml/2006/main">
   <p:cSld>
     <p:spTree>
@@ -4080,10 +5434,410 @@
           </a:p>
         </p:txBody>
       </p:sp>
+      <p:pic>
+        <p:nvPicPr>
+          <p:cNvPr id="2" name="Graphic 1" descr="Tree With Roots with solid fill">
+            <a:extLst>
+              <a:ext uri="{FF2B5EF4-FFF2-40B4-BE49-F238E27FC236}">
+                <a16:creationId xmlns:a16="http://schemas.microsoft.com/office/drawing/2014/main" id="{9EEE5B69-0D01-1342-8023-C60A407457F6}"/>
+              </a:ext>
+            </a:extLst>
+          </p:cNvPr>
+          <p:cNvPicPr>
+            <a:picLocks noChangeAspect="1"/>
+          </p:cNvPicPr>
+          <p:nvPr/>
+        </p:nvPicPr>
+        <p:blipFill>
+          <a:blip r:embed="rId16">
+            <a:extLst>
+              <a:ext uri="{96DAC541-7B7A-43D3-8B79-37D633B846F1}">
+                <asvg:svgBlip xmlns:asvg="http://schemas.microsoft.com/office/drawing/2016/SVG/main" r:embed="rId17"/>
+              </a:ext>
+            </a:extLst>
+          </a:blip>
+          <a:stretch>
+            <a:fillRect/>
+          </a:stretch>
+        </p:blipFill>
+        <p:spPr>
+          <a:xfrm>
+            <a:off x="9613186" y="1730918"/>
+            <a:ext cx="597613" cy="597613"/>
+          </a:xfrm>
+          <a:prstGeom prst="rect">
+            <a:avLst/>
+          </a:prstGeom>
+        </p:spPr>
+      </p:pic>
     </p:spTree>
     <p:extLst>
       <p:ext uri="{BB962C8B-B14F-4D97-AF65-F5344CB8AC3E}">
         <p14:creationId xmlns:p14="http://schemas.microsoft.com/office/powerpoint/2010/main" val="1830128469"/>
+      </p:ext>
+    </p:extLst>
+  </p:cSld>
+  <p:clrMapOvr>
+    <a:masterClrMapping/>
+  </p:clrMapOvr>
+</p:sld>
+</file>
+
+<file path=ppt/slides/slide4.xml><?xml version="1.0" encoding="utf-8"?>
+<p:sld xmlns:a="http://schemas.openxmlformats.org/drawingml/2006/main" xmlns:r="http://schemas.openxmlformats.org/officeDocument/2006/relationships" xmlns:p="http://schemas.openxmlformats.org/presentationml/2006/main">
+  <p:cSld>
+    <p:spTree>
+      <p:nvGrpSpPr>
+        <p:cNvPr id="1" name=""/>
+        <p:cNvGrpSpPr/>
+        <p:nvPr/>
+      </p:nvGrpSpPr>
+      <p:grpSpPr>
+        <a:xfrm>
+          <a:off x="0" y="0"/>
+          <a:ext cx="0" cy="0"/>
+          <a:chOff x="0" y="0"/>
+          <a:chExt cx="0" cy="0"/>
+        </a:xfrm>
+      </p:grpSpPr>
+      <p:sp>
+        <p:nvSpPr>
+          <p:cNvPr id="2" name="Title 1">
+            <a:extLst>
+              <a:ext uri="{FF2B5EF4-FFF2-40B4-BE49-F238E27FC236}">
+                <a16:creationId xmlns:a16="http://schemas.microsoft.com/office/drawing/2014/main" id="{2BFAB8F1-A9B2-174F-C7D5-E5D4E3F6B391}"/>
+              </a:ext>
+            </a:extLst>
+          </p:cNvPr>
+          <p:cNvSpPr>
+            <a:spLocks noGrp="1"/>
+          </p:cNvSpPr>
+          <p:nvPr>
+            <p:ph type="title"/>
+          </p:nvPr>
+        </p:nvSpPr>
+        <p:spPr>
+          <a:xfrm>
+            <a:off x="159799" y="136526"/>
+            <a:ext cx="11878322" cy="1463674"/>
+          </a:xfrm>
+        </p:spPr>
+        <p:txBody>
+          <a:bodyPr>
+            <a:normAutofit/>
+          </a:bodyPr>
+          <a:lstStyle/>
+          <a:p>
+            <a:r>
+              <a:rPr lang="en-US" dirty="0"/>
+              <a:t>“Whiteboarding Practice: </a:t>
+            </a:r>
+            <a:br>
+              <a:rPr lang="en-US" dirty="0"/>
+            </a:br>
+            <a:r>
+              <a:rPr lang="en-US" dirty="0"/>
+              <a:t>Palindrome? </a:t>
+            </a:r>
+          </a:p>
+        </p:txBody>
+      </p:sp>
+      <p:sp>
+        <p:nvSpPr>
+          <p:cNvPr id="16" name="TextBox 15">
+            <a:extLst>
+              <a:ext uri="{FF2B5EF4-FFF2-40B4-BE49-F238E27FC236}">
+                <a16:creationId xmlns:a16="http://schemas.microsoft.com/office/drawing/2014/main" id="{1C870719-4C5B-EC90-71E7-56E7E7FCA025}"/>
+              </a:ext>
+            </a:extLst>
+          </p:cNvPr>
+          <p:cNvSpPr txBox="1"/>
+          <p:nvPr/>
+        </p:nvSpPr>
+        <p:spPr>
+          <a:xfrm>
+            <a:off x="55001" y="2597102"/>
+            <a:ext cx="4558250" cy="2031325"/>
+          </a:xfrm>
+          <a:prstGeom prst="rect">
+            <a:avLst/>
+          </a:prstGeom>
+          <a:noFill/>
+        </p:spPr>
+        <p:txBody>
+          <a:bodyPr wrap="square" rtlCol="0">
+            <a:spAutoFit/>
+          </a:bodyPr>
+          <a:lstStyle/>
+          <a:p>
+            <a:r>
+              <a:rPr lang="en-US" dirty="0"/>
+              <a:t>Bool </a:t>
+            </a:r>
+            <a:r>
+              <a:rPr lang="en-US" dirty="0" err="1"/>
+              <a:t>IsPalindrome</a:t>
+            </a:r>
+            <a:r>
+              <a:rPr lang="en-US" dirty="0"/>
+              <a:t>(String Input)</a:t>
+            </a:r>
+          </a:p>
+          <a:p>
+            <a:r>
+              <a:rPr lang="en-US" dirty="0"/>
+              <a:t>// double pointer</a:t>
+            </a:r>
+          </a:p>
+          <a:p>
+            <a:r>
+              <a:rPr lang="en-US" dirty="0"/>
+              <a:t>For (int I = 0, I = </a:t>
+            </a:r>
+            <a:r>
+              <a:rPr lang="en-US" dirty="0" err="1"/>
+              <a:t>input.length</a:t>
+            </a:r>
+            <a:r>
+              <a:rPr lang="en-US" dirty="0"/>
+              <a:t>/2, </a:t>
+            </a:r>
+            <a:r>
+              <a:rPr lang="en-US" dirty="0" err="1"/>
+              <a:t>i</a:t>
+            </a:r>
+            <a:r>
+              <a:rPr lang="en-US" dirty="0"/>
+              <a:t>++)</a:t>
+            </a:r>
+          </a:p>
+          <a:p>
+            <a:r>
+              <a:rPr lang="en-US" dirty="0"/>
+              <a:t>	If </a:t>
+            </a:r>
+          </a:p>
+          <a:p>
+            <a:r>
+              <a:rPr lang="en-US" dirty="0"/>
+              <a:t>	(!input[</a:t>
+            </a:r>
+            <a:r>
+              <a:rPr lang="en-US" dirty="0" err="1"/>
+              <a:t>i</a:t>
+            </a:r>
+            <a:r>
+              <a:rPr lang="en-US" dirty="0"/>
+              <a:t>] = input[length-i-1])</a:t>
+            </a:r>
+          </a:p>
+          <a:p>
+            <a:r>
+              <a:rPr lang="en-US" dirty="0"/>
+              <a:t>		return false</a:t>
+            </a:r>
+          </a:p>
+          <a:p>
+            <a:r>
+              <a:rPr lang="en-US" dirty="0"/>
+              <a:t>Return true</a:t>
+            </a:r>
+          </a:p>
+        </p:txBody>
+      </p:sp>
+      <p:sp>
+        <p:nvSpPr>
+          <p:cNvPr id="18" name="TextBox 17">
+            <a:extLst>
+              <a:ext uri="{FF2B5EF4-FFF2-40B4-BE49-F238E27FC236}">
+                <a16:creationId xmlns:a16="http://schemas.microsoft.com/office/drawing/2014/main" id="{01E56274-891A-2CA0-4C4D-AC724B332AE0}"/>
+              </a:ext>
+            </a:extLst>
+          </p:cNvPr>
+          <p:cNvSpPr txBox="1"/>
+          <p:nvPr/>
+        </p:nvSpPr>
+        <p:spPr>
+          <a:xfrm>
+            <a:off x="55000" y="1600200"/>
+            <a:ext cx="11878321" cy="369332"/>
+          </a:xfrm>
+          <a:prstGeom prst="rect">
+            <a:avLst/>
+          </a:prstGeom>
+          <a:noFill/>
+        </p:spPr>
+        <p:txBody>
+          <a:bodyPr wrap="square">
+            <a:spAutoFit/>
+          </a:bodyPr>
+          <a:lstStyle/>
+          <a:p>
+            <a:r>
+              <a:rPr lang="en-US" dirty="0"/>
+              <a:t>Word the same forward and back. Does not include spaces. Capital case matches lower case.</a:t>
+            </a:r>
+          </a:p>
+        </p:txBody>
+      </p:sp>
+      <p:sp>
+        <p:nvSpPr>
+          <p:cNvPr id="19" name="TextBox 18">
+            <a:extLst>
+              <a:ext uri="{FF2B5EF4-FFF2-40B4-BE49-F238E27FC236}">
+                <a16:creationId xmlns:a16="http://schemas.microsoft.com/office/drawing/2014/main" id="{FD1200C5-FE71-CA93-78F4-AB838D5B47BA}"/>
+              </a:ext>
+            </a:extLst>
+          </p:cNvPr>
+          <p:cNvSpPr txBox="1"/>
+          <p:nvPr/>
+        </p:nvSpPr>
+        <p:spPr>
+          <a:xfrm>
+            <a:off x="6096000" y="2715699"/>
+            <a:ext cx="2394857" cy="2031325"/>
+          </a:xfrm>
+          <a:prstGeom prst="rect">
+            <a:avLst/>
+          </a:prstGeom>
+          <a:noFill/>
+        </p:spPr>
+        <p:txBody>
+          <a:bodyPr wrap="square" rtlCol="0">
+            <a:spAutoFit/>
+          </a:bodyPr>
+          <a:lstStyle/>
+          <a:p>
+            <a:r>
+              <a:rPr lang="en-US" dirty="0"/>
+              <a:t>Test Cases:</a:t>
+            </a:r>
+          </a:p>
+          <a:p>
+            <a:endParaRPr lang="en-US" dirty="0"/>
+          </a:p>
+          <a:p>
+            <a:r>
+              <a:rPr lang="en-US" dirty="0"/>
+              <a:t>Hello World!</a:t>
+            </a:r>
+          </a:p>
+          <a:p>
+            <a:endParaRPr lang="en-US" dirty="0"/>
+          </a:p>
+          <a:p>
+            <a:r>
+              <a:rPr lang="en-US" dirty="0"/>
+              <a:t>Racecar</a:t>
+            </a:r>
+          </a:p>
+          <a:p>
+            <a:endParaRPr lang="en-US" dirty="0"/>
+          </a:p>
+          <a:p>
+            <a:r>
+              <a:rPr lang="en-US" dirty="0"/>
+              <a:t>Tsunami</a:t>
+            </a:r>
+          </a:p>
+        </p:txBody>
+      </p:sp>
+      <p:sp>
+        <p:nvSpPr>
+          <p:cNvPr id="20" name="Arrow: Down 19">
+            <a:extLst>
+              <a:ext uri="{FF2B5EF4-FFF2-40B4-BE49-F238E27FC236}">
+                <a16:creationId xmlns:a16="http://schemas.microsoft.com/office/drawing/2014/main" id="{2C223210-E8FB-6C37-803D-C0C88D284756}"/>
+              </a:ext>
+            </a:extLst>
+          </p:cNvPr>
+          <p:cNvSpPr/>
+          <p:nvPr/>
+        </p:nvSpPr>
+        <p:spPr>
+          <a:xfrm>
+            <a:off x="6291270" y="3612764"/>
+            <a:ext cx="209694" cy="240631"/>
+          </a:xfrm>
+          <a:prstGeom prst="downArrow">
+            <a:avLst/>
+          </a:prstGeom>
+        </p:spPr>
+        <p:style>
+          <a:lnRef idx="2">
+            <a:schemeClr val="accent2">
+              <a:shade val="15000"/>
+            </a:schemeClr>
+          </a:lnRef>
+          <a:fillRef idx="1">
+            <a:schemeClr val="accent2"/>
+          </a:fillRef>
+          <a:effectRef idx="0">
+            <a:schemeClr val="accent2"/>
+          </a:effectRef>
+          <a:fontRef idx="minor">
+            <a:schemeClr val="lt1"/>
+          </a:fontRef>
+        </p:style>
+        <p:txBody>
+          <a:bodyPr rtlCol="0" anchor="ctr"/>
+          <a:lstStyle/>
+          <a:p>
+            <a:pPr algn="ctr"/>
+            <a:endParaRPr lang="en-US"/>
+          </a:p>
+        </p:txBody>
+      </p:sp>
+      <p:sp>
+        <p:nvSpPr>
+          <p:cNvPr id="21" name="Arrow: Down 20">
+            <a:extLst>
+              <a:ext uri="{FF2B5EF4-FFF2-40B4-BE49-F238E27FC236}">
+                <a16:creationId xmlns:a16="http://schemas.microsoft.com/office/drawing/2014/main" id="{F5FB2118-BDED-8A29-FE7A-61A7F3376254}"/>
+              </a:ext>
+            </a:extLst>
+          </p:cNvPr>
+          <p:cNvSpPr/>
+          <p:nvPr/>
+        </p:nvSpPr>
+        <p:spPr>
+          <a:xfrm>
+            <a:off x="6758788" y="3612953"/>
+            <a:ext cx="209694" cy="240631"/>
+          </a:xfrm>
+          <a:prstGeom prst="downArrow">
+            <a:avLst/>
+          </a:prstGeom>
+        </p:spPr>
+        <p:style>
+          <a:lnRef idx="2">
+            <a:schemeClr val="accent1">
+              <a:shade val="15000"/>
+            </a:schemeClr>
+          </a:lnRef>
+          <a:fillRef idx="1">
+            <a:schemeClr val="accent1"/>
+          </a:fillRef>
+          <a:effectRef idx="0">
+            <a:schemeClr val="accent1"/>
+          </a:effectRef>
+          <a:fontRef idx="minor">
+            <a:schemeClr val="lt1"/>
+          </a:fontRef>
+        </p:style>
+        <p:txBody>
+          <a:bodyPr rtlCol="0" anchor="ctr"/>
+          <a:lstStyle/>
+          <a:p>
+            <a:pPr algn="ctr"/>
+            <a:endParaRPr lang="en-US"/>
+          </a:p>
+        </p:txBody>
+      </p:sp>
+    </p:spTree>
+    <p:extLst>
+      <p:ext uri="{BB962C8B-B14F-4D97-AF65-F5344CB8AC3E}">
+        <p14:creationId xmlns:p14="http://schemas.microsoft.com/office/powerpoint/2010/main" val="4079401195"/>
       </p:ext>
     </p:extLst>
   </p:cSld>
